--- a/docs/public/course-assets/course-pptx/ov-001.pptx
+++ b/docs/public/course-assets/course-pptx/ov-001.pptx
@@ -2,24 +2,24 @@
 <file path=ppt/presentation.xml><?xml version="1.0" encoding="utf-8"?>
 <p:presentation xmlns:p="http://schemas.openxmlformats.org/presentationml/2006/main">
   <p:sldMasterIdLst>
-    <p:sldMasterId xmlns:r="http://schemas.openxmlformats.org/officeDocument/2006/relationships" id="2147483648" r:id="Rd4382b34e0df4e26"/>
+    <p:sldMasterId xmlns:r="http://schemas.openxmlformats.org/officeDocument/2006/relationships" id="2147483648" r:id="R2a0e0e6ff48044d0"/>
   </p:sldMasterIdLst>
   <p:notesMasterIdLst>
-    <p:notesMasterId xmlns:r="http://schemas.openxmlformats.org/officeDocument/2006/relationships" r:id="Rcfbaa9bf301c4d63"/>
+    <p:notesMasterId xmlns:r="http://schemas.openxmlformats.org/officeDocument/2006/relationships" r:id="R99441d0e1e334579"/>
   </p:notesMasterIdLst>
   <p:sldIdLst>
-    <p:sldId xmlns:r="http://schemas.openxmlformats.org/officeDocument/2006/relationships" id="256" r:id="R825318fa1d9d4afe"/>
-    <p:sldId xmlns:r="http://schemas.openxmlformats.org/officeDocument/2006/relationships" id="257" r:id="R541c814e60cf43f4"/>
-    <p:sldId xmlns:r="http://schemas.openxmlformats.org/officeDocument/2006/relationships" id="258" r:id="R4108edfa38c04ad3"/>
-    <p:sldId xmlns:r="http://schemas.openxmlformats.org/officeDocument/2006/relationships" id="259" r:id="Re8a50067e28d46a0"/>
-    <p:sldId xmlns:r="http://schemas.openxmlformats.org/officeDocument/2006/relationships" id="260" r:id="Rb638aba3b5394a9f"/>
-    <p:sldId xmlns:r="http://schemas.openxmlformats.org/officeDocument/2006/relationships" id="261" r:id="R10bfe609e3c24ad0"/>
-    <p:sldId xmlns:r="http://schemas.openxmlformats.org/officeDocument/2006/relationships" id="262" r:id="Rd722ec05a3964810"/>
-    <p:sldId xmlns:r="http://schemas.openxmlformats.org/officeDocument/2006/relationships" id="263" r:id="Rf98ea6ce352e4191"/>
-    <p:sldId xmlns:r="http://schemas.openxmlformats.org/officeDocument/2006/relationships" id="264" r:id="Rc0ebdecc2a254720"/>
-    <p:sldId xmlns:r="http://schemas.openxmlformats.org/officeDocument/2006/relationships" id="265" r:id="R50ed26ac75f146e9"/>
-    <p:sldId xmlns:r="http://schemas.openxmlformats.org/officeDocument/2006/relationships" id="266" r:id="Rab370e86c5444de2"/>
-    <p:sldId xmlns:r="http://schemas.openxmlformats.org/officeDocument/2006/relationships" id="267" r:id="R163da06a23354975"/>
+    <p:sldId xmlns:r="http://schemas.openxmlformats.org/officeDocument/2006/relationships" id="256" r:id="R5358f8bfc58249da"/>
+    <p:sldId xmlns:r="http://schemas.openxmlformats.org/officeDocument/2006/relationships" id="257" r:id="Rfa15180de8304abf"/>
+    <p:sldId xmlns:r="http://schemas.openxmlformats.org/officeDocument/2006/relationships" id="258" r:id="R0c1624061a43401b"/>
+    <p:sldId xmlns:r="http://schemas.openxmlformats.org/officeDocument/2006/relationships" id="259" r:id="R9fa03b38d6e946f9"/>
+    <p:sldId xmlns:r="http://schemas.openxmlformats.org/officeDocument/2006/relationships" id="260" r:id="R480037f55bf84507"/>
+    <p:sldId xmlns:r="http://schemas.openxmlformats.org/officeDocument/2006/relationships" id="261" r:id="R9a69f69872ab4603"/>
+    <p:sldId xmlns:r="http://schemas.openxmlformats.org/officeDocument/2006/relationships" id="262" r:id="R2454ebfc3e9045c2"/>
+    <p:sldId xmlns:r="http://schemas.openxmlformats.org/officeDocument/2006/relationships" id="263" r:id="R7bdb16e8edaa4de6"/>
+    <p:sldId xmlns:r="http://schemas.openxmlformats.org/officeDocument/2006/relationships" id="264" r:id="R94c332175b904186"/>
+    <p:sldId xmlns:r="http://schemas.openxmlformats.org/officeDocument/2006/relationships" id="265" r:id="Rf5fe3df6f660455e"/>
+    <p:sldId xmlns:r="http://schemas.openxmlformats.org/officeDocument/2006/relationships" id="266" r:id="R6dac947a9d0d4e99"/>
+    <p:sldId xmlns:r="http://schemas.openxmlformats.org/officeDocument/2006/relationships" id="267" r:id="R5030b8a6fa0a45e7"/>
   </p:sldIdLst>
   <p:sldSz cx="12192000" cy="6858000"/>
   <p:notesSz cx="6858000" cy="9144000"/>
@@ -1338,7 +1338,7 @@
   </p:cSld>
   <p:clrMap bg1="lt1" tx1="dk1" bg2="lt2" tx2="dk2" accent1="accent1" accent2="accent2" accent3="accent3" accent4="accent4" accent5="accent5" accent6="accent6" hlink="hlink" folHlink="folHlink"/>
   <p:sldLayoutIdLst>
-    <p:sldLayoutId xmlns:r="http://schemas.openxmlformats.org/officeDocument/2006/relationships" id="2147483649" r:id="R91c3fcb5db3e4748"/>
+    <p:sldLayoutId xmlns:r="http://schemas.openxmlformats.org/officeDocument/2006/relationships" id="2147483649" r:id="R43771ed2511f4bc9"/>
   </p:sldLayoutIdLst>
   <p:txStyles>
     <p:titleStyle>
@@ -1889,7 +1889,7 @@
           <p:cNvPr id="1" name="cover-rule">
             <a:extLst xmlns:a="http://schemas.openxmlformats.org/drawingml/2006/main">
               <a:ext uri="{FF2B5EF4-FFF2-40B4-BE49-F238E27FC236}">
-                <a16:creationId xmlns:a16="http://schemas.microsoft.com/office/drawing/2014/main" id="{F762EE25-B5B6-47A7-B5F1-31BBC2A23DC2}"/>
+                <a16:creationId xmlns:a16="http://schemas.microsoft.com/office/drawing/2014/main" id="{29B4A413-01DA-4844-A683-A8104AAF8DCC}"/>
               </a:ext>
             </a:extLst>
           </p:cNvPr>
@@ -1922,7 +1922,7 @@
           <p:cNvPr id="2" name="cover-ring-1">
             <a:extLst xmlns:a="http://schemas.openxmlformats.org/drawingml/2006/main">
               <a:ext uri="{FF2B5EF4-FFF2-40B4-BE49-F238E27FC236}">
-                <a16:creationId xmlns:a16="http://schemas.microsoft.com/office/drawing/2014/main" id="{284037B5-338F-4D68-93B5-ED47440EF98C}"/>
+                <a16:creationId xmlns:a16="http://schemas.microsoft.com/office/drawing/2014/main" id="{015D632E-03D5-41DE-A9F3-60A83705201D}"/>
               </a:ext>
             </a:extLst>
           </p:cNvPr>
@@ -1953,7 +1953,7 @@
           <p:cNvPr id="3" name="cover-ring-2">
             <a:extLst xmlns:a="http://schemas.openxmlformats.org/drawingml/2006/main">
               <a:ext uri="{FF2B5EF4-FFF2-40B4-BE49-F238E27FC236}">
-                <a16:creationId xmlns:a16="http://schemas.microsoft.com/office/drawing/2014/main" id="{0A4FFD2A-D37F-4B9E-98A1-CE4020868836}"/>
+                <a16:creationId xmlns:a16="http://schemas.microsoft.com/office/drawing/2014/main" id="{0E2A4F8C-7A12-4C99-A994-4E547C476688}"/>
               </a:ext>
             </a:extLst>
           </p:cNvPr>
@@ -1984,7 +1984,7 @@
           <p:cNvPr id="4" name="cover-core">
             <a:extLst xmlns:a="http://schemas.openxmlformats.org/drawingml/2006/main">
               <a:ext uri="{FF2B5EF4-FFF2-40B4-BE49-F238E27FC236}">
-                <a16:creationId xmlns:a16="http://schemas.microsoft.com/office/drawing/2014/main" id="{83E8CEAC-D661-439A-BD6C-799358A716C5}"/>
+                <a16:creationId xmlns:a16="http://schemas.microsoft.com/office/drawing/2014/main" id="{9309884A-390F-494D-80DF-E761B9E4883B}"/>
               </a:ext>
             </a:extLst>
           </p:cNvPr>
@@ -2017,7 +2017,7 @@
           <p:cNvPr id="5" name="cover-line-1">
             <a:extLst xmlns:a="http://schemas.openxmlformats.org/drawingml/2006/main">
               <a:ext uri="{FF2B5EF4-FFF2-40B4-BE49-F238E27FC236}">
-                <a16:creationId xmlns:a16="http://schemas.microsoft.com/office/drawing/2014/main" id="{FA63695C-43CD-457B-8DD7-8215444EE7A2}"/>
+                <a16:creationId xmlns:a16="http://schemas.microsoft.com/office/drawing/2014/main" id="{C4EA6869-3A2C-410F-BD94-ACDB4259CC49}"/>
               </a:ext>
             </a:extLst>
           </p:cNvPr>
@@ -2048,7 +2048,7 @@
           <p:cNvPr id="6" name="cover-line-2">
             <a:extLst xmlns:a="http://schemas.openxmlformats.org/drawingml/2006/main">
               <a:ext uri="{FF2B5EF4-FFF2-40B4-BE49-F238E27FC236}">
-                <a16:creationId xmlns:a16="http://schemas.microsoft.com/office/drawing/2014/main" id="{B411B1A4-ADC0-4C17-90D6-808383C98F80}"/>
+                <a16:creationId xmlns:a16="http://schemas.microsoft.com/office/drawing/2014/main" id="{F7C387BD-E7C0-4C3A-BB12-E4B03CFC9A0B}"/>
               </a:ext>
             </a:extLst>
           </p:cNvPr>
@@ -2079,7 +2079,7 @@
           <p:cNvPr id="7" name="cover-eyebrow">
             <a:extLst xmlns:a="http://schemas.openxmlformats.org/drawingml/2006/main">
               <a:ext uri="{FF2B5EF4-FFF2-40B4-BE49-F238E27FC236}">
-                <a16:creationId xmlns:a16="http://schemas.microsoft.com/office/drawing/2014/main" id="{37B29B1A-AABA-4A04-815A-6ACB77814495}"/>
+                <a16:creationId xmlns:a16="http://schemas.microsoft.com/office/drawing/2014/main" id="{9786B0AF-C952-4758-BCCE-3C5474252452}"/>
               </a:ext>
             </a:extLst>
           </p:cNvPr>
@@ -2137,7 +2137,7 @@
           <p:cNvPr id="8" name="cover-title">
             <a:extLst xmlns:a="http://schemas.openxmlformats.org/drawingml/2006/main">
               <a:ext uri="{FF2B5EF4-FFF2-40B4-BE49-F238E27FC236}">
-                <a16:creationId xmlns:a16="http://schemas.microsoft.com/office/drawing/2014/main" id="{8A2BF128-051E-4B0A-A86A-854E9C28C660}"/>
+                <a16:creationId xmlns:a16="http://schemas.microsoft.com/office/drawing/2014/main" id="{4935AC08-CE92-41A2-89A5-11EA5491EE72}"/>
               </a:ext>
             </a:extLst>
           </p:cNvPr>
@@ -2195,7 +2195,7 @@
           <p:cNvPr id="9" name="cover-subtitle">
             <a:extLst xmlns:a="http://schemas.openxmlformats.org/drawingml/2006/main">
               <a:ext uri="{FF2B5EF4-FFF2-40B4-BE49-F238E27FC236}">
-                <a16:creationId xmlns:a16="http://schemas.microsoft.com/office/drawing/2014/main" id="{1909980F-DD20-4288-99F6-ADD63E1CFDCE}"/>
+                <a16:creationId xmlns:a16="http://schemas.microsoft.com/office/drawing/2014/main" id="{5246677F-13B5-49D6-8C1F-33315F549B18}"/>
               </a:ext>
             </a:extLst>
           </p:cNvPr>
@@ -2257,7 +2257,7 @@
           <p:cNvPr id="10" name="cover-lead">
             <a:extLst xmlns:a="http://schemas.openxmlformats.org/drawingml/2006/main">
               <a:ext uri="{FF2B5EF4-FFF2-40B4-BE49-F238E27FC236}">
-                <a16:creationId xmlns:a16="http://schemas.microsoft.com/office/drawing/2014/main" id="{91FF9048-D990-4EAB-93B4-CD4D11CF8235}"/>
+                <a16:creationId xmlns:a16="http://schemas.microsoft.com/office/drawing/2014/main" id="{8CB291E9-4E28-4795-BD47-CC568A2FFE0D}"/>
               </a:ext>
             </a:extLst>
           </p:cNvPr>
@@ -2315,7 +2315,7 @@
           <p:cNvPr id="11" name="cover-course">
             <a:extLst xmlns:a="http://schemas.openxmlformats.org/drawingml/2006/main">
               <a:ext uri="{FF2B5EF4-FFF2-40B4-BE49-F238E27FC236}">
-                <a16:creationId xmlns:a16="http://schemas.microsoft.com/office/drawing/2014/main" id="{46C73F96-EB39-4F63-83C8-D6F6224E0F79}"/>
+                <a16:creationId xmlns:a16="http://schemas.microsoft.com/office/drawing/2014/main" id="{907A7143-E0A9-4FB6-A985-17E631A1ADFF}"/>
               </a:ext>
             </a:extLst>
           </p:cNvPr>
@@ -2373,7 +2373,7 @@
           <p:cNvPr id="12" name="cover-id">
             <a:extLst xmlns:a="http://schemas.openxmlformats.org/drawingml/2006/main">
               <a:ext uri="{FF2B5EF4-FFF2-40B4-BE49-F238E27FC236}">
-                <a16:creationId xmlns:a16="http://schemas.microsoft.com/office/drawing/2014/main" id="{69460A54-DF3B-45CF-B92D-81EE6A3F1D63}"/>
+                <a16:creationId xmlns:a16="http://schemas.microsoft.com/office/drawing/2014/main" id="{73271C8E-E058-403A-9225-4BF443989F29}"/>
               </a:ext>
             </a:extLst>
           </p:cNvPr>
@@ -2429,7 +2429,7 @@
     </p:spTree>
     <p:extLst>
       <p:ext uri="{BB962C8B-B14F-4D97-AF65-F5344CB8AC3E}">
-        <p14:creationId xmlns:p14="http://schemas.microsoft.com/office/powerpoint/2010/main" val="1379530854"/>
+        <p14:creationId xmlns:p14="http://schemas.microsoft.com/office/powerpoint/2010/main" val="400842416"/>
       </p:ext>
     </p:extLst>
   </p:cSld>
@@ -2460,7 +2460,7 @@
           <p:cNvPr id="1" name="s10-rule">
             <a:extLst xmlns:a="http://schemas.openxmlformats.org/drawingml/2006/main">
               <a:ext uri="{FF2B5EF4-FFF2-40B4-BE49-F238E27FC236}">
-                <a16:creationId xmlns:a16="http://schemas.microsoft.com/office/drawing/2014/main" id="{D52FC53C-D4EB-4AD9-97E5-07A6C4FA3945}"/>
+                <a16:creationId xmlns:a16="http://schemas.microsoft.com/office/drawing/2014/main" id="{33FDFE36-33A4-433E-A988-7D7DA1633B5F}"/>
               </a:ext>
             </a:extLst>
           </p:cNvPr>
@@ -2493,7 +2493,7 @@
           <p:cNvPr id="2" name="s10-eyebrow">
             <a:extLst xmlns:a="http://schemas.openxmlformats.org/drawingml/2006/main">
               <a:ext uri="{FF2B5EF4-FFF2-40B4-BE49-F238E27FC236}">
-                <a16:creationId xmlns:a16="http://schemas.microsoft.com/office/drawing/2014/main" id="{981F35FD-EFCF-493F-83D6-9905B5F8D3C1}"/>
+                <a16:creationId xmlns:a16="http://schemas.microsoft.com/office/drawing/2014/main" id="{1FF490DD-FCDC-40BC-8A22-17778280036F}"/>
               </a:ext>
             </a:extLst>
           </p:cNvPr>
@@ -2551,7 +2551,7 @@
           <p:cNvPr id="3" name="s10-title">
             <a:extLst xmlns:a="http://schemas.openxmlformats.org/drawingml/2006/main">
               <a:ext uri="{FF2B5EF4-FFF2-40B4-BE49-F238E27FC236}">
-                <a16:creationId xmlns:a16="http://schemas.microsoft.com/office/drawing/2014/main" id="{4777C412-74A4-4434-9127-E58059EEC89A}"/>
+                <a16:creationId xmlns:a16="http://schemas.microsoft.com/office/drawing/2014/main" id="{E762410C-0ACE-4BE0-A885-74434CBDD751}"/>
               </a:ext>
             </a:extLst>
           </p:cNvPr>
@@ -2599,7 +2599,7 @@
                 <a:ea typeface="PingFang SC"/>
                 <a:cs typeface="PingFang SC"/>
               </a:rPr>
-              <a:t>把方法落实为可验证的行动</a:t>
+              <a:t>人工智能：一次可验收练习</a:t>
             </a:r>
           </a:p>
         </p:txBody>
@@ -2609,7 +2609,7 @@
           <p:cNvPr id="4" name="s10-footer">
             <a:extLst xmlns:a="http://schemas.openxmlformats.org/drawingml/2006/main">
               <a:ext uri="{FF2B5EF4-FFF2-40B4-BE49-F238E27FC236}">
-                <a16:creationId xmlns:a16="http://schemas.microsoft.com/office/drawing/2014/main" id="{813E55E1-49EA-459D-B6EC-AEED5F284799}"/>
+                <a16:creationId xmlns:a16="http://schemas.microsoft.com/office/drawing/2014/main" id="{1CE37098-6A72-4757-A4D0-3D6D77B05C7E}"/>
               </a:ext>
             </a:extLst>
           </p:cNvPr>
@@ -2640,7 +2640,7 @@
           <p:cNvPr id="5" name="s10-identity">
             <a:extLst xmlns:a="http://schemas.openxmlformats.org/drawingml/2006/main">
               <a:ext uri="{FF2B5EF4-FFF2-40B4-BE49-F238E27FC236}">
-                <a16:creationId xmlns:a16="http://schemas.microsoft.com/office/drawing/2014/main" id="{181438C6-9D74-4A6A-8A87-8D7E53BF8A87}"/>
+                <a16:creationId xmlns:a16="http://schemas.microsoft.com/office/drawing/2014/main" id="{56F541A0-CE05-430B-A056-4419DBA0E2B8}"/>
               </a:ext>
             </a:extLst>
           </p:cNvPr>
@@ -2698,7 +2698,7 @@
           <p:cNvPr id="6" name="practice-circle-0">
             <a:extLst xmlns:a="http://schemas.openxmlformats.org/drawingml/2006/main">
               <a:ext uri="{FF2B5EF4-FFF2-40B4-BE49-F238E27FC236}">
-                <a16:creationId xmlns:a16="http://schemas.microsoft.com/office/drawing/2014/main" id="{E634A032-FB5F-4420-AB0E-1DEAE72AF447}"/>
+                <a16:creationId xmlns:a16="http://schemas.microsoft.com/office/drawing/2014/main" id="{2C4B47E0-6078-4061-801E-3560B7CAC312}"/>
               </a:ext>
             </a:extLst>
           </p:cNvPr>
@@ -2731,7 +2731,7 @@
           <p:cNvPr id="7" name="practice-number-0">
             <a:extLst xmlns:a="http://schemas.openxmlformats.org/drawingml/2006/main">
               <a:ext uri="{FF2B5EF4-FFF2-40B4-BE49-F238E27FC236}">
-                <a16:creationId xmlns:a16="http://schemas.microsoft.com/office/drawing/2014/main" id="{2C3F0347-CA1B-44D5-AC90-DF0E8C53143B}"/>
+                <a16:creationId xmlns:a16="http://schemas.microsoft.com/office/drawing/2014/main" id="{6F06C089-A282-4AD8-93CA-59F005FAADF1}"/>
               </a:ext>
             </a:extLst>
           </p:cNvPr>
@@ -2789,7 +2789,7 @@
           <p:cNvPr id="8" name="practice-item-0">
             <a:extLst xmlns:a="http://schemas.openxmlformats.org/drawingml/2006/main">
               <a:ext uri="{FF2B5EF4-FFF2-40B4-BE49-F238E27FC236}">
-                <a16:creationId xmlns:a16="http://schemas.microsoft.com/office/drawing/2014/main" id="{6CDDD710-F489-41B6-BFA2-683D7459CB5C}"/>
+                <a16:creationId xmlns:a16="http://schemas.microsoft.com/office/drawing/2014/main" id="{962B758A-41E6-4AF7-A6EF-5C20C0977353}"/>
               </a:ext>
             </a:extLst>
           </p:cNvPr>
@@ -2853,7 +2853,7 @@
           <p:cNvPr id="9" name="practice-connector-0">
             <a:extLst xmlns:a="http://schemas.openxmlformats.org/drawingml/2006/main">
               <a:ext uri="{FF2B5EF4-FFF2-40B4-BE49-F238E27FC236}">
-                <a16:creationId xmlns:a16="http://schemas.microsoft.com/office/drawing/2014/main" id="{0A023172-D090-4D6F-B55F-DBB7C7331949}"/>
+                <a16:creationId xmlns:a16="http://schemas.microsoft.com/office/drawing/2014/main" id="{CAC6AF87-5EF2-4924-BCE2-A9CFCB2BC730}"/>
               </a:ext>
             </a:extLst>
           </p:cNvPr>
@@ -2873,7 +2873,7 @@
           <a:noFill xmlns:a="http://schemas.openxmlformats.org/drawingml/2006/main"/>
           <a:ln xmlns:a="http://schemas.openxmlformats.org/drawingml/2006/main" w="28575">
             <a:solidFill>
-              <a:srgbClr val="D6A33A"/>
+              <a:srgbClr val="8A5A00"/>
             </a:solidFill>
             <a:prstDash val="solid"/>
           </a:ln>
@@ -2884,7 +2884,7 @@
           <p:cNvPr id="10" name="practice-circle-1">
             <a:extLst xmlns:a="http://schemas.openxmlformats.org/drawingml/2006/main">
               <a:ext uri="{FF2B5EF4-FFF2-40B4-BE49-F238E27FC236}">
-                <a16:creationId xmlns:a16="http://schemas.microsoft.com/office/drawing/2014/main" id="{DDF37D4A-9124-47F9-896F-A1E5DB41DF0D}"/>
+                <a16:creationId xmlns:a16="http://schemas.microsoft.com/office/drawing/2014/main" id="{017415C1-5E15-4BBC-B2D1-B56F58197BF9}"/>
               </a:ext>
             </a:extLst>
           </p:cNvPr>
@@ -2917,7 +2917,7 @@
           <p:cNvPr id="11" name="practice-number-1">
             <a:extLst xmlns:a="http://schemas.openxmlformats.org/drawingml/2006/main">
               <a:ext uri="{FF2B5EF4-FFF2-40B4-BE49-F238E27FC236}">
-                <a16:creationId xmlns:a16="http://schemas.microsoft.com/office/drawing/2014/main" id="{92DF397F-DA12-45A5-9C8C-12F8BD10D6E9}"/>
+                <a16:creationId xmlns:a16="http://schemas.microsoft.com/office/drawing/2014/main" id="{666FA892-18DB-47AB-A10B-B4C960728E72}"/>
               </a:ext>
             </a:extLst>
           </p:cNvPr>
@@ -2975,7 +2975,7 @@
           <p:cNvPr id="12" name="practice-item-1">
             <a:extLst xmlns:a="http://schemas.openxmlformats.org/drawingml/2006/main">
               <a:ext uri="{FF2B5EF4-FFF2-40B4-BE49-F238E27FC236}">
-                <a16:creationId xmlns:a16="http://schemas.microsoft.com/office/drawing/2014/main" id="{54BA19F7-9B56-4DDD-A3BD-D693D86CFACE}"/>
+                <a16:creationId xmlns:a16="http://schemas.microsoft.com/office/drawing/2014/main" id="{0312731B-B535-435F-8A5C-A2944E21164C}"/>
               </a:ext>
             </a:extLst>
           </p:cNvPr>
@@ -3039,7 +3039,7 @@
           <p:cNvPr id="13" name="practice-connector-1">
             <a:extLst xmlns:a="http://schemas.openxmlformats.org/drawingml/2006/main">
               <a:ext uri="{FF2B5EF4-FFF2-40B4-BE49-F238E27FC236}">
-                <a16:creationId xmlns:a16="http://schemas.microsoft.com/office/drawing/2014/main" id="{22291FEA-F8A0-446F-B821-E88BB8F7695F}"/>
+                <a16:creationId xmlns:a16="http://schemas.microsoft.com/office/drawing/2014/main" id="{0FBBBFD8-964D-4DC0-A2FC-C71A25501BA0}"/>
               </a:ext>
             </a:extLst>
           </p:cNvPr>
@@ -3059,7 +3059,7 @@
           <a:noFill xmlns:a="http://schemas.openxmlformats.org/drawingml/2006/main"/>
           <a:ln xmlns:a="http://schemas.openxmlformats.org/drawingml/2006/main" w="28575">
             <a:solidFill>
-              <a:srgbClr val="D6A33A"/>
+              <a:srgbClr val="8A5A00"/>
             </a:solidFill>
             <a:prstDash val="solid"/>
           </a:ln>
@@ -3070,7 +3070,7 @@
           <p:cNvPr id="14" name="practice-circle-2">
             <a:extLst xmlns:a="http://schemas.openxmlformats.org/drawingml/2006/main">
               <a:ext uri="{FF2B5EF4-FFF2-40B4-BE49-F238E27FC236}">
-                <a16:creationId xmlns:a16="http://schemas.microsoft.com/office/drawing/2014/main" id="{525EF2CE-4478-4035-BF8B-7AD8BF266C87}"/>
+                <a16:creationId xmlns:a16="http://schemas.microsoft.com/office/drawing/2014/main" id="{A8D0ED57-941A-4044-9BBB-40DC68C4D226}"/>
               </a:ext>
             </a:extLst>
           </p:cNvPr>
@@ -3088,7 +3088,7 @@
             <a:avLst/>
           </a:prstGeom>
           <a:solidFill xmlns:a="http://schemas.openxmlformats.org/drawingml/2006/main">
-            <a:srgbClr val="D6A33A"/>
+            <a:srgbClr val="8A5A00"/>
           </a:solidFill>
           <a:ln xmlns:a="http://schemas.openxmlformats.org/drawingml/2006/main" w="28575">
             <a:solidFill>
@@ -3103,7 +3103,7 @@
           <p:cNvPr id="15" name="practice-number-2">
             <a:extLst xmlns:a="http://schemas.openxmlformats.org/drawingml/2006/main">
               <a:ext uri="{FF2B5EF4-FFF2-40B4-BE49-F238E27FC236}">
-                <a16:creationId xmlns:a16="http://schemas.microsoft.com/office/drawing/2014/main" id="{A23EB309-EB98-440F-863A-585DFBBE04B2}"/>
+                <a16:creationId xmlns:a16="http://schemas.microsoft.com/office/drawing/2014/main" id="{605D76A0-15EF-4FC4-9A42-948665CBBB70}"/>
               </a:ext>
             </a:extLst>
           </p:cNvPr>
@@ -3161,7 +3161,7 @@
           <p:cNvPr id="16" name="practice-item-2">
             <a:extLst xmlns:a="http://schemas.openxmlformats.org/drawingml/2006/main">
               <a:ext uri="{FF2B5EF4-FFF2-40B4-BE49-F238E27FC236}">
-                <a16:creationId xmlns:a16="http://schemas.microsoft.com/office/drawing/2014/main" id="{A817B9C6-CAE7-4B9E-AC2D-5F5B8025B1E9}"/>
+                <a16:creationId xmlns:a16="http://schemas.microsoft.com/office/drawing/2014/main" id="{C24C313A-7166-43B2-BA3E-AA782B63BC3D}"/>
               </a:ext>
             </a:extLst>
           </p:cNvPr>
@@ -3185,7 +3185,7 @@
           </a:solidFill>
           <a:ln xmlns:a="http://schemas.openxmlformats.org/drawingml/2006/main" w="19050">
             <a:solidFill>
-              <a:srgbClr val="D6A33A"/>
+              <a:srgbClr val="8A5A00"/>
             </a:solidFill>
             <a:prstDash val="solid"/>
           </a:ln>
@@ -3223,7 +3223,7 @@
     </p:spTree>
     <p:extLst>
       <p:ext uri="{BB962C8B-B14F-4D97-AF65-F5344CB8AC3E}">
-        <p14:creationId xmlns:p14="http://schemas.microsoft.com/office/powerpoint/2010/main" val="619285327"/>
+        <p14:creationId xmlns:p14="http://schemas.microsoft.com/office/powerpoint/2010/main" val="986130777"/>
       </p:ext>
     </p:extLst>
   </p:cSld>
@@ -3254,7 +3254,7 @@
           <p:cNvPr id="1" name="s11-rule">
             <a:extLst xmlns:a="http://schemas.openxmlformats.org/drawingml/2006/main">
               <a:ext uri="{FF2B5EF4-FFF2-40B4-BE49-F238E27FC236}">
-                <a16:creationId xmlns:a16="http://schemas.microsoft.com/office/drawing/2014/main" id="{4AC73809-0E40-4092-8BA4-2470783B9595}"/>
+                <a16:creationId xmlns:a16="http://schemas.microsoft.com/office/drawing/2014/main" id="{52B4E367-C862-45B0-852E-43B067C5080C}"/>
               </a:ext>
             </a:extLst>
           </p:cNvPr>
@@ -3287,7 +3287,7 @@
           <p:cNvPr id="2" name="s11-eyebrow">
             <a:extLst xmlns:a="http://schemas.openxmlformats.org/drawingml/2006/main">
               <a:ext uri="{FF2B5EF4-FFF2-40B4-BE49-F238E27FC236}">
-                <a16:creationId xmlns:a16="http://schemas.microsoft.com/office/drawing/2014/main" id="{696763E6-86DA-4FFC-B8D1-FA1DC644A3EA}"/>
+                <a16:creationId xmlns:a16="http://schemas.microsoft.com/office/drawing/2014/main" id="{1EB6DCC1-9A49-4927-8C6B-ACFC01D91BB5}"/>
               </a:ext>
             </a:extLst>
           </p:cNvPr>
@@ -3345,7 +3345,7 @@
           <p:cNvPr id="3" name="s11-title">
             <a:extLst xmlns:a="http://schemas.openxmlformats.org/drawingml/2006/main">
               <a:ext uri="{FF2B5EF4-FFF2-40B4-BE49-F238E27FC236}">
-                <a16:creationId xmlns:a16="http://schemas.microsoft.com/office/drawing/2014/main" id="{9BD1D556-D9BB-448E-9D92-773C50AB0328}"/>
+                <a16:creationId xmlns:a16="http://schemas.microsoft.com/office/drawing/2014/main" id="{6A77E337-DE10-4C87-B486-94EF374D4170}"/>
               </a:ext>
             </a:extLst>
           </p:cNvPr>
@@ -3393,7 +3393,7 @@
                 <a:ea typeface="PingFang SC"/>
                 <a:cs typeface="PingFang SC"/>
               </a:rPr>
-              <a:t>带走三条可复用的判断原则</a:t>
+              <a:t>人工智能：判断时先抓住三点</a:t>
             </a:r>
           </a:p>
         </p:txBody>
@@ -3403,7 +3403,7 @@
           <p:cNvPr id="4" name="s11-footer">
             <a:extLst xmlns:a="http://schemas.openxmlformats.org/drawingml/2006/main">
               <a:ext uri="{FF2B5EF4-FFF2-40B4-BE49-F238E27FC236}">
-                <a16:creationId xmlns:a16="http://schemas.microsoft.com/office/drawing/2014/main" id="{8FC5D93B-8575-41AE-A60D-E5223FF53AFB}"/>
+                <a16:creationId xmlns:a16="http://schemas.microsoft.com/office/drawing/2014/main" id="{88B48B81-A88E-48CF-985D-164EAE77EFED}"/>
               </a:ext>
             </a:extLst>
           </p:cNvPr>
@@ -3434,7 +3434,7 @@
           <p:cNvPr id="5" name="s11-identity">
             <a:extLst xmlns:a="http://schemas.openxmlformats.org/drawingml/2006/main">
               <a:ext uri="{FF2B5EF4-FFF2-40B4-BE49-F238E27FC236}">
-                <a16:creationId xmlns:a16="http://schemas.microsoft.com/office/drawing/2014/main" id="{BE50FC64-2C3F-471B-9C54-271D03FAB96F}"/>
+                <a16:creationId xmlns:a16="http://schemas.microsoft.com/office/drawing/2014/main" id="{FDB0BF24-9E9D-4594-A7F5-A7125AC78C9D}"/>
               </a:ext>
             </a:extLst>
           </p:cNvPr>
@@ -3492,7 +3492,7 @@
           <p:cNvPr id="6" name="recap-circle-0">
             <a:extLst xmlns:a="http://schemas.openxmlformats.org/drawingml/2006/main">
               <a:ext uri="{FF2B5EF4-FFF2-40B4-BE49-F238E27FC236}">
-                <a16:creationId xmlns:a16="http://schemas.microsoft.com/office/drawing/2014/main" id="{E9E6CA52-9EC9-4C7B-A374-A9A2EA63BD87}"/>
+                <a16:creationId xmlns:a16="http://schemas.microsoft.com/office/drawing/2014/main" id="{6732B91D-1063-4BB2-A4A7-E0DC37E4A1A2}"/>
               </a:ext>
             </a:extLst>
           </p:cNvPr>
@@ -3525,7 +3525,7 @@
           <p:cNvPr id="7" name="recap-number-0">
             <a:extLst xmlns:a="http://schemas.openxmlformats.org/drawingml/2006/main">
               <a:ext uri="{FF2B5EF4-FFF2-40B4-BE49-F238E27FC236}">
-                <a16:creationId xmlns:a16="http://schemas.microsoft.com/office/drawing/2014/main" id="{47F499CA-A1A4-4B59-AAFE-23E194690D99}"/>
+                <a16:creationId xmlns:a16="http://schemas.microsoft.com/office/drawing/2014/main" id="{0B4AF07F-A332-4FD0-8E12-90F5F4E631B1}"/>
               </a:ext>
             </a:extLst>
           </p:cNvPr>
@@ -3583,7 +3583,7 @@
           <p:cNvPr id="8" name="recap-item-0">
             <a:extLst xmlns:a="http://schemas.openxmlformats.org/drawingml/2006/main">
               <a:ext uri="{FF2B5EF4-FFF2-40B4-BE49-F238E27FC236}">
-                <a16:creationId xmlns:a16="http://schemas.microsoft.com/office/drawing/2014/main" id="{1C6E8230-1B68-49EF-9233-2221F385294B}"/>
+                <a16:creationId xmlns:a16="http://schemas.microsoft.com/office/drawing/2014/main" id="{DC940BC8-B480-45B6-8FA4-F3FD20B70E52}"/>
               </a:ext>
             </a:extLst>
           </p:cNvPr>
@@ -3647,7 +3647,7 @@
           <p:cNvPr id="9" name="recap-connector-0">
             <a:extLst xmlns:a="http://schemas.openxmlformats.org/drawingml/2006/main">
               <a:ext uri="{FF2B5EF4-FFF2-40B4-BE49-F238E27FC236}">
-                <a16:creationId xmlns:a16="http://schemas.microsoft.com/office/drawing/2014/main" id="{1FCE366E-F072-4214-8BC7-19B728DEA35C}"/>
+                <a16:creationId xmlns:a16="http://schemas.microsoft.com/office/drawing/2014/main" id="{E5781B67-1CD1-4269-89FE-3A09979B581C}"/>
               </a:ext>
             </a:extLst>
           </p:cNvPr>
@@ -3667,7 +3667,7 @@
           <a:noFill xmlns:a="http://schemas.openxmlformats.org/drawingml/2006/main"/>
           <a:ln xmlns:a="http://schemas.openxmlformats.org/drawingml/2006/main" w="28575">
             <a:solidFill>
-              <a:srgbClr val="D6A33A"/>
+              <a:srgbClr val="8A5A00"/>
             </a:solidFill>
             <a:prstDash val="solid"/>
           </a:ln>
@@ -3678,7 +3678,7 @@
           <p:cNvPr id="10" name="recap-circle-1">
             <a:extLst xmlns:a="http://schemas.openxmlformats.org/drawingml/2006/main">
               <a:ext uri="{FF2B5EF4-FFF2-40B4-BE49-F238E27FC236}">
-                <a16:creationId xmlns:a16="http://schemas.microsoft.com/office/drawing/2014/main" id="{81C24B9D-5915-4DFA-BE5B-11D623AAF173}"/>
+                <a16:creationId xmlns:a16="http://schemas.microsoft.com/office/drawing/2014/main" id="{C2559151-7F17-4E01-A054-17A7F76808C7}"/>
               </a:ext>
             </a:extLst>
           </p:cNvPr>
@@ -3711,7 +3711,7 @@
           <p:cNvPr id="11" name="recap-number-1">
             <a:extLst xmlns:a="http://schemas.openxmlformats.org/drawingml/2006/main">
               <a:ext uri="{FF2B5EF4-FFF2-40B4-BE49-F238E27FC236}">
-                <a16:creationId xmlns:a16="http://schemas.microsoft.com/office/drawing/2014/main" id="{D51E25ED-A33C-4051-9B19-7C51676FE80B}"/>
+                <a16:creationId xmlns:a16="http://schemas.microsoft.com/office/drawing/2014/main" id="{1F3DAB8E-3902-4A83-A628-F81865781EB6}"/>
               </a:ext>
             </a:extLst>
           </p:cNvPr>
@@ -3769,7 +3769,7 @@
           <p:cNvPr id="12" name="recap-item-1">
             <a:extLst xmlns:a="http://schemas.openxmlformats.org/drawingml/2006/main">
               <a:ext uri="{FF2B5EF4-FFF2-40B4-BE49-F238E27FC236}">
-                <a16:creationId xmlns:a16="http://schemas.microsoft.com/office/drawing/2014/main" id="{99B19806-6AF9-40E4-98A0-4B2C8A369C4A}"/>
+                <a16:creationId xmlns:a16="http://schemas.microsoft.com/office/drawing/2014/main" id="{BA0C3D0A-5895-4B4B-91D5-D33EF28090A3}"/>
               </a:ext>
             </a:extLst>
           </p:cNvPr>
@@ -3833,7 +3833,7 @@
           <p:cNvPr id="13" name="recap-connector-1">
             <a:extLst xmlns:a="http://schemas.openxmlformats.org/drawingml/2006/main">
               <a:ext uri="{FF2B5EF4-FFF2-40B4-BE49-F238E27FC236}">
-                <a16:creationId xmlns:a16="http://schemas.microsoft.com/office/drawing/2014/main" id="{9C074510-5712-4740-A76F-6997F410709E}"/>
+                <a16:creationId xmlns:a16="http://schemas.microsoft.com/office/drawing/2014/main" id="{783E01E1-8B3A-472A-8DA3-6D5562C11A24}"/>
               </a:ext>
             </a:extLst>
           </p:cNvPr>
@@ -3853,7 +3853,7 @@
           <a:noFill xmlns:a="http://schemas.openxmlformats.org/drawingml/2006/main"/>
           <a:ln xmlns:a="http://schemas.openxmlformats.org/drawingml/2006/main" w="28575">
             <a:solidFill>
-              <a:srgbClr val="D6A33A"/>
+              <a:srgbClr val="8A5A00"/>
             </a:solidFill>
             <a:prstDash val="solid"/>
           </a:ln>
@@ -3864,7 +3864,7 @@
           <p:cNvPr id="14" name="recap-circle-2">
             <a:extLst xmlns:a="http://schemas.openxmlformats.org/drawingml/2006/main">
               <a:ext uri="{FF2B5EF4-FFF2-40B4-BE49-F238E27FC236}">
-                <a16:creationId xmlns:a16="http://schemas.microsoft.com/office/drawing/2014/main" id="{A21D8FB3-F418-42D4-A5F7-BB0BB8F9FACB}"/>
+                <a16:creationId xmlns:a16="http://schemas.microsoft.com/office/drawing/2014/main" id="{ACAEB8C2-E196-4E73-9AC2-CEA400F71D66}"/>
               </a:ext>
             </a:extLst>
           </p:cNvPr>
@@ -3882,7 +3882,7 @@
             <a:avLst/>
           </a:prstGeom>
           <a:solidFill xmlns:a="http://schemas.openxmlformats.org/drawingml/2006/main">
-            <a:srgbClr val="D6A33A"/>
+            <a:srgbClr val="8A5A00"/>
           </a:solidFill>
           <a:ln xmlns:a="http://schemas.openxmlformats.org/drawingml/2006/main" w="28575">
             <a:solidFill>
@@ -3897,7 +3897,7 @@
           <p:cNvPr id="15" name="recap-number-2">
             <a:extLst xmlns:a="http://schemas.openxmlformats.org/drawingml/2006/main">
               <a:ext uri="{FF2B5EF4-FFF2-40B4-BE49-F238E27FC236}">
-                <a16:creationId xmlns:a16="http://schemas.microsoft.com/office/drawing/2014/main" id="{E549DEC0-B9C6-4948-B778-893FD56E0226}"/>
+                <a16:creationId xmlns:a16="http://schemas.microsoft.com/office/drawing/2014/main" id="{9F38631E-DEB2-4E86-BA0A-920AE4DEFD44}"/>
               </a:ext>
             </a:extLst>
           </p:cNvPr>
@@ -3955,7 +3955,7 @@
           <p:cNvPr id="16" name="recap-item-2">
             <a:extLst xmlns:a="http://schemas.openxmlformats.org/drawingml/2006/main">
               <a:ext uri="{FF2B5EF4-FFF2-40B4-BE49-F238E27FC236}">
-                <a16:creationId xmlns:a16="http://schemas.microsoft.com/office/drawing/2014/main" id="{2D6F124A-0518-4CBE-B9FC-64C94F764019}"/>
+                <a16:creationId xmlns:a16="http://schemas.microsoft.com/office/drawing/2014/main" id="{529A5AB4-FDF4-4508-923C-80440372301A}"/>
               </a:ext>
             </a:extLst>
           </p:cNvPr>
@@ -3979,7 +3979,7 @@
           </a:solidFill>
           <a:ln xmlns:a="http://schemas.openxmlformats.org/drawingml/2006/main" w="19050">
             <a:solidFill>
-              <a:srgbClr val="D6A33A"/>
+              <a:srgbClr val="8A5A00"/>
             </a:solidFill>
             <a:prstDash val="solid"/>
           </a:ln>
@@ -4009,7 +4009,7 @@
                 <a:ea typeface="PingFang SC"/>
                 <a:cs typeface="PingFang SC"/>
               </a:rPr>
-              <a:t>图灵在《计算机器与智能》中没有直接给“机器是否真正思考”下定义</a:t>
+              <a:t>图灵测试衡量拟人表现，不能证明机器理解</a:t>
             </a:r>
           </a:p>
         </p:txBody>
@@ -4017,7 +4017,7 @@
     </p:spTree>
     <p:extLst>
       <p:ext uri="{BB962C8B-B14F-4D97-AF65-F5344CB8AC3E}">
-        <p14:creationId xmlns:p14="http://schemas.microsoft.com/office/powerpoint/2010/main" val="1099102353"/>
+        <p14:creationId xmlns:p14="http://schemas.microsoft.com/office/powerpoint/2010/main" val="1647887648"/>
       </p:ext>
     </p:extLst>
   </p:cSld>
@@ -4048,7 +4048,7 @@
           <p:cNvPr id="1" name="s12-rule">
             <a:extLst xmlns:a="http://schemas.openxmlformats.org/drawingml/2006/main">
               <a:ext uri="{FF2B5EF4-FFF2-40B4-BE49-F238E27FC236}">
-                <a16:creationId xmlns:a16="http://schemas.microsoft.com/office/drawing/2014/main" id="{A68C79E9-1CFA-4E4B-BD92-9A4AC9ED2C5B}"/>
+                <a16:creationId xmlns:a16="http://schemas.microsoft.com/office/drawing/2014/main" id="{5C1846AE-68BC-4979-9295-205E2E68210A}"/>
               </a:ext>
             </a:extLst>
           </p:cNvPr>
@@ -4081,7 +4081,7 @@
           <p:cNvPr id="2" name="s12-eyebrow">
             <a:extLst xmlns:a="http://schemas.openxmlformats.org/drawingml/2006/main">
               <a:ext uri="{FF2B5EF4-FFF2-40B4-BE49-F238E27FC236}">
-                <a16:creationId xmlns:a16="http://schemas.microsoft.com/office/drawing/2014/main" id="{3722E02F-5401-428F-949C-6366DCDE5F18}"/>
+                <a16:creationId xmlns:a16="http://schemas.microsoft.com/office/drawing/2014/main" id="{F612A2AF-C87E-4B65-8F19-3D5AB69F1703}"/>
               </a:ext>
             </a:extLst>
           </p:cNvPr>
@@ -4139,7 +4139,7 @@
           <p:cNvPr id="3" name="s12-title">
             <a:extLst xmlns:a="http://schemas.openxmlformats.org/drawingml/2006/main">
               <a:ext uri="{FF2B5EF4-FFF2-40B4-BE49-F238E27FC236}">
-                <a16:creationId xmlns:a16="http://schemas.microsoft.com/office/drawing/2014/main" id="{DDAFDD76-A836-46A7-8749-7C280ACBABCD}"/>
+                <a16:creationId xmlns:a16="http://schemas.microsoft.com/office/drawing/2014/main" id="{0A207342-1E4C-447C-805F-F553E5550C64}"/>
               </a:ext>
             </a:extLst>
           </p:cNvPr>
@@ -4187,7 +4187,7 @@
                 <a:ea typeface="PingFang SC"/>
                 <a:cs typeface="PingFang SC"/>
               </a:rPr>
-              <a:t>从公开重制课件回到可核对的学习资料</a:t>
+              <a:t>人工智能：依据、边界与延伸</a:t>
             </a:r>
           </a:p>
         </p:txBody>
@@ -4197,7 +4197,7 @@
           <p:cNvPr id="4" name="s12-footer">
             <a:extLst xmlns:a="http://schemas.openxmlformats.org/drawingml/2006/main">
               <a:ext uri="{FF2B5EF4-FFF2-40B4-BE49-F238E27FC236}">
-                <a16:creationId xmlns:a16="http://schemas.microsoft.com/office/drawing/2014/main" id="{EFAAA86C-945A-48DE-A994-84952F21E7D3}"/>
+                <a16:creationId xmlns:a16="http://schemas.microsoft.com/office/drawing/2014/main" id="{B59C545E-CFF6-4169-81C0-B5C4165785D0}"/>
               </a:ext>
             </a:extLst>
           </p:cNvPr>
@@ -4228,7 +4228,7 @@
           <p:cNvPr id="5" name="s12-identity">
             <a:extLst xmlns:a="http://schemas.openxmlformats.org/drawingml/2006/main">
               <a:ext uri="{FF2B5EF4-FFF2-40B4-BE49-F238E27FC236}">
-                <a16:creationId xmlns:a16="http://schemas.microsoft.com/office/drawing/2014/main" id="{7617DEDC-AE70-40D5-85E9-658C3AC1C9FF}"/>
+                <a16:creationId xmlns:a16="http://schemas.microsoft.com/office/drawing/2014/main" id="{6F359B6E-401F-4346-9E6B-DC9530228374}"/>
               </a:ext>
             </a:extLst>
           </p:cNvPr>
@@ -4286,7 +4286,7 @@
           <p:cNvPr id="6" name="source-0">
             <a:extLst xmlns:a="http://schemas.openxmlformats.org/drawingml/2006/main">
               <a:ext uri="{FF2B5EF4-FFF2-40B4-BE49-F238E27FC236}">
-                <a16:creationId xmlns:a16="http://schemas.microsoft.com/office/drawing/2014/main" id="{F636397F-BBF2-41ED-A634-5FF17061F68D}"/>
+                <a16:creationId xmlns:a16="http://schemas.microsoft.com/office/drawing/2014/main" id="{A5D63F11-1FB7-443A-A4CF-2A3935AD647B}"/>
               </a:ext>
             </a:extLst>
           </p:cNvPr>
@@ -4310,7 +4310,7 @@
           </a:solidFill>
           <a:ln xmlns:a="http://schemas.openxmlformats.org/drawingml/2006/main" w="9525">
             <a:solidFill>
-              <a:srgbClr val="D6A33A"/>
+              <a:srgbClr val="8A5A00"/>
             </a:solidFill>
             <a:prstDash val="solid"/>
           </a:ln>
@@ -4350,7 +4350,7 @@
           <p:cNvPr id="7" name="source-1">
             <a:extLst xmlns:a="http://schemas.openxmlformats.org/drawingml/2006/main">
               <a:ext uri="{FF2B5EF4-FFF2-40B4-BE49-F238E27FC236}">
-                <a16:creationId xmlns:a16="http://schemas.microsoft.com/office/drawing/2014/main" id="{CF3DA764-DD63-4BC2-87B9-D7686A717799}"/>
+                <a16:creationId xmlns:a16="http://schemas.microsoft.com/office/drawing/2014/main" id="{8FADDDAB-9635-49FA-858F-D93C057F73E0}"/>
               </a:ext>
             </a:extLst>
           </p:cNvPr>
@@ -4414,7 +4414,7 @@
           <p:cNvPr id="8" name="source-2">
             <a:extLst xmlns:a="http://schemas.openxmlformats.org/drawingml/2006/main">
               <a:ext uri="{FF2B5EF4-FFF2-40B4-BE49-F238E27FC236}">
-                <a16:creationId xmlns:a16="http://schemas.microsoft.com/office/drawing/2014/main" id="{D50AAA0D-8788-4C3A-9E24-88DC673769B0}"/>
+                <a16:creationId xmlns:a16="http://schemas.microsoft.com/office/drawing/2014/main" id="{514BE7C3-D8FF-4385-A9C2-BEB0DC5AF3E6}"/>
               </a:ext>
             </a:extLst>
           </p:cNvPr>
@@ -4478,7 +4478,7 @@
           <p:cNvPr id="9" name="s12-takeaway-rule">
             <a:extLst xmlns:a="http://schemas.openxmlformats.org/drawingml/2006/main">
               <a:ext uri="{FF2B5EF4-FFF2-40B4-BE49-F238E27FC236}">
-                <a16:creationId xmlns:a16="http://schemas.microsoft.com/office/drawing/2014/main" id="{71E47A74-10CF-4B11-8CC9-8769EE068728}"/>
+                <a16:creationId xmlns:a16="http://schemas.microsoft.com/office/drawing/2014/main" id="{84042574-01A4-4709-AE5F-17D10E884494}"/>
               </a:ext>
             </a:extLst>
           </p:cNvPr>
@@ -4511,7 +4511,7 @@
           <p:cNvPr id="10" name="s12-takeaway">
             <a:extLst xmlns:a="http://schemas.openxmlformats.org/drawingml/2006/main">
               <a:ext uri="{FF2B5EF4-FFF2-40B4-BE49-F238E27FC236}">
-                <a16:creationId xmlns:a16="http://schemas.microsoft.com/office/drawing/2014/main" id="{30E5EB22-E8A7-4AD1-941B-D1979F17B245}"/>
+                <a16:creationId xmlns:a16="http://schemas.microsoft.com/office/drawing/2014/main" id="{5631A251-C0BD-4A0F-B90D-09BF5E42DB2B}"/>
               </a:ext>
             </a:extLst>
           </p:cNvPr>
@@ -4567,7 +4567,7 @@
     </p:spTree>
     <p:extLst>
       <p:ext uri="{BB962C8B-B14F-4D97-AF65-F5344CB8AC3E}">
-        <p14:creationId xmlns:p14="http://schemas.microsoft.com/office/powerpoint/2010/main" val="229897501"/>
+        <p14:creationId xmlns:p14="http://schemas.microsoft.com/office/powerpoint/2010/main" val="1014622029"/>
       </p:ext>
     </p:extLst>
   </p:cSld>
@@ -4598,7 +4598,7 @@
           <p:cNvPr id="1" name="s2-rule">
             <a:extLst xmlns:a="http://schemas.openxmlformats.org/drawingml/2006/main">
               <a:ext uri="{FF2B5EF4-FFF2-40B4-BE49-F238E27FC236}">
-                <a16:creationId xmlns:a16="http://schemas.microsoft.com/office/drawing/2014/main" id="{71A473CF-12B9-44E0-85ED-E664D05D72D6}"/>
+                <a16:creationId xmlns:a16="http://schemas.microsoft.com/office/drawing/2014/main" id="{79DAF940-D282-4479-8347-B11456A37467}"/>
               </a:ext>
             </a:extLst>
           </p:cNvPr>
@@ -4631,7 +4631,7 @@
           <p:cNvPr id="2" name="s2-eyebrow">
             <a:extLst xmlns:a="http://schemas.openxmlformats.org/drawingml/2006/main">
               <a:ext uri="{FF2B5EF4-FFF2-40B4-BE49-F238E27FC236}">
-                <a16:creationId xmlns:a16="http://schemas.microsoft.com/office/drawing/2014/main" id="{57DE5046-1E69-435E-9104-DA99056E93CC}"/>
+                <a16:creationId xmlns:a16="http://schemas.microsoft.com/office/drawing/2014/main" id="{D3AD6E01-9FCF-4E7F-8299-30FF316D1006}"/>
               </a:ext>
             </a:extLst>
           </p:cNvPr>
@@ -4689,7 +4689,7 @@
           <p:cNvPr id="3" name="s2-title">
             <a:extLst xmlns:a="http://schemas.openxmlformats.org/drawingml/2006/main">
               <a:ext uri="{FF2B5EF4-FFF2-40B4-BE49-F238E27FC236}">
-                <a16:creationId xmlns:a16="http://schemas.microsoft.com/office/drawing/2014/main" id="{7C0C453C-C8AA-4A9F-9A55-582094739DBF}"/>
+                <a16:creationId xmlns:a16="http://schemas.microsoft.com/office/drawing/2014/main" id="{A9FD6756-81C0-4246-96CB-BD26E056A763}"/>
               </a:ext>
             </a:extLst>
           </p:cNvPr>
@@ -4737,7 +4737,7 @@
                 <a:ea typeface="PingFang SC"/>
                 <a:cs typeface="PingFang SC"/>
               </a:rPr>
-              <a:t>学完这一节，你能完成这些判断与行动</a:t>
+              <a:t>人工智能：3项学习结果</a:t>
             </a:r>
           </a:p>
         </p:txBody>
@@ -4747,7 +4747,7 @@
           <p:cNvPr id="4" name="s2-footer">
             <a:extLst xmlns:a="http://schemas.openxmlformats.org/drawingml/2006/main">
               <a:ext uri="{FF2B5EF4-FFF2-40B4-BE49-F238E27FC236}">
-                <a16:creationId xmlns:a16="http://schemas.microsoft.com/office/drawing/2014/main" id="{1D4910D8-A35D-4EFC-A8D1-57D5A982BE52}"/>
+                <a16:creationId xmlns:a16="http://schemas.microsoft.com/office/drawing/2014/main" id="{55625414-FBC2-4DA1-9106-63046D285CB3}"/>
               </a:ext>
             </a:extLst>
           </p:cNvPr>
@@ -4778,7 +4778,7 @@
           <p:cNvPr id="5" name="s2-identity">
             <a:extLst xmlns:a="http://schemas.openxmlformats.org/drawingml/2006/main">
               <a:ext uri="{FF2B5EF4-FFF2-40B4-BE49-F238E27FC236}">
-                <a16:creationId xmlns:a16="http://schemas.microsoft.com/office/drawing/2014/main" id="{B4C63E8D-7F7A-4437-B3E7-061663EACF25}"/>
+                <a16:creationId xmlns:a16="http://schemas.microsoft.com/office/drawing/2014/main" id="{ABF830B4-2270-4615-9592-24BE58A028C7}"/>
               </a:ext>
             </a:extLst>
           </p:cNvPr>
@@ -4836,7 +4836,7 @@
           <p:cNvPr id="6" name="objective-1">
             <a:extLst xmlns:a="http://schemas.openxmlformats.org/drawingml/2006/main">
               <a:ext uri="{FF2B5EF4-FFF2-40B4-BE49-F238E27FC236}">
-                <a16:creationId xmlns:a16="http://schemas.microsoft.com/office/drawing/2014/main" id="{88F4B295-7AC8-4E94-9C27-286EA202449B}"/>
+                <a16:creationId xmlns:a16="http://schemas.microsoft.com/office/drawing/2014/main" id="{9B064D5E-2A85-4FA3-AF13-E160C4C0C8F3}"/>
               </a:ext>
             </a:extLst>
           </p:cNvPr>
@@ -4923,7 +4923,7 @@
           <p:cNvPr id="7" name="objective-2">
             <a:extLst xmlns:a="http://schemas.openxmlformats.org/drawingml/2006/main">
               <a:ext uri="{FF2B5EF4-FFF2-40B4-BE49-F238E27FC236}">
-                <a16:creationId xmlns:a16="http://schemas.microsoft.com/office/drawing/2014/main" id="{708EE5E6-D8A0-4BB7-9F79-0203D4FC7043}"/>
+                <a16:creationId xmlns:a16="http://schemas.microsoft.com/office/drawing/2014/main" id="{8AE91D3A-2E70-4A65-828A-6694220D3CB9}"/>
               </a:ext>
             </a:extLst>
           </p:cNvPr>
@@ -5010,7 +5010,7 @@
           <p:cNvPr id="8" name="objective-3">
             <a:extLst xmlns:a="http://schemas.openxmlformats.org/drawingml/2006/main">
               <a:ext uri="{FF2B5EF4-FFF2-40B4-BE49-F238E27FC236}">
-                <a16:creationId xmlns:a16="http://schemas.microsoft.com/office/drawing/2014/main" id="{E240BB32-2A3B-4347-A88C-1F556ACC54E5}"/>
+                <a16:creationId xmlns:a16="http://schemas.microsoft.com/office/drawing/2014/main" id="{41CE8993-55CF-4A6D-A074-32841EE5967C}"/>
               </a:ext>
             </a:extLst>
           </p:cNvPr>
@@ -5034,7 +5034,7 @@
           </a:solidFill>
           <a:ln xmlns:a="http://schemas.openxmlformats.org/drawingml/2006/main" w="19050">
             <a:solidFill>
-              <a:srgbClr val="D6A33A"/>
+              <a:srgbClr val="8A5A00"/>
             </a:solidFill>
             <a:prstDash val="solid"/>
           </a:ln>
@@ -5095,7 +5095,7 @@
     </p:spTree>
     <p:extLst>
       <p:ext uri="{BB962C8B-B14F-4D97-AF65-F5344CB8AC3E}">
-        <p14:creationId xmlns:p14="http://schemas.microsoft.com/office/powerpoint/2010/main" val="1500289889"/>
+        <p14:creationId xmlns:p14="http://schemas.microsoft.com/office/powerpoint/2010/main" val="1529144320"/>
       </p:ext>
     </p:extLst>
   </p:cSld>
@@ -5126,7 +5126,7 @@
           <p:cNvPr id="1" name="s3-rule">
             <a:extLst xmlns:a="http://schemas.openxmlformats.org/drawingml/2006/main">
               <a:ext uri="{FF2B5EF4-FFF2-40B4-BE49-F238E27FC236}">
-                <a16:creationId xmlns:a16="http://schemas.microsoft.com/office/drawing/2014/main" id="{E4A5EA23-D6B5-4D41-9859-CEEAA89E9B64}"/>
+                <a16:creationId xmlns:a16="http://schemas.microsoft.com/office/drawing/2014/main" id="{0825EE88-821D-416D-BA60-B76C6D4A065A}"/>
               </a:ext>
             </a:extLst>
           </p:cNvPr>
@@ -5159,7 +5159,7 @@
           <p:cNvPr id="2" name="s3-eyebrow">
             <a:extLst xmlns:a="http://schemas.openxmlformats.org/drawingml/2006/main">
               <a:ext uri="{FF2B5EF4-FFF2-40B4-BE49-F238E27FC236}">
-                <a16:creationId xmlns:a16="http://schemas.microsoft.com/office/drawing/2014/main" id="{90A1551A-DFF7-4579-86A0-078495744933}"/>
+                <a16:creationId xmlns:a16="http://schemas.microsoft.com/office/drawing/2014/main" id="{64988E11-C980-4B86-BE96-B286EF1DF785}"/>
               </a:ext>
             </a:extLst>
           </p:cNvPr>
@@ -5217,7 +5217,7 @@
           <p:cNvPr id="3" name="s3-title">
             <a:extLst xmlns:a="http://schemas.openxmlformats.org/drawingml/2006/main">
               <a:ext uri="{FF2B5EF4-FFF2-40B4-BE49-F238E27FC236}">
-                <a16:creationId xmlns:a16="http://schemas.microsoft.com/office/drawing/2014/main" id="{3A29B446-E421-4695-A916-57EDAA579D83}"/>
+                <a16:creationId xmlns:a16="http://schemas.microsoft.com/office/drawing/2014/main" id="{AD281FFA-1D54-4648-9909-B7405EA3F506}"/>
               </a:ext>
             </a:extLst>
           </p:cNvPr>
@@ -5275,7 +5275,7 @@
           <p:cNvPr id="4" name="s3-footer">
             <a:extLst xmlns:a="http://schemas.openxmlformats.org/drawingml/2006/main">
               <a:ext uri="{FF2B5EF4-FFF2-40B4-BE49-F238E27FC236}">
-                <a16:creationId xmlns:a16="http://schemas.microsoft.com/office/drawing/2014/main" id="{10158D5D-8741-4A64-89DD-27F3C42FD177}"/>
+                <a16:creationId xmlns:a16="http://schemas.microsoft.com/office/drawing/2014/main" id="{D4E8E145-CA3D-4A9D-9FFB-9519DF1CD810}"/>
               </a:ext>
             </a:extLst>
           </p:cNvPr>
@@ -5306,7 +5306,7 @@
           <p:cNvPr id="5" name="s3-identity">
             <a:extLst xmlns:a="http://schemas.openxmlformats.org/drawingml/2006/main">
               <a:ext uri="{FF2B5EF4-FFF2-40B4-BE49-F238E27FC236}">
-                <a16:creationId xmlns:a16="http://schemas.microsoft.com/office/drawing/2014/main" id="{43150FC8-2665-49C5-9942-C2AE4730DFD4}"/>
+                <a16:creationId xmlns:a16="http://schemas.microsoft.com/office/drawing/2014/main" id="{D7FA5258-3C40-4179-B49F-3D0F2E34FF45}"/>
               </a:ext>
             </a:extLst>
           </p:cNvPr>
@@ -5364,7 +5364,7 @@
           <p:cNvPr id="6" name="core-no-0">
             <a:extLst xmlns:a="http://schemas.openxmlformats.org/drawingml/2006/main">
               <a:ext uri="{FF2B5EF4-FFF2-40B4-BE49-F238E27FC236}">
-                <a16:creationId xmlns:a16="http://schemas.microsoft.com/office/drawing/2014/main" id="{1492D808-0C00-4BCB-AB36-F0272FACD294}"/>
+                <a16:creationId xmlns:a16="http://schemas.microsoft.com/office/drawing/2014/main" id="{4CE5ECCD-3A47-491C-B0D2-9859C1A61FEA}"/>
               </a:ext>
             </a:extLst>
           </p:cNvPr>
@@ -5396,7 +5396,7 @@
             <a:pPr algn="l">
               <a:defRPr sz="2250" b="1">
                 <a:solidFill>
-                  <a:srgbClr val="D6A33A"/>
+                  <a:srgbClr val="8A5A00"/>
                 </a:solidFill>
                 <a:latin typeface="PingFang SC"/>
                 <a:ea typeface="PingFang SC"/>
@@ -5406,7 +5406,7 @@
             <a:r>
               <a:rPr sz="2250" b="1">
                 <a:solidFill>
-                  <a:srgbClr val="D6A33A"/>
+                  <a:srgbClr val="8A5A00"/>
                 </a:solidFill>
                 <a:latin typeface="PingFang SC"/>
                 <a:ea typeface="PingFang SC"/>
@@ -5422,7 +5422,7 @@
           <p:cNvPr id="7" name="core-label-0">
             <a:extLst xmlns:a="http://schemas.openxmlformats.org/drawingml/2006/main">
               <a:ext uri="{FF2B5EF4-FFF2-40B4-BE49-F238E27FC236}">
-                <a16:creationId xmlns:a16="http://schemas.microsoft.com/office/drawing/2014/main" id="{9BFBCDFB-107F-40D6-901B-CE8052901F3E}"/>
+                <a16:creationId xmlns:a16="http://schemas.microsoft.com/office/drawing/2014/main" id="{92BCB44D-C4C0-4C55-8C54-F8B35F9B9C48}"/>
               </a:ext>
             </a:extLst>
           </p:cNvPr>
@@ -5480,7 +5480,7 @@
           <p:cNvPr id="8" name="core-body-0">
             <a:extLst xmlns:a="http://schemas.openxmlformats.org/drawingml/2006/main">
               <a:ext uri="{FF2B5EF4-FFF2-40B4-BE49-F238E27FC236}">
-                <a16:creationId xmlns:a16="http://schemas.microsoft.com/office/drawing/2014/main" id="{9C2F0BBB-B4C6-4E94-A125-EDD55DF35D51}"/>
+                <a16:creationId xmlns:a16="http://schemas.microsoft.com/office/drawing/2014/main" id="{94A1F073-8795-4EC5-BDFC-9928FC661A90}"/>
               </a:ext>
             </a:extLst>
           </p:cNvPr>
@@ -5504,7 +5504,7 @@
           </a:solidFill>
           <a:ln xmlns:a="http://schemas.openxmlformats.org/drawingml/2006/main" w="19050">
             <a:solidFill>
-              <a:srgbClr val="D6A33A"/>
+              <a:srgbClr val="8A5A00"/>
             </a:solidFill>
             <a:prstDash val="solid"/>
           </a:ln>
@@ -5544,7 +5544,7 @@
           <p:cNvPr id="9" name="core-no-1">
             <a:extLst xmlns:a="http://schemas.openxmlformats.org/drawingml/2006/main">
               <a:ext uri="{FF2B5EF4-FFF2-40B4-BE49-F238E27FC236}">
-                <a16:creationId xmlns:a16="http://schemas.microsoft.com/office/drawing/2014/main" id="{23C5B1A3-AB6F-4D0C-A7CE-56B46B6F1481}"/>
+                <a16:creationId xmlns:a16="http://schemas.microsoft.com/office/drawing/2014/main" id="{A020DABF-838F-402E-99EB-7A4B5949F768}"/>
               </a:ext>
             </a:extLst>
           </p:cNvPr>
@@ -5576,7 +5576,7 @@
             <a:pPr algn="l">
               <a:defRPr sz="2250" b="1">
                 <a:solidFill>
-                  <a:srgbClr val="D6A33A"/>
+                  <a:srgbClr val="8A5A00"/>
                 </a:solidFill>
                 <a:latin typeface="PingFang SC"/>
                 <a:ea typeface="PingFang SC"/>
@@ -5586,7 +5586,7 @@
             <a:r>
               <a:rPr sz="2250" b="1">
                 <a:solidFill>
-                  <a:srgbClr val="D6A33A"/>
+                  <a:srgbClr val="8A5A00"/>
                 </a:solidFill>
                 <a:latin typeface="PingFang SC"/>
                 <a:ea typeface="PingFang SC"/>
@@ -5602,7 +5602,7 @@
           <p:cNvPr id="10" name="core-body-1">
             <a:extLst xmlns:a="http://schemas.openxmlformats.org/drawingml/2006/main">
               <a:ext uri="{FF2B5EF4-FFF2-40B4-BE49-F238E27FC236}">
-                <a16:creationId xmlns:a16="http://schemas.microsoft.com/office/drawing/2014/main" id="{41FFD580-A6CD-4D62-AF4C-4A89E8719998}"/>
+                <a16:creationId xmlns:a16="http://schemas.microsoft.com/office/drawing/2014/main" id="{53A0543A-C6D3-4480-A005-109AD13D5852}"/>
               </a:ext>
             </a:extLst>
           </p:cNvPr>
@@ -5666,7 +5666,7 @@
           <p:cNvPr id="11" name="core-no-2">
             <a:extLst xmlns:a="http://schemas.openxmlformats.org/drawingml/2006/main">
               <a:ext uri="{FF2B5EF4-FFF2-40B4-BE49-F238E27FC236}">
-                <a16:creationId xmlns:a16="http://schemas.microsoft.com/office/drawing/2014/main" id="{97F01868-7B4C-4581-A3AA-58046E80B7A9}"/>
+                <a16:creationId xmlns:a16="http://schemas.microsoft.com/office/drawing/2014/main" id="{516ECB64-1A9C-4503-B8EF-3A566B448851}"/>
               </a:ext>
             </a:extLst>
           </p:cNvPr>
@@ -5698,7 +5698,7 @@
             <a:pPr algn="l">
               <a:defRPr sz="2250" b="1">
                 <a:solidFill>
-                  <a:srgbClr val="D6A33A"/>
+                  <a:srgbClr val="8A5A00"/>
                 </a:solidFill>
                 <a:latin typeface="PingFang SC"/>
                 <a:ea typeface="PingFang SC"/>
@@ -5708,7 +5708,7 @@
             <a:r>
               <a:rPr sz="2250" b="1">
                 <a:solidFill>
-                  <a:srgbClr val="D6A33A"/>
+                  <a:srgbClr val="8A5A00"/>
                 </a:solidFill>
                 <a:latin typeface="PingFang SC"/>
                 <a:ea typeface="PingFang SC"/>
@@ -5724,7 +5724,7 @@
           <p:cNvPr id="12" name="core-body-2">
             <a:extLst xmlns:a="http://schemas.openxmlformats.org/drawingml/2006/main">
               <a:ext uri="{FF2B5EF4-FFF2-40B4-BE49-F238E27FC236}">
-                <a16:creationId xmlns:a16="http://schemas.microsoft.com/office/drawing/2014/main" id="{BFAB1C2C-3EDB-4C19-BB0F-BB7F05F7922B}"/>
+                <a16:creationId xmlns:a16="http://schemas.microsoft.com/office/drawing/2014/main" id="{22200695-DC9C-47CF-BD61-4B2760B3B100}"/>
               </a:ext>
             </a:extLst>
           </p:cNvPr>
@@ -5788,7 +5788,7 @@
           <p:cNvPr id="13" name="s3-takeaway-rule">
             <a:extLst xmlns:a="http://schemas.openxmlformats.org/drawingml/2006/main">
               <a:ext uri="{FF2B5EF4-FFF2-40B4-BE49-F238E27FC236}">
-                <a16:creationId xmlns:a16="http://schemas.microsoft.com/office/drawing/2014/main" id="{E636FD66-3F0E-4427-9D37-2389C5945A3B}"/>
+                <a16:creationId xmlns:a16="http://schemas.microsoft.com/office/drawing/2014/main" id="{E7BEAFDF-1FAC-47CA-AE07-404AD40048BB}"/>
               </a:ext>
             </a:extLst>
           </p:cNvPr>
@@ -5821,7 +5821,7 @@
           <p:cNvPr id="14" name="s3-takeaway">
             <a:extLst xmlns:a="http://schemas.openxmlformats.org/drawingml/2006/main">
               <a:ext uri="{FF2B5EF4-FFF2-40B4-BE49-F238E27FC236}">
-                <a16:creationId xmlns:a16="http://schemas.microsoft.com/office/drawing/2014/main" id="{F26A57E0-7A43-41B8-B3C4-F7C64973323C}"/>
+                <a16:creationId xmlns:a16="http://schemas.microsoft.com/office/drawing/2014/main" id="{005AFE91-333C-47BB-95B8-B807528FA684}"/>
               </a:ext>
             </a:extLst>
           </p:cNvPr>
@@ -5877,7 +5877,7 @@
     </p:spTree>
     <p:extLst>
       <p:ext uri="{BB962C8B-B14F-4D97-AF65-F5344CB8AC3E}">
-        <p14:creationId xmlns:p14="http://schemas.microsoft.com/office/powerpoint/2010/main" val="565363444"/>
+        <p14:creationId xmlns:p14="http://schemas.microsoft.com/office/powerpoint/2010/main" val="129541963"/>
       </p:ext>
     </p:extLst>
   </p:cSld>
@@ -5908,7 +5908,7 @@
           <p:cNvPr id="1" name="s4-rule">
             <a:extLst xmlns:a="http://schemas.openxmlformats.org/drawingml/2006/main">
               <a:ext uri="{FF2B5EF4-FFF2-40B4-BE49-F238E27FC236}">
-                <a16:creationId xmlns:a16="http://schemas.microsoft.com/office/drawing/2014/main" id="{10C02902-AC53-4F26-8FDE-FA8881C2DD98}"/>
+                <a16:creationId xmlns:a16="http://schemas.microsoft.com/office/drawing/2014/main" id="{C345B327-832C-4760-BF72-47EC1293886D}"/>
               </a:ext>
             </a:extLst>
           </p:cNvPr>
@@ -5941,7 +5941,7 @@
           <p:cNvPr id="2" name="s4-eyebrow">
             <a:extLst xmlns:a="http://schemas.openxmlformats.org/drawingml/2006/main">
               <a:ext uri="{FF2B5EF4-FFF2-40B4-BE49-F238E27FC236}">
-                <a16:creationId xmlns:a16="http://schemas.microsoft.com/office/drawing/2014/main" id="{BF6F1E34-38C4-429A-AFA4-04A32F524B1F}"/>
+                <a16:creationId xmlns:a16="http://schemas.microsoft.com/office/drawing/2014/main" id="{E7BA5CA6-997C-4907-AF13-50D1AE207F47}"/>
               </a:ext>
             </a:extLst>
           </p:cNvPr>
@@ -5999,7 +5999,7 @@
           <p:cNvPr id="3" name="s4-title">
             <a:extLst xmlns:a="http://schemas.openxmlformats.org/drawingml/2006/main">
               <a:ext uri="{FF2B5EF4-FFF2-40B4-BE49-F238E27FC236}">
-                <a16:creationId xmlns:a16="http://schemas.microsoft.com/office/drawing/2014/main" id="{2422D557-2777-4276-A29B-640C5AD1F9A0}"/>
+                <a16:creationId xmlns:a16="http://schemas.microsoft.com/office/drawing/2014/main" id="{95C8AE43-2389-46E5-8029-3DF518244C46}"/>
               </a:ext>
             </a:extLst>
           </p:cNvPr>
@@ -6057,7 +6057,7 @@
           <p:cNvPr id="4" name="s4-footer">
             <a:extLst xmlns:a="http://schemas.openxmlformats.org/drawingml/2006/main">
               <a:ext uri="{FF2B5EF4-FFF2-40B4-BE49-F238E27FC236}">
-                <a16:creationId xmlns:a16="http://schemas.microsoft.com/office/drawing/2014/main" id="{E2004A1E-28B6-408A-8874-DB1327CCBEFC}"/>
+                <a16:creationId xmlns:a16="http://schemas.microsoft.com/office/drawing/2014/main" id="{BAB68C64-99AC-4F9B-8056-7F1D1E473639}"/>
               </a:ext>
             </a:extLst>
           </p:cNvPr>
@@ -6088,7 +6088,7 @@
           <p:cNvPr id="5" name="s4-identity">
             <a:extLst xmlns:a="http://schemas.openxmlformats.org/drawingml/2006/main">
               <a:ext uri="{FF2B5EF4-FFF2-40B4-BE49-F238E27FC236}">
-                <a16:creationId xmlns:a16="http://schemas.microsoft.com/office/drawing/2014/main" id="{B561D31B-5B78-464C-954B-267AA5651DE8}"/>
+                <a16:creationId xmlns:a16="http://schemas.microsoft.com/office/drawing/2014/main" id="{3DA9A562-9750-4E6E-B398-4C9E7EA262A3}"/>
               </a:ext>
             </a:extLst>
           </p:cNvPr>
@@ -6146,7 +6146,7 @@
           <p:cNvPr id="6" name="core-no-0">
             <a:extLst xmlns:a="http://schemas.openxmlformats.org/drawingml/2006/main">
               <a:ext uri="{FF2B5EF4-FFF2-40B4-BE49-F238E27FC236}">
-                <a16:creationId xmlns:a16="http://schemas.microsoft.com/office/drawing/2014/main" id="{B4BF2429-1D46-495A-A7A0-8792862BD9F4}"/>
+                <a16:creationId xmlns:a16="http://schemas.microsoft.com/office/drawing/2014/main" id="{A6AA7037-DF75-4C91-8ABD-8DF59D5A9E82}"/>
               </a:ext>
             </a:extLst>
           </p:cNvPr>
@@ -6178,7 +6178,7 @@
             <a:pPr algn="l">
               <a:defRPr sz="2250" b="1">
                 <a:solidFill>
-                  <a:srgbClr val="D6A33A"/>
+                  <a:srgbClr val="8A5A00"/>
                 </a:solidFill>
                 <a:latin typeface="PingFang SC"/>
                 <a:ea typeface="PingFang SC"/>
@@ -6188,7 +6188,7 @@
             <a:r>
               <a:rPr sz="2250" b="1">
                 <a:solidFill>
-                  <a:srgbClr val="D6A33A"/>
+                  <a:srgbClr val="8A5A00"/>
                 </a:solidFill>
                 <a:latin typeface="PingFang SC"/>
                 <a:ea typeface="PingFang SC"/>
@@ -6204,7 +6204,7 @@
           <p:cNvPr id="7" name="core-label-0">
             <a:extLst xmlns:a="http://schemas.openxmlformats.org/drawingml/2006/main">
               <a:ext uri="{FF2B5EF4-FFF2-40B4-BE49-F238E27FC236}">
-                <a16:creationId xmlns:a16="http://schemas.microsoft.com/office/drawing/2014/main" id="{A97D80CA-AC74-4807-80FB-04DF639B9BFF}"/>
+                <a16:creationId xmlns:a16="http://schemas.microsoft.com/office/drawing/2014/main" id="{14D69F09-D13B-4A53-B916-32B4A3E1A4E0}"/>
               </a:ext>
             </a:extLst>
           </p:cNvPr>
@@ -6262,7 +6262,7 @@
           <p:cNvPr id="8" name="core-body-0">
             <a:extLst xmlns:a="http://schemas.openxmlformats.org/drawingml/2006/main">
               <a:ext uri="{FF2B5EF4-FFF2-40B4-BE49-F238E27FC236}">
-                <a16:creationId xmlns:a16="http://schemas.microsoft.com/office/drawing/2014/main" id="{324A4137-8470-408F-8CAA-52ADCDE3F1A3}"/>
+                <a16:creationId xmlns:a16="http://schemas.microsoft.com/office/drawing/2014/main" id="{98459111-7455-4BDA-8463-C03C93FBD3F1}"/>
               </a:ext>
             </a:extLst>
           </p:cNvPr>
@@ -6286,7 +6286,7 @@
           </a:solidFill>
           <a:ln xmlns:a="http://schemas.openxmlformats.org/drawingml/2006/main" w="19050">
             <a:solidFill>
-              <a:srgbClr val="D6A33A"/>
+              <a:srgbClr val="8A5A00"/>
             </a:solidFill>
             <a:prstDash val="solid"/>
           </a:ln>
@@ -6326,7 +6326,7 @@
           <p:cNvPr id="9" name="core-no-1">
             <a:extLst xmlns:a="http://schemas.openxmlformats.org/drawingml/2006/main">
               <a:ext uri="{FF2B5EF4-FFF2-40B4-BE49-F238E27FC236}">
-                <a16:creationId xmlns:a16="http://schemas.microsoft.com/office/drawing/2014/main" id="{DF506885-CC8C-4C43-8789-BBC18B1FC025}"/>
+                <a16:creationId xmlns:a16="http://schemas.microsoft.com/office/drawing/2014/main" id="{EFFB6668-FEDF-44DD-943D-C218DFC1C964}"/>
               </a:ext>
             </a:extLst>
           </p:cNvPr>
@@ -6358,7 +6358,7 @@
             <a:pPr algn="l">
               <a:defRPr sz="2250" b="1">
                 <a:solidFill>
-                  <a:srgbClr val="D6A33A"/>
+                  <a:srgbClr val="8A5A00"/>
                 </a:solidFill>
                 <a:latin typeface="PingFang SC"/>
                 <a:ea typeface="PingFang SC"/>
@@ -6368,7 +6368,7 @@
             <a:r>
               <a:rPr sz="2250" b="1">
                 <a:solidFill>
-                  <a:srgbClr val="D6A33A"/>
+                  <a:srgbClr val="8A5A00"/>
                 </a:solidFill>
                 <a:latin typeface="PingFang SC"/>
                 <a:ea typeface="PingFang SC"/>
@@ -6384,7 +6384,7 @@
           <p:cNvPr id="10" name="core-body-1">
             <a:extLst xmlns:a="http://schemas.openxmlformats.org/drawingml/2006/main">
               <a:ext uri="{FF2B5EF4-FFF2-40B4-BE49-F238E27FC236}">
-                <a16:creationId xmlns:a16="http://schemas.microsoft.com/office/drawing/2014/main" id="{D60C2C95-34EB-476D-8E4D-69DBBDDC5D3C}"/>
+                <a16:creationId xmlns:a16="http://schemas.microsoft.com/office/drawing/2014/main" id="{921910EE-1A49-406F-A8D3-387681502E33}"/>
               </a:ext>
             </a:extLst>
           </p:cNvPr>
@@ -6448,7 +6448,7 @@
           <p:cNvPr id="11" name="s4-takeaway-rule">
             <a:extLst xmlns:a="http://schemas.openxmlformats.org/drawingml/2006/main">
               <a:ext uri="{FF2B5EF4-FFF2-40B4-BE49-F238E27FC236}">
-                <a16:creationId xmlns:a16="http://schemas.microsoft.com/office/drawing/2014/main" id="{C58E55FA-C4E1-4889-B906-A67D1A7231DE}"/>
+                <a16:creationId xmlns:a16="http://schemas.microsoft.com/office/drawing/2014/main" id="{97F9CC01-F6AF-4664-8AC5-91F5773F648C}"/>
               </a:ext>
             </a:extLst>
           </p:cNvPr>
@@ -6481,7 +6481,7 @@
           <p:cNvPr id="12" name="s4-takeaway">
             <a:extLst xmlns:a="http://schemas.openxmlformats.org/drawingml/2006/main">
               <a:ext uri="{FF2B5EF4-FFF2-40B4-BE49-F238E27FC236}">
-                <a16:creationId xmlns:a16="http://schemas.microsoft.com/office/drawing/2014/main" id="{A8101C7C-3E90-44F8-BE79-9A4FBE84013A}"/>
+                <a16:creationId xmlns:a16="http://schemas.microsoft.com/office/drawing/2014/main" id="{4FC57A76-E3AF-46C2-8174-723013576A59}"/>
               </a:ext>
             </a:extLst>
           </p:cNvPr>
@@ -6537,7 +6537,7 @@
     </p:spTree>
     <p:extLst>
       <p:ext uri="{BB962C8B-B14F-4D97-AF65-F5344CB8AC3E}">
-        <p14:creationId xmlns:p14="http://schemas.microsoft.com/office/powerpoint/2010/main" val="1072064529"/>
+        <p14:creationId xmlns:p14="http://schemas.microsoft.com/office/powerpoint/2010/main" val="1781504871"/>
       </p:ext>
     </p:extLst>
   </p:cSld>
@@ -6568,7 +6568,7 @@
           <p:cNvPr id="1" name="s5-rule">
             <a:extLst xmlns:a="http://schemas.openxmlformats.org/drawingml/2006/main">
               <a:ext uri="{FF2B5EF4-FFF2-40B4-BE49-F238E27FC236}">
-                <a16:creationId xmlns:a16="http://schemas.microsoft.com/office/drawing/2014/main" id="{318631B7-DB18-45BE-937A-CE76C1A6FEC8}"/>
+                <a16:creationId xmlns:a16="http://schemas.microsoft.com/office/drawing/2014/main" id="{E8AC532A-F1D2-4AA1-9E9E-E56D26B2BD60}"/>
               </a:ext>
             </a:extLst>
           </p:cNvPr>
@@ -6601,7 +6601,7 @@
           <p:cNvPr id="2" name="s5-eyebrow">
             <a:extLst xmlns:a="http://schemas.openxmlformats.org/drawingml/2006/main">
               <a:ext uri="{FF2B5EF4-FFF2-40B4-BE49-F238E27FC236}">
-                <a16:creationId xmlns:a16="http://schemas.microsoft.com/office/drawing/2014/main" id="{A19AB711-D4CC-43D0-AEBF-F725A5F71FED}"/>
+                <a16:creationId xmlns:a16="http://schemas.microsoft.com/office/drawing/2014/main" id="{3D4F56F6-C2F4-493B-A1F1-47C28BD84DDD}"/>
               </a:ext>
             </a:extLst>
           </p:cNvPr>
@@ -6659,7 +6659,7 @@
           <p:cNvPr id="3" name="s5-title">
             <a:extLst xmlns:a="http://schemas.openxmlformats.org/drawingml/2006/main">
               <a:ext uri="{FF2B5EF4-FFF2-40B4-BE49-F238E27FC236}">
-                <a16:creationId xmlns:a16="http://schemas.microsoft.com/office/drawing/2014/main" id="{45E6C856-E5C7-4280-B928-991C8AEF2727}"/>
+                <a16:creationId xmlns:a16="http://schemas.microsoft.com/office/drawing/2014/main" id="{DF3EFD10-FBD0-46C4-A410-D126A4B1F766}"/>
               </a:ext>
             </a:extLst>
           </p:cNvPr>
@@ -6717,7 +6717,7 @@
           <p:cNvPr id="4" name="s5-footer">
             <a:extLst xmlns:a="http://schemas.openxmlformats.org/drawingml/2006/main">
               <a:ext uri="{FF2B5EF4-FFF2-40B4-BE49-F238E27FC236}">
-                <a16:creationId xmlns:a16="http://schemas.microsoft.com/office/drawing/2014/main" id="{B47ACD50-BF81-4915-B5B3-98A0DDD31878}"/>
+                <a16:creationId xmlns:a16="http://schemas.microsoft.com/office/drawing/2014/main" id="{7445D71C-313B-45E7-B685-89B23B889DBE}"/>
               </a:ext>
             </a:extLst>
           </p:cNvPr>
@@ -6748,7 +6748,7 @@
           <p:cNvPr id="5" name="s5-identity">
             <a:extLst xmlns:a="http://schemas.openxmlformats.org/drawingml/2006/main">
               <a:ext uri="{FF2B5EF4-FFF2-40B4-BE49-F238E27FC236}">
-                <a16:creationId xmlns:a16="http://schemas.microsoft.com/office/drawing/2014/main" id="{8B5C0703-E899-4342-9770-44181F6F2C04}"/>
+                <a16:creationId xmlns:a16="http://schemas.microsoft.com/office/drawing/2014/main" id="{0713DBA6-9358-4413-A268-C02CB05EDC80}"/>
               </a:ext>
             </a:extLst>
           </p:cNvPr>
@@ -6806,7 +6806,7 @@
           <p:cNvPr id="6" name="core-no-0">
             <a:extLst xmlns:a="http://schemas.openxmlformats.org/drawingml/2006/main">
               <a:ext uri="{FF2B5EF4-FFF2-40B4-BE49-F238E27FC236}">
-                <a16:creationId xmlns:a16="http://schemas.microsoft.com/office/drawing/2014/main" id="{90102711-A504-4B98-BEB3-1486A5F82959}"/>
+                <a16:creationId xmlns:a16="http://schemas.microsoft.com/office/drawing/2014/main" id="{3EFEC533-436F-4768-B1E8-6F4C52FCBEF8}"/>
               </a:ext>
             </a:extLst>
           </p:cNvPr>
@@ -6838,7 +6838,7 @@
             <a:pPr algn="l">
               <a:defRPr sz="2250" b="1">
                 <a:solidFill>
-                  <a:srgbClr val="D6A33A"/>
+                  <a:srgbClr val="8A5A00"/>
                 </a:solidFill>
                 <a:latin typeface="PingFang SC"/>
                 <a:ea typeface="PingFang SC"/>
@@ -6848,7 +6848,7 @@
             <a:r>
               <a:rPr sz="2250" b="1">
                 <a:solidFill>
-                  <a:srgbClr val="D6A33A"/>
+                  <a:srgbClr val="8A5A00"/>
                 </a:solidFill>
                 <a:latin typeface="PingFang SC"/>
                 <a:ea typeface="PingFang SC"/>
@@ -6864,7 +6864,7 @@
           <p:cNvPr id="7" name="core-label-0">
             <a:extLst xmlns:a="http://schemas.openxmlformats.org/drawingml/2006/main">
               <a:ext uri="{FF2B5EF4-FFF2-40B4-BE49-F238E27FC236}">
-                <a16:creationId xmlns:a16="http://schemas.microsoft.com/office/drawing/2014/main" id="{AE1F9C8B-5C42-4C56-86BE-86C91DDBEC61}"/>
+                <a16:creationId xmlns:a16="http://schemas.microsoft.com/office/drawing/2014/main" id="{BD5772BD-BE00-4FF4-B6A1-11DA288300A5}"/>
               </a:ext>
             </a:extLst>
           </p:cNvPr>
@@ -6922,7 +6922,7 @@
           <p:cNvPr id="8" name="core-body-0">
             <a:extLst xmlns:a="http://schemas.openxmlformats.org/drawingml/2006/main">
               <a:ext uri="{FF2B5EF4-FFF2-40B4-BE49-F238E27FC236}">
-                <a16:creationId xmlns:a16="http://schemas.microsoft.com/office/drawing/2014/main" id="{F03E4CD6-FF0F-4C63-B120-C6E0C29CC471}"/>
+                <a16:creationId xmlns:a16="http://schemas.microsoft.com/office/drawing/2014/main" id="{9A621F7E-6C86-4436-A0BA-55E2E491ABDE}"/>
               </a:ext>
             </a:extLst>
           </p:cNvPr>
@@ -6946,7 +6946,7 @@
           </a:solidFill>
           <a:ln xmlns:a="http://schemas.openxmlformats.org/drawingml/2006/main" w="19050">
             <a:solidFill>
-              <a:srgbClr val="D6A33A"/>
+              <a:srgbClr val="8A5A00"/>
             </a:solidFill>
             <a:prstDash val="solid"/>
           </a:ln>
@@ -6986,7 +6986,7 @@
           <p:cNvPr id="9" name="core-no-1">
             <a:extLst xmlns:a="http://schemas.openxmlformats.org/drawingml/2006/main">
               <a:ext uri="{FF2B5EF4-FFF2-40B4-BE49-F238E27FC236}">
-                <a16:creationId xmlns:a16="http://schemas.microsoft.com/office/drawing/2014/main" id="{18891C9D-44F0-45F3-BE9F-45654D05781B}"/>
+                <a16:creationId xmlns:a16="http://schemas.microsoft.com/office/drawing/2014/main" id="{22D88425-4650-475D-B3D3-49F2067D470F}"/>
               </a:ext>
             </a:extLst>
           </p:cNvPr>
@@ -7018,7 +7018,7 @@
             <a:pPr algn="l">
               <a:defRPr sz="2250" b="1">
                 <a:solidFill>
-                  <a:srgbClr val="D6A33A"/>
+                  <a:srgbClr val="8A5A00"/>
                 </a:solidFill>
                 <a:latin typeface="PingFang SC"/>
                 <a:ea typeface="PingFang SC"/>
@@ -7028,7 +7028,7 @@
             <a:r>
               <a:rPr sz="2250" b="1">
                 <a:solidFill>
-                  <a:srgbClr val="D6A33A"/>
+                  <a:srgbClr val="8A5A00"/>
                 </a:solidFill>
                 <a:latin typeface="PingFang SC"/>
                 <a:ea typeface="PingFang SC"/>
@@ -7044,7 +7044,7 @@
           <p:cNvPr id="10" name="core-body-1">
             <a:extLst xmlns:a="http://schemas.openxmlformats.org/drawingml/2006/main">
               <a:ext uri="{FF2B5EF4-FFF2-40B4-BE49-F238E27FC236}">
-                <a16:creationId xmlns:a16="http://schemas.microsoft.com/office/drawing/2014/main" id="{42C7F972-FA95-4159-AF7B-53E0E73657B7}"/>
+                <a16:creationId xmlns:a16="http://schemas.microsoft.com/office/drawing/2014/main" id="{8C70F8A0-5446-4EE3-A7CF-6D21533C4684}"/>
               </a:ext>
             </a:extLst>
           </p:cNvPr>
@@ -7108,7 +7108,7 @@
           <p:cNvPr id="11" name="core-no-2">
             <a:extLst xmlns:a="http://schemas.openxmlformats.org/drawingml/2006/main">
               <a:ext uri="{FF2B5EF4-FFF2-40B4-BE49-F238E27FC236}">
-                <a16:creationId xmlns:a16="http://schemas.microsoft.com/office/drawing/2014/main" id="{18E80E64-141D-404C-B0BC-90DC5CD469E0}"/>
+                <a16:creationId xmlns:a16="http://schemas.microsoft.com/office/drawing/2014/main" id="{30E7132F-72F4-41B5-843D-42A389DFD784}"/>
               </a:ext>
             </a:extLst>
           </p:cNvPr>
@@ -7140,7 +7140,7 @@
             <a:pPr algn="l">
               <a:defRPr sz="2250" b="1">
                 <a:solidFill>
-                  <a:srgbClr val="D6A33A"/>
+                  <a:srgbClr val="8A5A00"/>
                 </a:solidFill>
                 <a:latin typeface="PingFang SC"/>
                 <a:ea typeface="PingFang SC"/>
@@ -7150,7 +7150,7 @@
             <a:r>
               <a:rPr sz="2250" b="1">
                 <a:solidFill>
-                  <a:srgbClr val="D6A33A"/>
+                  <a:srgbClr val="8A5A00"/>
                 </a:solidFill>
                 <a:latin typeface="PingFang SC"/>
                 <a:ea typeface="PingFang SC"/>
@@ -7166,7 +7166,7 @@
           <p:cNvPr id="12" name="core-body-2">
             <a:extLst xmlns:a="http://schemas.openxmlformats.org/drawingml/2006/main">
               <a:ext uri="{FF2B5EF4-FFF2-40B4-BE49-F238E27FC236}">
-                <a16:creationId xmlns:a16="http://schemas.microsoft.com/office/drawing/2014/main" id="{AB8216DF-29D6-46CA-B233-BB4EB9AA6978}"/>
+                <a16:creationId xmlns:a16="http://schemas.microsoft.com/office/drawing/2014/main" id="{51097104-EA9E-42A8-80CD-19529E9CE13C}"/>
               </a:ext>
             </a:extLst>
           </p:cNvPr>
@@ -7230,7 +7230,7 @@
           <p:cNvPr id="13" name="s5-takeaway-rule">
             <a:extLst xmlns:a="http://schemas.openxmlformats.org/drawingml/2006/main">
               <a:ext uri="{FF2B5EF4-FFF2-40B4-BE49-F238E27FC236}">
-                <a16:creationId xmlns:a16="http://schemas.microsoft.com/office/drawing/2014/main" id="{484386B5-C94B-4C52-81E7-36BD9979C0DC}"/>
+                <a16:creationId xmlns:a16="http://schemas.microsoft.com/office/drawing/2014/main" id="{38D0169F-80E9-48E7-BEB0-08457C64BA8B}"/>
               </a:ext>
             </a:extLst>
           </p:cNvPr>
@@ -7263,7 +7263,7 @@
           <p:cNvPr id="14" name="s5-takeaway">
             <a:extLst xmlns:a="http://schemas.openxmlformats.org/drawingml/2006/main">
               <a:ext uri="{FF2B5EF4-FFF2-40B4-BE49-F238E27FC236}">
-                <a16:creationId xmlns:a16="http://schemas.microsoft.com/office/drawing/2014/main" id="{E52B4455-14BC-4E56-8FF6-5168DCA1796D}"/>
+                <a16:creationId xmlns:a16="http://schemas.microsoft.com/office/drawing/2014/main" id="{11397907-4824-4B24-A065-372D0B4E59E9}"/>
               </a:ext>
             </a:extLst>
           </p:cNvPr>
@@ -7319,7 +7319,7 @@
     </p:spTree>
     <p:extLst>
       <p:ext uri="{BB962C8B-B14F-4D97-AF65-F5344CB8AC3E}">
-        <p14:creationId xmlns:p14="http://schemas.microsoft.com/office/powerpoint/2010/main" val="1920264278"/>
+        <p14:creationId xmlns:p14="http://schemas.microsoft.com/office/powerpoint/2010/main" val="712875151"/>
       </p:ext>
     </p:extLst>
   </p:cSld>
@@ -7350,7 +7350,7 @@
           <p:cNvPr id="1" name="s6-rule">
             <a:extLst xmlns:a="http://schemas.openxmlformats.org/drawingml/2006/main">
               <a:ext uri="{FF2B5EF4-FFF2-40B4-BE49-F238E27FC236}">
-                <a16:creationId xmlns:a16="http://schemas.microsoft.com/office/drawing/2014/main" id="{E774413B-D500-4F96-AFC2-F6052F5DA756}"/>
+                <a16:creationId xmlns:a16="http://schemas.microsoft.com/office/drawing/2014/main" id="{331177B3-481E-45EF-91D7-2ADD31410B7E}"/>
               </a:ext>
             </a:extLst>
           </p:cNvPr>
@@ -7383,7 +7383,7 @@
           <p:cNvPr id="2" name="s6-eyebrow">
             <a:extLst xmlns:a="http://schemas.openxmlformats.org/drawingml/2006/main">
               <a:ext uri="{FF2B5EF4-FFF2-40B4-BE49-F238E27FC236}">
-                <a16:creationId xmlns:a16="http://schemas.microsoft.com/office/drawing/2014/main" id="{317A505A-0E23-42D5-92C7-EDD480E49414}"/>
+                <a16:creationId xmlns:a16="http://schemas.microsoft.com/office/drawing/2014/main" id="{BBAD9D5B-47F0-4125-82FA-17EE9B77C368}"/>
               </a:ext>
             </a:extLst>
           </p:cNvPr>
@@ -7441,7 +7441,7 @@
           <p:cNvPr id="3" name="s6-title">
             <a:extLst xmlns:a="http://schemas.openxmlformats.org/drawingml/2006/main">
               <a:ext uri="{FF2B5EF4-FFF2-40B4-BE49-F238E27FC236}">
-                <a16:creationId xmlns:a16="http://schemas.microsoft.com/office/drawing/2014/main" id="{8A976680-C7E8-49BE-B340-43D24F018BD3}"/>
+                <a16:creationId xmlns:a16="http://schemas.microsoft.com/office/drawing/2014/main" id="{9D6B6B4A-CFBA-41BE-A372-BAFC4A201CB4}"/>
               </a:ext>
             </a:extLst>
           </p:cNvPr>
@@ -7466,7 +7466,7 @@
         </p:spPr>
         <p:txBody>
           <a:bodyPr xmlns:a="http://schemas.openxmlformats.org/drawingml/2006/main" lIns="0" tIns="0" rIns="0" bIns="0" anchor="ctr">
-            <a:normAutofit fontScale="83467"/>
+            <a:normAutofit fontScale="100000"/>
           </a:bodyPr>
           <a:lstStyle xmlns:a="http://schemas.openxmlformats.org/drawingml/2006/main"/>
           <a:p xmlns:a="http://schemas.openxmlformats.org/drawingml/2006/main">
@@ -7489,7 +7489,7 @@
                 <a:ea typeface="PingFang SC"/>
                 <a:cs typeface="PingFang SC"/>
               </a:rPr>
-              <a:t>图灵在《计算机器与智能》中没有直接给“机器是否真正思考”下定义</a:t>
+              <a:t>图灵测试衡量拟人表现，不能证明机器理解</a:t>
             </a:r>
           </a:p>
         </p:txBody>
@@ -7499,7 +7499,7 @@
           <p:cNvPr id="4" name="s6-footer">
             <a:extLst xmlns:a="http://schemas.openxmlformats.org/drawingml/2006/main">
               <a:ext uri="{FF2B5EF4-FFF2-40B4-BE49-F238E27FC236}">
-                <a16:creationId xmlns:a16="http://schemas.microsoft.com/office/drawing/2014/main" id="{9FED45F1-5116-4469-8DD5-80497CDB9849}"/>
+                <a16:creationId xmlns:a16="http://schemas.microsoft.com/office/drawing/2014/main" id="{E5DE8C48-4168-45E6-A375-B74AAD91C55E}"/>
               </a:ext>
             </a:extLst>
           </p:cNvPr>
@@ -7530,7 +7530,7 @@
           <p:cNvPr id="5" name="s6-identity">
             <a:extLst xmlns:a="http://schemas.openxmlformats.org/drawingml/2006/main">
               <a:ext uri="{FF2B5EF4-FFF2-40B4-BE49-F238E27FC236}">
-                <a16:creationId xmlns:a16="http://schemas.microsoft.com/office/drawing/2014/main" id="{050F493D-9B1C-40DC-B7B1-F85CF9647FBF}"/>
+                <a16:creationId xmlns:a16="http://schemas.microsoft.com/office/drawing/2014/main" id="{5B3C9153-25D7-4773-AFDD-6610822D1AA2}"/>
               </a:ext>
             </a:extLst>
           </p:cNvPr>
@@ -7588,7 +7588,7 @@
           <p:cNvPr id="6" name="core-no-0">
             <a:extLst xmlns:a="http://schemas.openxmlformats.org/drawingml/2006/main">
               <a:ext uri="{FF2B5EF4-FFF2-40B4-BE49-F238E27FC236}">
-                <a16:creationId xmlns:a16="http://schemas.microsoft.com/office/drawing/2014/main" id="{5B9E00EF-028F-448D-B5EF-CD723E0981E2}"/>
+                <a16:creationId xmlns:a16="http://schemas.microsoft.com/office/drawing/2014/main" id="{AF9130B6-F8EB-4A1F-B423-6FC39B487212}"/>
               </a:ext>
             </a:extLst>
           </p:cNvPr>
@@ -7620,7 +7620,7 @@
             <a:pPr algn="l">
               <a:defRPr sz="2250" b="1">
                 <a:solidFill>
-                  <a:srgbClr val="D6A33A"/>
+                  <a:srgbClr val="8A5A00"/>
                 </a:solidFill>
                 <a:latin typeface="PingFang SC"/>
                 <a:ea typeface="PingFang SC"/>
@@ -7630,7 +7630,7 @@
             <a:r>
               <a:rPr sz="2250" b="1">
                 <a:solidFill>
-                  <a:srgbClr val="D6A33A"/>
+                  <a:srgbClr val="8A5A00"/>
                 </a:solidFill>
                 <a:latin typeface="PingFang SC"/>
                 <a:ea typeface="PingFang SC"/>
@@ -7646,7 +7646,7 @@
           <p:cNvPr id="7" name="core-label-0">
             <a:extLst xmlns:a="http://schemas.openxmlformats.org/drawingml/2006/main">
               <a:ext uri="{FF2B5EF4-FFF2-40B4-BE49-F238E27FC236}">
-                <a16:creationId xmlns:a16="http://schemas.microsoft.com/office/drawing/2014/main" id="{A9AED6BC-F529-48AF-AF86-6D3AED91EBD0}"/>
+                <a16:creationId xmlns:a16="http://schemas.microsoft.com/office/drawing/2014/main" id="{39A8291E-9108-40F3-9D56-7F7CD38C41B9}"/>
               </a:ext>
             </a:extLst>
           </p:cNvPr>
@@ -7704,7 +7704,7 @@
           <p:cNvPr id="8" name="core-body-0">
             <a:extLst xmlns:a="http://schemas.openxmlformats.org/drawingml/2006/main">
               <a:ext uri="{FF2B5EF4-FFF2-40B4-BE49-F238E27FC236}">
-                <a16:creationId xmlns:a16="http://schemas.microsoft.com/office/drawing/2014/main" id="{84EADE4B-C1E8-4B34-9F98-0FE73E04437F}"/>
+                <a16:creationId xmlns:a16="http://schemas.microsoft.com/office/drawing/2014/main" id="{94BAEFFE-CE29-4311-A3D5-56DC94299BBB}"/>
               </a:ext>
             </a:extLst>
           </p:cNvPr>
@@ -7728,7 +7728,7 @@
           </a:solidFill>
           <a:ln xmlns:a="http://schemas.openxmlformats.org/drawingml/2006/main" w="19050">
             <a:solidFill>
-              <a:srgbClr val="D6A33A"/>
+              <a:srgbClr val="8A5A00"/>
             </a:solidFill>
             <a:prstDash val="solid"/>
           </a:ln>
@@ -7758,7 +7758,7 @@
                 <a:ea typeface="PingFang SC"/>
                 <a:cs typeface="PingFang SC"/>
               </a:rPr>
-              <a:t>1950 年，图灵在《计算机器与智能》中没有直接给“机器是否真正思考”下定义，而是用模仿游戏把问题改写为可观察的对话表现。后来人们常把这种行为测试称为图灵测试。它能够研究机器是否表现得像人…</a:t>
+              <a:t>1950 年，图灵在《计算机器与智能》中没有直接给“机器是否真正思考”下定义；而是用模仿游戏把问题改写为可观察的对话表现；后来人们常把这种行为测试称为图灵测试；它能够研究机器是否表现得像人</a:t>
             </a:r>
           </a:p>
         </p:txBody>
@@ -7768,7 +7768,7 @@
           <p:cNvPr id="9" name="core-no-1">
             <a:extLst xmlns:a="http://schemas.openxmlformats.org/drawingml/2006/main">
               <a:ext uri="{FF2B5EF4-FFF2-40B4-BE49-F238E27FC236}">
-                <a16:creationId xmlns:a16="http://schemas.microsoft.com/office/drawing/2014/main" id="{03022F18-CB6D-48C4-AB2E-528D8974252B}"/>
+                <a16:creationId xmlns:a16="http://schemas.microsoft.com/office/drawing/2014/main" id="{7E6583F0-BFB3-4E32-86EF-4833C0D8275D}"/>
               </a:ext>
             </a:extLst>
           </p:cNvPr>
@@ -7800,7 +7800,7 @@
             <a:pPr algn="l">
               <a:defRPr sz="2250" b="1">
                 <a:solidFill>
-                  <a:srgbClr val="D6A33A"/>
+                  <a:srgbClr val="8A5A00"/>
                 </a:solidFill>
                 <a:latin typeface="PingFang SC"/>
                 <a:ea typeface="PingFang SC"/>
@@ -7810,7 +7810,7 @@
             <a:r>
               <a:rPr sz="2250" b="1">
                 <a:solidFill>
-                  <a:srgbClr val="D6A33A"/>
+                  <a:srgbClr val="8A5A00"/>
                 </a:solidFill>
                 <a:latin typeface="PingFang SC"/>
                 <a:ea typeface="PingFang SC"/>
@@ -7826,7 +7826,7 @@
           <p:cNvPr id="10" name="core-body-1">
             <a:extLst xmlns:a="http://schemas.openxmlformats.org/drawingml/2006/main">
               <a:ext uri="{FF2B5EF4-FFF2-40B4-BE49-F238E27FC236}">
-                <a16:creationId xmlns:a16="http://schemas.microsoft.com/office/drawing/2014/main" id="{6DC0BA1B-DD30-4684-9B8E-30CC5153824A}"/>
+                <a16:creationId xmlns:a16="http://schemas.microsoft.com/office/drawing/2014/main" id="{2FDA0B52-FB53-4F23-BE04-F1BF2E5BE3C4}"/>
               </a:ext>
             </a:extLst>
           </p:cNvPr>
@@ -7880,7 +7880,7 @@
                 <a:ea typeface="PingFang SC"/>
                 <a:cs typeface="PingFang SC"/>
               </a:rPr>
-              <a:t>2025 年一项预注册三方图灵测试研究报告：在特定的人设提示与五分钟对话条件下，GPT-4.5 被参与者判断为“人类”的比例达到 73%。这说明语言模型已经能在短时对话中呈现很强的拟人表现…</a:t>
+              <a:t>2025 年一项预注册三方图灵测试研究报告；在特定的人设提示与五分钟对话条件下；GPT-4.5 被参与者判断为“人类”的比例达到 73%；这说明语言模型已经能在短时对话中呈现很强的拟人表现</a:t>
             </a:r>
           </a:p>
         </p:txBody>
@@ -7890,7 +7890,7 @@
           <p:cNvPr id="11" name="s6-takeaway-rule">
             <a:extLst xmlns:a="http://schemas.openxmlformats.org/drawingml/2006/main">
               <a:ext uri="{FF2B5EF4-FFF2-40B4-BE49-F238E27FC236}">
-                <a16:creationId xmlns:a16="http://schemas.microsoft.com/office/drawing/2014/main" id="{0A1C2651-28CF-401E-A5AC-33A06696A819}"/>
+                <a16:creationId xmlns:a16="http://schemas.microsoft.com/office/drawing/2014/main" id="{AA6A7BF6-2446-4C97-AED5-5C805E43CE5F}"/>
               </a:ext>
             </a:extLst>
           </p:cNvPr>
@@ -7923,7 +7923,7 @@
           <p:cNvPr id="12" name="s6-takeaway">
             <a:extLst xmlns:a="http://schemas.openxmlformats.org/drawingml/2006/main">
               <a:ext uri="{FF2B5EF4-FFF2-40B4-BE49-F238E27FC236}">
-                <a16:creationId xmlns:a16="http://schemas.microsoft.com/office/drawing/2014/main" id="{EC2F6B6D-A1BC-4F3F-8F5C-000AEDE0410B}"/>
+                <a16:creationId xmlns:a16="http://schemas.microsoft.com/office/drawing/2014/main" id="{C5F10DAB-D5DC-48F8-8A27-93B143E04C2E}"/>
               </a:ext>
             </a:extLst>
           </p:cNvPr>
@@ -7971,7 +7971,7 @@
                 <a:ea typeface="PingFang SC"/>
                 <a:cs typeface="PingFang SC"/>
               </a:rPr>
-              <a:t>图灵在《计算机器与智能》中没有直接给“机器是否真正思考”下定义</a:t>
+              <a:t>图灵测试衡量拟人表现，不能证明机器理解</a:t>
             </a:r>
           </a:p>
         </p:txBody>
@@ -7979,7 +7979,7 @@
     </p:spTree>
     <p:extLst>
       <p:ext uri="{BB962C8B-B14F-4D97-AF65-F5344CB8AC3E}">
-        <p14:creationId xmlns:p14="http://schemas.microsoft.com/office/powerpoint/2010/main" val="1507674790"/>
+        <p14:creationId xmlns:p14="http://schemas.microsoft.com/office/powerpoint/2010/main" val="736097750"/>
       </p:ext>
     </p:extLst>
   </p:cSld>
@@ -8010,7 +8010,7 @@
           <p:cNvPr id="1" name="s7-rule">
             <a:extLst xmlns:a="http://schemas.openxmlformats.org/drawingml/2006/main">
               <a:ext uri="{FF2B5EF4-FFF2-40B4-BE49-F238E27FC236}">
-                <a16:creationId xmlns:a16="http://schemas.microsoft.com/office/drawing/2014/main" id="{5D80EC2E-3EBE-4954-9F1F-9F20AB8E0EC3}"/>
+                <a16:creationId xmlns:a16="http://schemas.microsoft.com/office/drawing/2014/main" id="{77F9EAC4-9D89-407B-A00C-7517D39D0157}"/>
               </a:ext>
             </a:extLst>
           </p:cNvPr>
@@ -8043,7 +8043,7 @@
           <p:cNvPr id="2" name="s7-eyebrow">
             <a:extLst xmlns:a="http://schemas.openxmlformats.org/drawingml/2006/main">
               <a:ext uri="{FF2B5EF4-FFF2-40B4-BE49-F238E27FC236}">
-                <a16:creationId xmlns:a16="http://schemas.microsoft.com/office/drawing/2014/main" id="{0850EEBC-401F-4FDC-98A7-410C651F9EE5}"/>
+                <a16:creationId xmlns:a16="http://schemas.microsoft.com/office/drawing/2014/main" id="{5E50885B-13D6-435C-8AA9-AC3F123C53D2}"/>
               </a:ext>
             </a:extLst>
           </p:cNvPr>
@@ -8101,7 +8101,7 @@
           <p:cNvPr id="3" name="s7-title">
             <a:extLst xmlns:a="http://schemas.openxmlformats.org/drawingml/2006/main">
               <a:ext uri="{FF2B5EF4-FFF2-40B4-BE49-F238E27FC236}">
-                <a16:creationId xmlns:a16="http://schemas.microsoft.com/office/drawing/2014/main" id="{910E71C8-88FF-4E19-A931-7CA12588D836}"/>
+                <a16:creationId xmlns:a16="http://schemas.microsoft.com/office/drawing/2014/main" id="{CEDD5E96-26FB-40D2-AEF1-A9D9990E5F5B}"/>
               </a:ext>
             </a:extLst>
           </p:cNvPr>
@@ -8149,7 +8149,7 @@
                 <a:ea typeface="PingFang SC"/>
                 <a:cs typeface="PingFang SC"/>
               </a:rPr>
-              <a:t>机器人公民索菲亚必须经过边界验证</a:t>
+              <a:t>类人交互展示不等于机器真正理解</a:t>
             </a:r>
           </a:p>
         </p:txBody>
@@ -8159,7 +8159,7 @@
           <p:cNvPr id="4" name="s7-footer">
             <a:extLst xmlns:a="http://schemas.openxmlformats.org/drawingml/2006/main">
               <a:ext uri="{FF2B5EF4-FFF2-40B4-BE49-F238E27FC236}">
-                <a16:creationId xmlns:a16="http://schemas.microsoft.com/office/drawing/2014/main" id="{1421FCA1-32CE-450E-827F-EDB4D749FE3D}"/>
+                <a16:creationId xmlns:a16="http://schemas.microsoft.com/office/drawing/2014/main" id="{7ACA475F-A855-4E70-8C9D-2B4B62B3B609}"/>
               </a:ext>
             </a:extLst>
           </p:cNvPr>
@@ -8190,7 +8190,7 @@
           <p:cNvPr id="5" name="s7-identity">
             <a:extLst xmlns:a="http://schemas.openxmlformats.org/drawingml/2006/main">
               <a:ext uri="{FF2B5EF4-FFF2-40B4-BE49-F238E27FC236}">
-                <a16:creationId xmlns:a16="http://schemas.microsoft.com/office/drawing/2014/main" id="{DDD29296-FF12-46EA-8B96-5F3B6D45124B}"/>
+                <a16:creationId xmlns:a16="http://schemas.microsoft.com/office/drawing/2014/main" id="{803A8DF6-0766-4995-8527-CC1F64294FB8}"/>
               </a:ext>
             </a:extLst>
           </p:cNvPr>
@@ -8248,7 +8248,7 @@
           <p:cNvPr id="6" name="case-title">
             <a:extLst xmlns:a="http://schemas.openxmlformats.org/drawingml/2006/main">
               <a:ext uri="{FF2B5EF4-FFF2-40B4-BE49-F238E27FC236}">
-                <a16:creationId xmlns:a16="http://schemas.microsoft.com/office/drawing/2014/main" id="{5DC98637-56D5-4E21-8092-0452B4DED0E3}"/>
+                <a16:creationId xmlns:a16="http://schemas.microsoft.com/office/drawing/2014/main" id="{3E16BE66-C9BB-49A4-A350-56EC073146BD}"/>
               </a:ext>
             </a:extLst>
           </p:cNvPr>
@@ -8312,23 +8312,23 @@
           <p:cNvPr id="7" name="case-row-0">
             <a:extLst xmlns:a="http://schemas.openxmlformats.org/drawingml/2006/main">
               <a:ext uri="{FF2B5EF4-FFF2-40B4-BE49-F238E27FC236}">
-                <a16:creationId xmlns:a16="http://schemas.microsoft.com/office/drawing/2014/main" id="{AD490966-CBB8-401A-97CA-8AB1BD99AA62}"/>
-              </a:ext>
-            </a:extLst>
-          </p:cNvPr>
-          <p:cNvSpPr>
-            <a:spLocks xmlns:a="http://schemas.openxmlformats.org/drawingml/2006/main" noGrp="1"/>
-          </p:cNvSpPr>
-          <p:nvPr/>
-        </p:nvSpPr>
-        <p:spPr>
-          <a:xfrm xmlns:a="http://schemas.openxmlformats.org/drawingml/2006/main">
-            <a:off x="4286250" y="2228850"/>
-            <a:ext cx="6534150" cy="1238250"/>
+                <a16:creationId xmlns:a16="http://schemas.microsoft.com/office/drawing/2014/main" id="{0F7DC0F9-D5F5-4C85-ADA9-8886D5FE0327}"/>
+              </a:ext>
+            </a:extLst>
+          </p:cNvPr>
+          <p:cNvSpPr>
+            <a:spLocks xmlns:a="http://schemas.openxmlformats.org/drawingml/2006/main" noGrp="1"/>
+          </p:cNvSpPr>
+          <p:nvPr/>
+        </p:nvSpPr>
+        <p:spPr>
+          <a:xfrm xmlns:a="http://schemas.openxmlformats.org/drawingml/2006/main">
+            <a:off x="4286250" y="2057400"/>
+            <a:ext cx="6534150" cy="838200"/>
           </a:xfrm>
           <a:prstGeom xmlns:a="http://schemas.openxmlformats.org/drawingml/2006/main" prst="roundRect">
             <a:avLst>
-              <a:gd name="adj" fmla="val 10000"/>
+              <a:gd name="adj" fmla="val 14773"/>
             </a:avLst>
           </a:prstGeom>
           <a:solidFill xmlns:a="http://schemas.openxmlformats.org/drawingml/2006/main">
@@ -8366,7 +8366,7 @@
                 <a:ea typeface="PingFang SC"/>
                 <a:cs typeface="PingFang SC"/>
               </a:rPr>
-              <a:t>场景｜索菲亚由 Hanson Robotics 开发，并因获得沙特阿拉伯公民身份而广为人知。她能进行对话并做出面部表情，更像一个把“类人交互”推到公众面前的展示平台…</a:t>
+              <a:t>结果｜索菲亚由 Hanson Robotics 开发，并因获得沙特阿拉伯公民身份而广为人知</a:t>
             </a:r>
           </a:p>
         </p:txBody>
@@ -8376,23 +8376,87 @@
           <p:cNvPr id="8" name="case-row-1">
             <a:extLst xmlns:a="http://schemas.openxmlformats.org/drawingml/2006/main">
               <a:ext uri="{FF2B5EF4-FFF2-40B4-BE49-F238E27FC236}">
-                <a16:creationId xmlns:a16="http://schemas.microsoft.com/office/drawing/2014/main" id="{CA3B630F-ED62-4D5B-8D8E-0999777FB277}"/>
-              </a:ext>
-            </a:extLst>
-          </p:cNvPr>
-          <p:cNvSpPr>
-            <a:spLocks xmlns:a="http://schemas.openxmlformats.org/drawingml/2006/main" noGrp="1"/>
-          </p:cNvSpPr>
-          <p:nvPr/>
-        </p:nvSpPr>
-        <p:spPr>
-          <a:xfrm xmlns:a="http://schemas.openxmlformats.org/drawingml/2006/main">
-            <a:off x="4286250" y="3714750"/>
-            <a:ext cx="6534150" cy="1238250"/>
+                <a16:creationId xmlns:a16="http://schemas.microsoft.com/office/drawing/2014/main" id="{617D1F97-26C7-4103-B1EB-ECA8169768CC}"/>
+              </a:ext>
+            </a:extLst>
+          </p:cNvPr>
+          <p:cNvSpPr>
+            <a:spLocks xmlns:a="http://schemas.openxmlformats.org/drawingml/2006/main" noGrp="1"/>
+          </p:cNvSpPr>
+          <p:nvPr/>
+        </p:nvSpPr>
+        <p:spPr>
+          <a:xfrm xmlns:a="http://schemas.openxmlformats.org/drawingml/2006/main">
+            <a:off x="4286250" y="3086100"/>
+            <a:ext cx="6534150" cy="838200"/>
           </a:xfrm>
           <a:prstGeom xmlns:a="http://schemas.openxmlformats.org/drawingml/2006/main" prst="roundRect">
             <a:avLst>
-              <a:gd name="adj" fmla="val 10000"/>
+              <a:gd name="adj" fmla="val 14773"/>
+            </a:avLst>
+          </a:prstGeom>
+          <a:solidFill xmlns:a="http://schemas.openxmlformats.org/drawingml/2006/main">
+            <a:srgbClr val="FFFFFF"/>
+          </a:solidFill>
+          <a:ln xmlns:a="http://schemas.openxmlformats.org/drawingml/2006/main" w="9525">
+            <a:solidFill>
+              <a:srgbClr val="D8E0E8"/>
+            </a:solidFill>
+            <a:prstDash val="solid"/>
+          </a:ln>
+        </p:spPr>
+        <p:txBody>
+          <a:bodyPr xmlns:a="http://schemas.openxmlformats.org/drawingml/2006/main" lIns="152400" tIns="133350" rIns="152400" bIns="133350" anchor="ctr">
+            <a:normAutofit fontScale="100000"/>
+          </a:bodyPr>
+          <a:lstStyle xmlns:a="http://schemas.openxmlformats.org/drawingml/2006/main"/>
+          <a:p xmlns:a="http://schemas.openxmlformats.org/drawingml/2006/main">
+            <a:pPr algn="l">
+              <a:defRPr sz="1575" b="0">
+                <a:solidFill>
+                  <a:srgbClr val="10233F"/>
+                </a:solidFill>
+                <a:latin typeface="PingFang SC"/>
+                <a:ea typeface="PingFang SC"/>
+                <a:cs typeface="PingFang SC"/>
+              </a:defRPr>
+            </a:pPr>
+            <a:r>
+              <a:rPr sz="1575" b="0">
+                <a:solidFill>
+                  <a:srgbClr val="10233F"/>
+                </a:solidFill>
+                <a:latin typeface="PingFang SC"/>
+                <a:ea typeface="PingFang SC"/>
+                <a:cs typeface="PingFang SC"/>
+              </a:rPr>
+              <a:t>机制｜她能进行对话并做出面部表情，更像一个把“类人交互”推到公众面前的展示平台</a:t>
+            </a:r>
+          </a:p>
+        </p:txBody>
+      </p:sp>
+      <p:sp>
+        <p:nvSpPr>
+          <p:cNvPr id="9" name="case-row-2">
+            <a:extLst xmlns:a="http://schemas.openxmlformats.org/drawingml/2006/main">
+              <a:ext uri="{FF2B5EF4-FFF2-40B4-BE49-F238E27FC236}">
+                <a16:creationId xmlns:a16="http://schemas.microsoft.com/office/drawing/2014/main" id="{BBAB0CF5-33BB-4DAE-A46A-53522F8BE387}"/>
+              </a:ext>
+            </a:extLst>
+          </p:cNvPr>
+          <p:cNvSpPr>
+            <a:spLocks xmlns:a="http://schemas.openxmlformats.org/drawingml/2006/main" noGrp="1"/>
+          </p:cNvSpPr>
+          <p:nvPr/>
+        </p:nvSpPr>
+        <p:spPr>
+          <a:xfrm xmlns:a="http://schemas.openxmlformats.org/drawingml/2006/main">
+            <a:off x="4286250" y="4114800"/>
+            <a:ext cx="6534150" cy="838200"/>
+          </a:xfrm>
+          <a:prstGeom xmlns:a="http://schemas.openxmlformats.org/drawingml/2006/main" prst="roundRect">
+            <a:avLst>
+              <a:gd name="adj" fmla="val 14773"/>
             </a:avLst>
           </a:prstGeom>
           <a:solidFill xmlns:a="http://schemas.openxmlformats.org/drawingml/2006/main">
@@ -8400,7 +8464,7 @@
           </a:solidFill>
           <a:ln xmlns:a="http://schemas.openxmlformats.org/drawingml/2006/main" w="9525">
             <a:solidFill>
-              <a:srgbClr val="D6A33A"/>
+              <a:srgbClr val="8A5A00"/>
             </a:solidFill>
             <a:prstDash val="solid"/>
           </a:ln>
@@ -8430,17 +8494,17 @@
                 <a:ea typeface="PingFang SC"/>
                 <a:cs typeface="PingFang SC"/>
               </a:rPr>
-              <a:t>验证｜验收“机器人公民索菲亚”时，要同时记录适用场景、证据来源、失败条件与人工责任</a:t>
-            </a:r>
-          </a:p>
-        </p:txBody>
-      </p:sp>
-      <p:sp>
-        <p:nvSpPr>
-          <p:cNvPr id="9" name="s7-takeaway-rule">
-            <a:extLst xmlns:a="http://schemas.openxmlformats.org/drawingml/2006/main">
-              <a:ext uri="{FF2B5EF4-FFF2-40B4-BE49-F238E27FC236}">
-                <a16:creationId xmlns:a16="http://schemas.microsoft.com/office/drawing/2014/main" id="{FE04DFEB-5841-475C-A44C-F0B1165CDC48}"/>
+              <a:t>启示｜这个案例抛出的问题很真实：当机器能听、能说、能表演情绪时，我们应该用什么标准判断它是否真的理解</a:t>
+            </a:r>
+          </a:p>
+        </p:txBody>
+      </p:sp>
+      <p:sp>
+        <p:nvSpPr>
+          <p:cNvPr id="10" name="s7-takeaway-rule">
+            <a:extLst xmlns:a="http://schemas.openxmlformats.org/drawingml/2006/main">
+              <a:ext uri="{FF2B5EF4-FFF2-40B4-BE49-F238E27FC236}">
+                <a16:creationId xmlns:a16="http://schemas.microsoft.com/office/drawing/2014/main" id="{27C377A4-DF49-4688-9F21-CD87AA65B6AE}"/>
               </a:ext>
             </a:extLst>
           </p:cNvPr>
@@ -8470,10 +8534,10 @@
       </p:sp>
       <p:sp>
         <p:nvSpPr>
-          <p:cNvPr id="10" name="s7-takeaway">
-            <a:extLst xmlns:a="http://schemas.openxmlformats.org/drawingml/2006/main">
-              <a:ext uri="{FF2B5EF4-FFF2-40B4-BE49-F238E27FC236}">
-                <a16:creationId xmlns:a16="http://schemas.microsoft.com/office/drawing/2014/main" id="{C76DB4F6-5FEA-4681-B7D9-B7C7DFB2665B}"/>
+          <p:cNvPr id="11" name="s7-takeaway">
+            <a:extLst xmlns:a="http://schemas.openxmlformats.org/drawingml/2006/main">
+              <a:ext uri="{FF2B5EF4-FFF2-40B4-BE49-F238E27FC236}">
+                <a16:creationId xmlns:a16="http://schemas.microsoft.com/office/drawing/2014/main" id="{453361F4-9AAB-4F4A-994B-E2993B697F26}"/>
               </a:ext>
             </a:extLst>
           </p:cNvPr>
@@ -8521,7 +8585,7 @@
                 <a:ea typeface="PingFang SC"/>
                 <a:cs typeface="PingFang SC"/>
               </a:rPr>
-              <a:t>机器人公民索菲亚必须经过边界验证</a:t>
+              <a:t>类人交互展示不等于机器真正理解</a:t>
             </a:r>
           </a:p>
         </p:txBody>
@@ -8529,7 +8593,7 @@
     </p:spTree>
     <p:extLst>
       <p:ext uri="{BB962C8B-B14F-4D97-AF65-F5344CB8AC3E}">
-        <p14:creationId xmlns:p14="http://schemas.microsoft.com/office/powerpoint/2010/main" val="1487140821"/>
+        <p14:creationId xmlns:p14="http://schemas.microsoft.com/office/powerpoint/2010/main" val="1194999955"/>
       </p:ext>
     </p:extLst>
   </p:cSld>
@@ -8560,7 +8624,7 @@
           <p:cNvPr id="1" name="s8-rule">
             <a:extLst xmlns:a="http://schemas.openxmlformats.org/drawingml/2006/main">
               <a:ext uri="{FF2B5EF4-FFF2-40B4-BE49-F238E27FC236}">
-                <a16:creationId xmlns:a16="http://schemas.microsoft.com/office/drawing/2014/main" id="{7F09015B-4ECB-4B28-AB42-A8A9B121D170}"/>
+                <a16:creationId xmlns:a16="http://schemas.microsoft.com/office/drawing/2014/main" id="{991372D1-FCDA-4D25-9211-29195C2A8E6F}"/>
               </a:ext>
             </a:extLst>
           </p:cNvPr>
@@ -8593,7 +8657,7 @@
           <p:cNvPr id="2" name="s8-eyebrow">
             <a:extLst xmlns:a="http://schemas.openxmlformats.org/drawingml/2006/main">
               <a:ext uri="{FF2B5EF4-FFF2-40B4-BE49-F238E27FC236}">
-                <a16:creationId xmlns:a16="http://schemas.microsoft.com/office/drawing/2014/main" id="{862B2287-EBCB-4118-BB38-E67246795034}"/>
+                <a16:creationId xmlns:a16="http://schemas.microsoft.com/office/drawing/2014/main" id="{00E3B625-F1F9-406A-8DB5-110165FB9301}"/>
               </a:ext>
             </a:extLst>
           </p:cNvPr>
@@ -8651,7 +8715,7 @@
           <p:cNvPr id="3" name="s8-title">
             <a:extLst xmlns:a="http://schemas.openxmlformats.org/drawingml/2006/main">
               <a:ext uri="{FF2B5EF4-FFF2-40B4-BE49-F238E27FC236}">
-                <a16:creationId xmlns:a16="http://schemas.microsoft.com/office/drawing/2014/main" id="{15F3D1C6-2CEE-4F5D-A839-2D2A32FDA38B}"/>
+                <a16:creationId xmlns:a16="http://schemas.microsoft.com/office/drawing/2014/main" id="{861271F1-DB21-4150-BAE7-39A6F60DD60F}"/>
               </a:ext>
             </a:extLst>
           </p:cNvPr>
@@ -8699,7 +8763,7 @@
                 <a:ea typeface="PingFang SC"/>
                 <a:cs typeface="PingFang SC"/>
               </a:rPr>
-              <a:t>会自主决策的具身大脑必须经过边界验证</a:t>
+              <a:t>具身能力要从感知、控制与反馈闭环判断</a:t>
             </a:r>
           </a:p>
         </p:txBody>
@@ -8709,7 +8773,7 @@
           <p:cNvPr id="4" name="s8-footer">
             <a:extLst xmlns:a="http://schemas.openxmlformats.org/drawingml/2006/main">
               <a:ext uri="{FF2B5EF4-FFF2-40B4-BE49-F238E27FC236}">
-                <a16:creationId xmlns:a16="http://schemas.microsoft.com/office/drawing/2014/main" id="{6D43F310-69DA-4A3B-8DC0-90D69004D9EA}"/>
+                <a16:creationId xmlns:a16="http://schemas.microsoft.com/office/drawing/2014/main" id="{277AA886-B27C-47C6-96C8-30C01AAECBC2}"/>
               </a:ext>
             </a:extLst>
           </p:cNvPr>
@@ -8740,7 +8804,7 @@
           <p:cNvPr id="5" name="s8-identity">
             <a:extLst xmlns:a="http://schemas.openxmlformats.org/drawingml/2006/main">
               <a:ext uri="{FF2B5EF4-FFF2-40B4-BE49-F238E27FC236}">
-                <a16:creationId xmlns:a16="http://schemas.microsoft.com/office/drawing/2014/main" id="{F4605055-380E-489B-B089-E12B8C56D8DD}"/>
+                <a16:creationId xmlns:a16="http://schemas.microsoft.com/office/drawing/2014/main" id="{5493AFB6-7B25-4A5B-A0F1-750D2FD339EF}"/>
               </a:ext>
             </a:extLst>
           </p:cNvPr>
@@ -8798,7 +8862,7 @@
           <p:cNvPr id="6" name="case-title">
             <a:extLst xmlns:a="http://schemas.openxmlformats.org/drawingml/2006/main">
               <a:ext uri="{FF2B5EF4-FFF2-40B4-BE49-F238E27FC236}">
-                <a16:creationId xmlns:a16="http://schemas.microsoft.com/office/drawing/2014/main" id="{B73E588A-B7C9-48E3-B451-84CE45782C74}"/>
+                <a16:creationId xmlns:a16="http://schemas.microsoft.com/office/drawing/2014/main" id="{5B0886FE-1788-43EB-8F0A-4FA50F7B7E7D}"/>
               </a:ext>
             </a:extLst>
           </p:cNvPr>
@@ -8862,7 +8926,7 @@
           <p:cNvPr id="7" name="case-row-0">
             <a:extLst xmlns:a="http://schemas.openxmlformats.org/drawingml/2006/main">
               <a:ext uri="{FF2B5EF4-FFF2-40B4-BE49-F238E27FC236}">
-                <a16:creationId xmlns:a16="http://schemas.microsoft.com/office/drawing/2014/main" id="{C0DFC2F4-12D5-4ACD-9960-A0A80ADCD026}"/>
+                <a16:creationId xmlns:a16="http://schemas.microsoft.com/office/drawing/2014/main" id="{892A027A-85AA-41F3-A819-DC6314D25F00}"/>
               </a:ext>
             </a:extLst>
           </p:cNvPr>
@@ -8916,7 +8980,7 @@
                 <a:ea typeface="PingFang SC"/>
                 <a:cs typeface="PingFang SC"/>
               </a:rPr>
-              <a:t>场景｜和索菲亚强调类人交互的展示不同，具身系统关注站立、行走和平衡等物理动作。仅凭一次演示不能判断系统的自主决策范围，因此这里把它作为观察具身闭环的入口：传感器读取状态…</a:t>
+              <a:t>方法｜和索菲亚强调类人交互的展示不同，具身系统关注站立、行走和平衡等物理动作</a:t>
             </a:r>
           </a:p>
         </p:txBody>
@@ -8926,7 +8990,7 @@
           <p:cNvPr id="8" name="case-row-1">
             <a:extLst xmlns:a="http://schemas.openxmlformats.org/drawingml/2006/main">
               <a:ext uri="{FF2B5EF4-FFF2-40B4-BE49-F238E27FC236}">
-                <a16:creationId xmlns:a16="http://schemas.microsoft.com/office/drawing/2014/main" id="{2C7E4A0B-3796-4627-BF9F-B38C06537F25}"/>
+                <a16:creationId xmlns:a16="http://schemas.microsoft.com/office/drawing/2014/main" id="{7D020AAD-64AF-4483-9B5D-9CAEB2CD7AC7}"/>
               </a:ext>
             </a:extLst>
           </p:cNvPr>
@@ -8950,7 +9014,7 @@
           </a:solidFill>
           <a:ln xmlns:a="http://schemas.openxmlformats.org/drawingml/2006/main" w="9525">
             <a:solidFill>
-              <a:srgbClr val="D6A33A"/>
+              <a:srgbClr val="8A5A00"/>
             </a:solidFill>
             <a:prstDash val="solid"/>
           </a:ln>
@@ -8980,7 +9044,7 @@
                 <a:ea typeface="PingFang SC"/>
                 <a:cs typeface="PingFang SC"/>
               </a:rPr>
-              <a:t>验证｜验收“会自主决策的具身大脑”时，要同时记录适用场景、证据来源、失败条件与人工责任</a:t>
+              <a:t>边界｜仅凭一次演示不能判断系统的自主决策范围，因此这里把它作为观察具身闭环的入口：传感器读取状态，控制系统生成动作，机器人执行后再根据反馈修正</a:t>
             </a:r>
           </a:p>
         </p:txBody>
@@ -8990,7 +9054,7 @@
           <p:cNvPr id="9" name="s8-takeaway-rule">
             <a:extLst xmlns:a="http://schemas.openxmlformats.org/drawingml/2006/main">
               <a:ext uri="{FF2B5EF4-FFF2-40B4-BE49-F238E27FC236}">
-                <a16:creationId xmlns:a16="http://schemas.microsoft.com/office/drawing/2014/main" id="{BF83A96B-5D25-4070-81ED-E3638B1ED714}"/>
+                <a16:creationId xmlns:a16="http://schemas.microsoft.com/office/drawing/2014/main" id="{50B4B011-8045-472B-B5F5-C7AC88476C2B}"/>
               </a:ext>
             </a:extLst>
           </p:cNvPr>
@@ -9023,7 +9087,7 @@
           <p:cNvPr id="10" name="s8-takeaway">
             <a:extLst xmlns:a="http://schemas.openxmlformats.org/drawingml/2006/main">
               <a:ext uri="{FF2B5EF4-FFF2-40B4-BE49-F238E27FC236}">
-                <a16:creationId xmlns:a16="http://schemas.microsoft.com/office/drawing/2014/main" id="{DBB020AA-7292-4B4A-894D-553E11ED0F18}"/>
+                <a16:creationId xmlns:a16="http://schemas.microsoft.com/office/drawing/2014/main" id="{F31F6D6A-3D0E-4F37-BB42-B365697FEAE0}"/>
               </a:ext>
             </a:extLst>
           </p:cNvPr>
@@ -9071,7 +9135,7 @@
                 <a:ea typeface="PingFang SC"/>
                 <a:cs typeface="PingFang SC"/>
               </a:rPr>
-              <a:t>会自主决策的具身大脑必须经过边界验证</a:t>
+              <a:t>具身能力要从感知、控制与反馈闭环判断</a:t>
             </a:r>
           </a:p>
         </p:txBody>
@@ -9079,7 +9143,7 @@
     </p:spTree>
     <p:extLst>
       <p:ext uri="{BB962C8B-B14F-4D97-AF65-F5344CB8AC3E}">
-        <p14:creationId xmlns:p14="http://schemas.microsoft.com/office/powerpoint/2010/main" val="1676940981"/>
+        <p14:creationId xmlns:p14="http://schemas.microsoft.com/office/powerpoint/2010/main" val="959083459"/>
       </p:ext>
     </p:extLst>
   </p:cSld>
@@ -9110,7 +9174,7 @@
           <p:cNvPr id="1" name="s9-rule">
             <a:extLst xmlns:a="http://schemas.openxmlformats.org/drawingml/2006/main">
               <a:ext uri="{FF2B5EF4-FFF2-40B4-BE49-F238E27FC236}">
-                <a16:creationId xmlns:a16="http://schemas.microsoft.com/office/drawing/2014/main" id="{E3D1F549-B81B-48EF-AA86-C7FD963C3D16}"/>
+                <a16:creationId xmlns:a16="http://schemas.microsoft.com/office/drawing/2014/main" id="{FF53F98F-03B2-4BFC-8D11-E41DF348307E}"/>
               </a:ext>
             </a:extLst>
           </p:cNvPr>
@@ -9143,7 +9207,7 @@
           <p:cNvPr id="2" name="s9-eyebrow">
             <a:extLst xmlns:a="http://schemas.openxmlformats.org/drawingml/2006/main">
               <a:ext uri="{FF2B5EF4-FFF2-40B4-BE49-F238E27FC236}">
-                <a16:creationId xmlns:a16="http://schemas.microsoft.com/office/drawing/2014/main" id="{D3382652-C2C2-4F27-94FB-75A0F78B6C24}"/>
+                <a16:creationId xmlns:a16="http://schemas.microsoft.com/office/drawing/2014/main" id="{7D6B4079-2DAD-46D3-88C8-AB1586372176}"/>
               </a:ext>
             </a:extLst>
           </p:cNvPr>
@@ -9201,7 +9265,7 @@
           <p:cNvPr id="3" name="s9-title">
             <a:extLst xmlns:a="http://schemas.openxmlformats.org/drawingml/2006/main">
               <a:ext uri="{FF2B5EF4-FFF2-40B4-BE49-F238E27FC236}">
-                <a16:creationId xmlns:a16="http://schemas.microsoft.com/office/drawing/2014/main" id="{15A865C9-E552-4450-AD04-753C26630DD1}"/>
+                <a16:creationId xmlns:a16="http://schemas.microsoft.com/office/drawing/2014/main" id="{E57B30A5-3D31-4380-9F48-0618EA0D6EAA}"/>
               </a:ext>
             </a:extLst>
           </p:cNvPr>
@@ -9259,7 +9323,7 @@
           <p:cNvPr id="4" name="s9-footer">
             <a:extLst xmlns:a="http://schemas.openxmlformats.org/drawingml/2006/main">
               <a:ext uri="{FF2B5EF4-FFF2-40B4-BE49-F238E27FC236}">
-                <a16:creationId xmlns:a16="http://schemas.microsoft.com/office/drawing/2014/main" id="{20F32B54-822B-455A-8075-23F07A236C2A}"/>
+                <a16:creationId xmlns:a16="http://schemas.microsoft.com/office/drawing/2014/main" id="{56EDCA7A-2125-4F63-913C-3F9C1CE82B2B}"/>
               </a:ext>
             </a:extLst>
           </p:cNvPr>
@@ -9290,7 +9354,7 @@
           <p:cNvPr id="5" name="s9-identity">
             <a:extLst xmlns:a="http://schemas.openxmlformats.org/drawingml/2006/main">
               <a:ext uri="{FF2B5EF4-FFF2-40B4-BE49-F238E27FC236}">
-                <a16:creationId xmlns:a16="http://schemas.microsoft.com/office/drawing/2014/main" id="{2548A70F-1722-4905-B1A3-9C538433C1F2}"/>
+                <a16:creationId xmlns:a16="http://schemas.microsoft.com/office/drawing/2014/main" id="{5C9648D8-59F0-4BA0-9574-F88AA8B06DCF}"/>
               </a:ext>
             </a:extLst>
           </p:cNvPr>
@@ -9348,7 +9412,7 @@
           <p:cNvPr id="6" name="case-title">
             <a:extLst xmlns:a="http://schemas.openxmlformats.org/drawingml/2006/main">
               <a:ext uri="{FF2B5EF4-FFF2-40B4-BE49-F238E27FC236}">
-                <a16:creationId xmlns:a16="http://schemas.microsoft.com/office/drawing/2014/main" id="{D2615C50-D69F-4560-B1FF-98C74578BD0E}"/>
+                <a16:creationId xmlns:a16="http://schemas.microsoft.com/office/drawing/2014/main" id="{65A03B46-25BF-4D5A-91E0-F270C054B077}"/>
               </a:ext>
             </a:extLst>
           </p:cNvPr>
@@ -9412,23 +9476,23 @@
           <p:cNvPr id="7" name="case-row-0">
             <a:extLst xmlns:a="http://schemas.openxmlformats.org/drawingml/2006/main">
               <a:ext uri="{FF2B5EF4-FFF2-40B4-BE49-F238E27FC236}">
-                <a16:creationId xmlns:a16="http://schemas.microsoft.com/office/drawing/2014/main" id="{DA06291B-D4CA-4711-8E71-45F1ACE007FE}"/>
-              </a:ext>
-            </a:extLst>
-          </p:cNvPr>
-          <p:cNvSpPr>
-            <a:spLocks xmlns:a="http://schemas.openxmlformats.org/drawingml/2006/main" noGrp="1"/>
-          </p:cNvSpPr>
-          <p:nvPr/>
-        </p:nvSpPr>
-        <p:spPr>
-          <a:xfrm xmlns:a="http://schemas.openxmlformats.org/drawingml/2006/main">
-            <a:off x="4286250" y="2228850"/>
-            <a:ext cx="6534150" cy="1238250"/>
+                <a16:creationId xmlns:a16="http://schemas.microsoft.com/office/drawing/2014/main" id="{26C91762-0EC4-4B4D-8B22-810494EEB0B9}"/>
+              </a:ext>
+            </a:extLst>
+          </p:cNvPr>
+          <p:cNvSpPr>
+            <a:spLocks xmlns:a="http://schemas.openxmlformats.org/drawingml/2006/main" noGrp="1"/>
+          </p:cNvSpPr>
+          <p:nvPr/>
+        </p:nvSpPr>
+        <p:spPr>
+          <a:xfrm xmlns:a="http://schemas.openxmlformats.org/drawingml/2006/main">
+            <a:off x="4286250" y="2057400"/>
+            <a:ext cx="6534150" cy="838200"/>
           </a:xfrm>
           <a:prstGeom xmlns:a="http://schemas.openxmlformats.org/drawingml/2006/main" prst="roundRect">
             <a:avLst>
-              <a:gd name="adj" fmla="val 10000"/>
+              <a:gd name="adj" fmla="val 14773"/>
             </a:avLst>
           </a:prstGeom>
           <a:solidFill xmlns:a="http://schemas.openxmlformats.org/drawingml/2006/main">
@@ -9443,6 +9507,70 @@
         </p:spPr>
         <p:txBody>
           <a:bodyPr xmlns:a="http://schemas.openxmlformats.org/drawingml/2006/main" lIns="152400" tIns="133350" rIns="152400" bIns="133350" anchor="ctr">
+            <a:normAutofit fontScale="75012"/>
+          </a:bodyPr>
+          <a:lstStyle xmlns:a="http://schemas.openxmlformats.org/drawingml/2006/main"/>
+          <a:p xmlns:a="http://schemas.openxmlformats.org/drawingml/2006/main">
+            <a:pPr algn="l">
+              <a:defRPr sz="1575" b="0">
+                <a:solidFill>
+                  <a:srgbClr val="10233F"/>
+                </a:solidFill>
+                <a:latin typeface="PingFang SC"/>
+                <a:ea typeface="PingFang SC"/>
+                <a:cs typeface="PingFang SC"/>
+              </a:defRPr>
+            </a:pPr>
+            <a:r>
+              <a:rPr sz="1575" b="0">
+                <a:solidFill>
+                  <a:srgbClr val="10233F"/>
+                </a:solidFill>
+                <a:latin typeface="PingFang SC"/>
+                <a:ea typeface="PingFang SC"/>
+                <a:cs typeface="PingFang SC"/>
+              </a:rPr>
+              <a:t>方法｜团队课件以 Crowdverse 作为具身仿真案例，其中的“全身动作重定向”（Whole-Body Motion Retargeting）把人的动作映射到机器人模型</a:t>
+            </a:r>
+          </a:p>
+        </p:txBody>
+      </p:sp>
+      <p:sp>
+        <p:nvSpPr>
+          <p:cNvPr id="8" name="case-row-1">
+            <a:extLst xmlns:a="http://schemas.openxmlformats.org/drawingml/2006/main">
+              <a:ext uri="{FF2B5EF4-FFF2-40B4-BE49-F238E27FC236}">
+                <a16:creationId xmlns:a16="http://schemas.microsoft.com/office/drawing/2014/main" id="{813DC20F-9756-4D30-80D0-D10E738DB03F}"/>
+              </a:ext>
+            </a:extLst>
+          </p:cNvPr>
+          <p:cNvSpPr>
+            <a:spLocks xmlns:a="http://schemas.openxmlformats.org/drawingml/2006/main" noGrp="1"/>
+          </p:cNvSpPr>
+          <p:nvPr/>
+        </p:nvSpPr>
+        <p:spPr>
+          <a:xfrm xmlns:a="http://schemas.openxmlformats.org/drawingml/2006/main">
+            <a:off x="4286250" y="3086100"/>
+            <a:ext cx="6534150" cy="838200"/>
+          </a:xfrm>
+          <a:prstGeom xmlns:a="http://schemas.openxmlformats.org/drawingml/2006/main" prst="roundRect">
+            <a:avLst>
+              <a:gd name="adj" fmla="val 14773"/>
+            </a:avLst>
+          </a:prstGeom>
+          <a:solidFill xmlns:a="http://schemas.openxmlformats.org/drawingml/2006/main">
+            <a:srgbClr val="FFFFFF"/>
+          </a:solidFill>
+          <a:ln xmlns:a="http://schemas.openxmlformats.org/drawingml/2006/main" w="9525">
+            <a:solidFill>
+              <a:srgbClr val="D8E0E8"/>
+            </a:solidFill>
+            <a:prstDash val="solid"/>
+          </a:ln>
+        </p:spPr>
+        <p:txBody>
+          <a:bodyPr xmlns:a="http://schemas.openxmlformats.org/drawingml/2006/main" lIns="152400" tIns="133350" rIns="152400" bIns="133350" anchor="ctr">
             <a:normAutofit fontScale="100000"/>
           </a:bodyPr>
           <a:lstStyle xmlns:a="http://schemas.openxmlformats.org/drawingml/2006/main"/>
@@ -9466,33 +9594,33 @@
                 <a:ea typeface="PingFang SC"/>
                 <a:cs typeface="PingFang SC"/>
               </a:rPr>
-              <a:t>场景｜团队课件以 Crowdverse 作为具身仿真案例，其中的“全身动作重定向”（Whole-Body Motion Retargeting）把人的动作映射到机器人模型…</a:t>
-            </a:r>
-          </a:p>
-        </p:txBody>
-      </p:sp>
-      <p:sp>
-        <p:nvSpPr>
-          <p:cNvPr id="8" name="case-row-1">
-            <a:extLst xmlns:a="http://schemas.openxmlformats.org/drawingml/2006/main">
-              <a:ext uri="{FF2B5EF4-FFF2-40B4-BE49-F238E27FC236}">
-                <a16:creationId xmlns:a16="http://schemas.microsoft.com/office/drawing/2014/main" id="{717866C9-5357-460E-AB19-8850435E105C}"/>
-              </a:ext>
-            </a:extLst>
-          </p:cNvPr>
-          <p:cNvSpPr>
-            <a:spLocks xmlns:a="http://schemas.openxmlformats.org/drawingml/2006/main" noGrp="1"/>
-          </p:cNvSpPr>
-          <p:nvPr/>
-        </p:nvSpPr>
-        <p:spPr>
-          <a:xfrm xmlns:a="http://schemas.openxmlformats.org/drawingml/2006/main">
-            <a:off x="4286250" y="3714750"/>
-            <a:ext cx="6534150" cy="1238250"/>
+              <a:t>结果｜它的价值，是先在可重复的虚拟环境中检查任务控制、状态反馈与行为评估，再决定哪些结果值得进入真机验证</a:t>
+            </a:r>
+          </a:p>
+        </p:txBody>
+      </p:sp>
+      <p:sp>
+        <p:nvSpPr>
+          <p:cNvPr id="9" name="case-row-2">
+            <a:extLst xmlns:a="http://schemas.openxmlformats.org/drawingml/2006/main">
+              <a:ext uri="{FF2B5EF4-FFF2-40B4-BE49-F238E27FC236}">
+                <a16:creationId xmlns:a16="http://schemas.microsoft.com/office/drawing/2014/main" id="{AAF3B48A-B8D2-4241-9EDB-FB115778A64C}"/>
+              </a:ext>
+            </a:extLst>
+          </p:cNvPr>
+          <p:cNvSpPr>
+            <a:spLocks xmlns:a="http://schemas.openxmlformats.org/drawingml/2006/main" noGrp="1"/>
+          </p:cNvSpPr>
+          <p:nvPr/>
+        </p:nvSpPr>
+        <p:spPr>
+          <a:xfrm xmlns:a="http://schemas.openxmlformats.org/drawingml/2006/main">
+            <a:off x="4286250" y="4114800"/>
+            <a:ext cx="6534150" cy="838200"/>
           </a:xfrm>
           <a:prstGeom xmlns:a="http://schemas.openxmlformats.org/drawingml/2006/main" prst="roundRect">
             <a:avLst>
-              <a:gd name="adj" fmla="val 10000"/>
+              <a:gd name="adj" fmla="val 14773"/>
             </a:avLst>
           </a:prstGeom>
           <a:solidFill xmlns:a="http://schemas.openxmlformats.org/drawingml/2006/main">
@@ -9500,7 +9628,7 @@
           </a:solidFill>
           <a:ln xmlns:a="http://schemas.openxmlformats.org/drawingml/2006/main" w="9525">
             <a:solidFill>
-              <a:srgbClr val="D6A33A"/>
+              <a:srgbClr val="8A5A00"/>
             </a:solidFill>
             <a:prstDash val="solid"/>
           </a:ln>
@@ -9530,17 +9658,17 @@
                 <a:ea typeface="PingFang SC"/>
                 <a:cs typeface="PingFang SC"/>
               </a:rPr>
-              <a:t>验证｜验收“从仿真到真机的闭环：Crowdverse”时，要同时记录适用场景、证据来源、失败条件与人工责任</a:t>
-            </a:r>
-          </a:p>
-        </p:txBody>
-      </p:sp>
-      <p:sp>
-        <p:nvSpPr>
-          <p:cNvPr id="9" name="s9-takeaway-rule">
-            <a:extLst xmlns:a="http://schemas.openxmlformats.org/drawingml/2006/main">
-              <a:ext uri="{FF2B5EF4-FFF2-40B4-BE49-F238E27FC236}">
-                <a16:creationId xmlns:a16="http://schemas.microsoft.com/office/drawing/2014/main" id="{40DF9901-8468-4C17-B3FE-75BBCFA47877}"/>
+              <a:t>边界｜仿真能够降低真机试错的成本和风险，但不能自动证明策略在现实中同样有效</a:t>
+            </a:r>
+          </a:p>
+        </p:txBody>
+      </p:sp>
+      <p:sp>
+        <p:nvSpPr>
+          <p:cNvPr id="10" name="s9-takeaway-rule">
+            <a:extLst xmlns:a="http://schemas.openxmlformats.org/drawingml/2006/main">
+              <a:ext uri="{FF2B5EF4-FFF2-40B4-BE49-F238E27FC236}">
+                <a16:creationId xmlns:a16="http://schemas.microsoft.com/office/drawing/2014/main" id="{A8EF773E-98D4-4199-AAC8-6C610B749AA1}"/>
               </a:ext>
             </a:extLst>
           </p:cNvPr>
@@ -9570,10 +9698,10 @@
       </p:sp>
       <p:sp>
         <p:nvSpPr>
-          <p:cNvPr id="10" name="s9-takeaway">
-            <a:extLst xmlns:a="http://schemas.openxmlformats.org/drawingml/2006/main">
-              <a:ext uri="{FF2B5EF4-FFF2-40B4-BE49-F238E27FC236}">
-                <a16:creationId xmlns:a16="http://schemas.microsoft.com/office/drawing/2014/main" id="{48EBED22-00D2-444C-9441-8222CAB98627}"/>
+          <p:cNvPr id="11" name="s9-takeaway">
+            <a:extLst xmlns:a="http://schemas.openxmlformats.org/drawingml/2006/main">
+              <a:ext uri="{FF2B5EF4-FFF2-40B4-BE49-F238E27FC236}">
+                <a16:creationId xmlns:a16="http://schemas.microsoft.com/office/drawing/2014/main" id="{C8339470-217D-40EA-A728-1CCF052FA996}"/>
               </a:ext>
             </a:extLst>
           </p:cNvPr>
@@ -9629,7 +9757,7 @@
     </p:spTree>
     <p:extLst>
       <p:ext uri="{BB962C8B-B14F-4D97-AF65-F5344CB8AC3E}">
-        <p14:creationId xmlns:p14="http://schemas.microsoft.com/office/powerpoint/2010/main" val="1352357481"/>
+        <p14:creationId xmlns:p14="http://schemas.microsoft.com/office/powerpoint/2010/main" val="1229622862"/>
       </p:ext>
     </p:extLst>
   </p:cSld>

--- a/docs/public/course-assets/course-pptx/ov-001.pptx
+++ b/docs/public/course-assets/course-pptx/ov-001.pptx
@@ -2,24 +2,24 @@
 <file path=ppt/presentation.xml><?xml version="1.0" encoding="utf-8"?>
 <p:presentation xmlns:p="http://schemas.openxmlformats.org/presentationml/2006/main">
   <p:sldMasterIdLst>
-    <p:sldMasterId xmlns:r="http://schemas.openxmlformats.org/officeDocument/2006/relationships" id="2147483648" r:id="R2a0e0e6ff48044d0"/>
+    <p:sldMasterId xmlns:r="http://schemas.openxmlformats.org/officeDocument/2006/relationships" id="2147483648" r:id="Rf8e6ac979f6b4836"/>
   </p:sldMasterIdLst>
   <p:notesMasterIdLst>
-    <p:notesMasterId xmlns:r="http://schemas.openxmlformats.org/officeDocument/2006/relationships" r:id="R99441d0e1e334579"/>
+    <p:notesMasterId xmlns:r="http://schemas.openxmlformats.org/officeDocument/2006/relationships" r:id="Re3817c35b4ca4afd"/>
   </p:notesMasterIdLst>
   <p:sldIdLst>
-    <p:sldId xmlns:r="http://schemas.openxmlformats.org/officeDocument/2006/relationships" id="256" r:id="R5358f8bfc58249da"/>
-    <p:sldId xmlns:r="http://schemas.openxmlformats.org/officeDocument/2006/relationships" id="257" r:id="Rfa15180de8304abf"/>
-    <p:sldId xmlns:r="http://schemas.openxmlformats.org/officeDocument/2006/relationships" id="258" r:id="R0c1624061a43401b"/>
-    <p:sldId xmlns:r="http://schemas.openxmlformats.org/officeDocument/2006/relationships" id="259" r:id="R9fa03b38d6e946f9"/>
-    <p:sldId xmlns:r="http://schemas.openxmlformats.org/officeDocument/2006/relationships" id="260" r:id="R480037f55bf84507"/>
-    <p:sldId xmlns:r="http://schemas.openxmlformats.org/officeDocument/2006/relationships" id="261" r:id="R9a69f69872ab4603"/>
-    <p:sldId xmlns:r="http://schemas.openxmlformats.org/officeDocument/2006/relationships" id="262" r:id="R2454ebfc3e9045c2"/>
-    <p:sldId xmlns:r="http://schemas.openxmlformats.org/officeDocument/2006/relationships" id="263" r:id="R7bdb16e8edaa4de6"/>
-    <p:sldId xmlns:r="http://schemas.openxmlformats.org/officeDocument/2006/relationships" id="264" r:id="R94c332175b904186"/>
-    <p:sldId xmlns:r="http://schemas.openxmlformats.org/officeDocument/2006/relationships" id="265" r:id="Rf5fe3df6f660455e"/>
-    <p:sldId xmlns:r="http://schemas.openxmlformats.org/officeDocument/2006/relationships" id="266" r:id="R6dac947a9d0d4e99"/>
-    <p:sldId xmlns:r="http://schemas.openxmlformats.org/officeDocument/2006/relationships" id="267" r:id="R5030b8a6fa0a45e7"/>
+    <p:sldId xmlns:r="http://schemas.openxmlformats.org/officeDocument/2006/relationships" id="256" r:id="R524c7b36b753457e"/>
+    <p:sldId xmlns:r="http://schemas.openxmlformats.org/officeDocument/2006/relationships" id="257" r:id="R889000e4da154570"/>
+    <p:sldId xmlns:r="http://schemas.openxmlformats.org/officeDocument/2006/relationships" id="258" r:id="Rc63dfb72f1af42e9"/>
+    <p:sldId xmlns:r="http://schemas.openxmlformats.org/officeDocument/2006/relationships" id="259" r:id="R9010177b6e6f45cc"/>
+    <p:sldId xmlns:r="http://schemas.openxmlformats.org/officeDocument/2006/relationships" id="260" r:id="R11a2afbf89f144ec"/>
+    <p:sldId xmlns:r="http://schemas.openxmlformats.org/officeDocument/2006/relationships" id="261" r:id="R65444c5ceff34b32"/>
+    <p:sldId xmlns:r="http://schemas.openxmlformats.org/officeDocument/2006/relationships" id="262" r:id="Recb3cf642a2848bd"/>
+    <p:sldId xmlns:r="http://schemas.openxmlformats.org/officeDocument/2006/relationships" id="263" r:id="Rd6518d34e41e4653"/>
+    <p:sldId xmlns:r="http://schemas.openxmlformats.org/officeDocument/2006/relationships" id="264" r:id="R6c98ffd3b0764a38"/>
+    <p:sldId xmlns:r="http://schemas.openxmlformats.org/officeDocument/2006/relationships" id="265" r:id="Rceb1fdc4156047f0"/>
+    <p:sldId xmlns:r="http://schemas.openxmlformats.org/officeDocument/2006/relationships" id="266" r:id="R815512e05d5a4e1c"/>
+    <p:sldId xmlns:r="http://schemas.openxmlformats.org/officeDocument/2006/relationships" id="267" r:id="R12d2f057c77145da"/>
   </p:sldIdLst>
   <p:sldSz cx="12192000" cy="6858000"/>
   <p:notesSz cx="6858000" cy="9144000"/>
@@ -1338,7 +1338,7 @@
   </p:cSld>
   <p:clrMap bg1="lt1" tx1="dk1" bg2="lt2" tx2="dk2" accent1="accent1" accent2="accent2" accent3="accent3" accent4="accent4" accent5="accent5" accent6="accent6" hlink="hlink" folHlink="folHlink"/>
   <p:sldLayoutIdLst>
-    <p:sldLayoutId xmlns:r="http://schemas.openxmlformats.org/officeDocument/2006/relationships" id="2147483649" r:id="R43771ed2511f4bc9"/>
+    <p:sldLayoutId xmlns:r="http://schemas.openxmlformats.org/officeDocument/2006/relationships" id="2147483649" r:id="R2c71d34a54924fbf"/>
   </p:sldLayoutIdLst>
   <p:txStyles>
     <p:titleStyle>
@@ -1889,7 +1889,7 @@
           <p:cNvPr id="1" name="cover-rule">
             <a:extLst xmlns:a="http://schemas.openxmlformats.org/drawingml/2006/main">
               <a:ext uri="{FF2B5EF4-FFF2-40B4-BE49-F238E27FC236}">
-                <a16:creationId xmlns:a16="http://schemas.microsoft.com/office/drawing/2014/main" id="{29B4A413-01DA-4844-A683-A8104AAF8DCC}"/>
+                <a16:creationId xmlns:a16="http://schemas.microsoft.com/office/drawing/2014/main" id="{0FE41C0F-2DAD-4EC8-861F-77533816D1D6}"/>
               </a:ext>
             </a:extLst>
           </p:cNvPr>
@@ -1922,7 +1922,7 @@
           <p:cNvPr id="2" name="cover-ring-1">
             <a:extLst xmlns:a="http://schemas.openxmlformats.org/drawingml/2006/main">
               <a:ext uri="{FF2B5EF4-FFF2-40B4-BE49-F238E27FC236}">
-                <a16:creationId xmlns:a16="http://schemas.microsoft.com/office/drawing/2014/main" id="{015D632E-03D5-41DE-A9F3-60A83705201D}"/>
+                <a16:creationId xmlns:a16="http://schemas.microsoft.com/office/drawing/2014/main" id="{B504AA06-A601-48EE-BC66-D406E0FDE2F2}"/>
               </a:ext>
             </a:extLst>
           </p:cNvPr>
@@ -1953,7 +1953,7 @@
           <p:cNvPr id="3" name="cover-ring-2">
             <a:extLst xmlns:a="http://schemas.openxmlformats.org/drawingml/2006/main">
               <a:ext uri="{FF2B5EF4-FFF2-40B4-BE49-F238E27FC236}">
-                <a16:creationId xmlns:a16="http://schemas.microsoft.com/office/drawing/2014/main" id="{0E2A4F8C-7A12-4C99-A994-4E547C476688}"/>
+                <a16:creationId xmlns:a16="http://schemas.microsoft.com/office/drawing/2014/main" id="{A12DE5FC-056E-4361-96B8-8377BA5B7B56}"/>
               </a:ext>
             </a:extLst>
           </p:cNvPr>
@@ -1984,7 +1984,7 @@
           <p:cNvPr id="4" name="cover-core">
             <a:extLst xmlns:a="http://schemas.openxmlformats.org/drawingml/2006/main">
               <a:ext uri="{FF2B5EF4-FFF2-40B4-BE49-F238E27FC236}">
-                <a16:creationId xmlns:a16="http://schemas.microsoft.com/office/drawing/2014/main" id="{9309884A-390F-494D-80DF-E761B9E4883B}"/>
+                <a16:creationId xmlns:a16="http://schemas.microsoft.com/office/drawing/2014/main" id="{576F4182-2851-4967-AE62-4E3B6AE468CC}"/>
               </a:ext>
             </a:extLst>
           </p:cNvPr>
@@ -2017,7 +2017,7 @@
           <p:cNvPr id="5" name="cover-line-1">
             <a:extLst xmlns:a="http://schemas.openxmlformats.org/drawingml/2006/main">
               <a:ext uri="{FF2B5EF4-FFF2-40B4-BE49-F238E27FC236}">
-                <a16:creationId xmlns:a16="http://schemas.microsoft.com/office/drawing/2014/main" id="{C4EA6869-3A2C-410F-BD94-ACDB4259CC49}"/>
+                <a16:creationId xmlns:a16="http://schemas.microsoft.com/office/drawing/2014/main" id="{B556D91B-FBB3-4CA8-9E42-20162725683D}"/>
               </a:ext>
             </a:extLst>
           </p:cNvPr>
@@ -2048,7 +2048,7 @@
           <p:cNvPr id="6" name="cover-line-2">
             <a:extLst xmlns:a="http://schemas.openxmlformats.org/drawingml/2006/main">
               <a:ext uri="{FF2B5EF4-FFF2-40B4-BE49-F238E27FC236}">
-                <a16:creationId xmlns:a16="http://schemas.microsoft.com/office/drawing/2014/main" id="{F7C387BD-E7C0-4C3A-BB12-E4B03CFC9A0B}"/>
+                <a16:creationId xmlns:a16="http://schemas.microsoft.com/office/drawing/2014/main" id="{11F834CF-9207-4579-AD7B-C9D63AAF5F40}"/>
               </a:ext>
             </a:extLst>
           </p:cNvPr>
@@ -2079,7 +2079,7 @@
           <p:cNvPr id="7" name="cover-eyebrow">
             <a:extLst xmlns:a="http://schemas.openxmlformats.org/drawingml/2006/main">
               <a:ext uri="{FF2B5EF4-FFF2-40B4-BE49-F238E27FC236}">
-                <a16:creationId xmlns:a16="http://schemas.microsoft.com/office/drawing/2014/main" id="{9786B0AF-C952-4758-BCCE-3C5474252452}"/>
+                <a16:creationId xmlns:a16="http://schemas.microsoft.com/office/drawing/2014/main" id="{9E37B5C6-266B-4AA3-A8C9-62EDA2B213A3}"/>
               </a:ext>
             </a:extLst>
           </p:cNvPr>
@@ -2137,7 +2137,7 @@
           <p:cNvPr id="8" name="cover-title">
             <a:extLst xmlns:a="http://schemas.openxmlformats.org/drawingml/2006/main">
               <a:ext uri="{FF2B5EF4-FFF2-40B4-BE49-F238E27FC236}">
-                <a16:creationId xmlns:a16="http://schemas.microsoft.com/office/drawing/2014/main" id="{4935AC08-CE92-41A2-89A5-11EA5491EE72}"/>
+                <a16:creationId xmlns:a16="http://schemas.microsoft.com/office/drawing/2014/main" id="{8CC5DD61-9AB1-44B8-9E31-AD1DD2778C48}"/>
               </a:ext>
             </a:extLst>
           </p:cNvPr>
@@ -2195,7 +2195,7 @@
           <p:cNvPr id="9" name="cover-subtitle">
             <a:extLst xmlns:a="http://schemas.openxmlformats.org/drawingml/2006/main">
               <a:ext uri="{FF2B5EF4-FFF2-40B4-BE49-F238E27FC236}">
-                <a16:creationId xmlns:a16="http://schemas.microsoft.com/office/drawing/2014/main" id="{5246677F-13B5-49D6-8C1F-33315F549B18}"/>
+                <a16:creationId xmlns:a16="http://schemas.microsoft.com/office/drawing/2014/main" id="{7916C537-02EA-4C55-BBB6-5DC064346A5C}"/>
               </a:ext>
             </a:extLst>
           </p:cNvPr>
@@ -2257,7 +2257,7 @@
           <p:cNvPr id="10" name="cover-lead">
             <a:extLst xmlns:a="http://schemas.openxmlformats.org/drawingml/2006/main">
               <a:ext uri="{FF2B5EF4-FFF2-40B4-BE49-F238E27FC236}">
-                <a16:creationId xmlns:a16="http://schemas.microsoft.com/office/drawing/2014/main" id="{8CB291E9-4E28-4795-BD47-CC568A2FFE0D}"/>
+                <a16:creationId xmlns:a16="http://schemas.microsoft.com/office/drawing/2014/main" id="{4EF9E02B-1BFB-417C-B0F9-144D8AE17EB0}"/>
               </a:ext>
             </a:extLst>
           </p:cNvPr>
@@ -2315,7 +2315,7 @@
           <p:cNvPr id="11" name="cover-course">
             <a:extLst xmlns:a="http://schemas.openxmlformats.org/drawingml/2006/main">
               <a:ext uri="{FF2B5EF4-FFF2-40B4-BE49-F238E27FC236}">
-                <a16:creationId xmlns:a16="http://schemas.microsoft.com/office/drawing/2014/main" id="{907A7143-E0A9-4FB6-A985-17E631A1ADFF}"/>
+                <a16:creationId xmlns:a16="http://schemas.microsoft.com/office/drawing/2014/main" id="{79204D09-6909-40B1-88C4-AD2E801A15BD}"/>
               </a:ext>
             </a:extLst>
           </p:cNvPr>
@@ -2373,7 +2373,7 @@
           <p:cNvPr id="12" name="cover-id">
             <a:extLst xmlns:a="http://schemas.openxmlformats.org/drawingml/2006/main">
               <a:ext uri="{FF2B5EF4-FFF2-40B4-BE49-F238E27FC236}">
-                <a16:creationId xmlns:a16="http://schemas.microsoft.com/office/drawing/2014/main" id="{73271C8E-E058-403A-9225-4BF443989F29}"/>
+                <a16:creationId xmlns:a16="http://schemas.microsoft.com/office/drawing/2014/main" id="{BA24A1AA-4D75-43A2-A31B-F3DDCD079911}"/>
               </a:ext>
             </a:extLst>
           </p:cNvPr>
@@ -2429,7 +2429,7 @@
     </p:spTree>
     <p:extLst>
       <p:ext uri="{BB962C8B-B14F-4D97-AF65-F5344CB8AC3E}">
-        <p14:creationId xmlns:p14="http://schemas.microsoft.com/office/powerpoint/2010/main" val="400842416"/>
+        <p14:creationId xmlns:p14="http://schemas.microsoft.com/office/powerpoint/2010/main" val="1408048153"/>
       </p:ext>
     </p:extLst>
   </p:cSld>
@@ -2460,7 +2460,7 @@
           <p:cNvPr id="1" name="s10-rule">
             <a:extLst xmlns:a="http://schemas.openxmlformats.org/drawingml/2006/main">
               <a:ext uri="{FF2B5EF4-FFF2-40B4-BE49-F238E27FC236}">
-                <a16:creationId xmlns:a16="http://schemas.microsoft.com/office/drawing/2014/main" id="{33FDFE36-33A4-433E-A988-7D7DA1633B5F}"/>
+                <a16:creationId xmlns:a16="http://schemas.microsoft.com/office/drawing/2014/main" id="{62090F50-71D0-4E5F-A87F-E0808A644EBC}"/>
               </a:ext>
             </a:extLst>
           </p:cNvPr>
@@ -2493,7 +2493,7 @@
           <p:cNvPr id="2" name="s10-eyebrow">
             <a:extLst xmlns:a="http://schemas.openxmlformats.org/drawingml/2006/main">
               <a:ext uri="{FF2B5EF4-FFF2-40B4-BE49-F238E27FC236}">
-                <a16:creationId xmlns:a16="http://schemas.microsoft.com/office/drawing/2014/main" id="{1FF490DD-FCDC-40BC-8A22-17778280036F}"/>
+                <a16:creationId xmlns:a16="http://schemas.microsoft.com/office/drawing/2014/main" id="{1DB5169F-5E47-426F-8FA6-F4B9BA84FDBA}"/>
               </a:ext>
             </a:extLst>
           </p:cNvPr>
@@ -2551,7 +2551,7 @@
           <p:cNvPr id="3" name="s10-title">
             <a:extLst xmlns:a="http://schemas.openxmlformats.org/drawingml/2006/main">
               <a:ext uri="{FF2B5EF4-FFF2-40B4-BE49-F238E27FC236}">
-                <a16:creationId xmlns:a16="http://schemas.microsoft.com/office/drawing/2014/main" id="{E762410C-0ACE-4BE0-A885-74434CBDD751}"/>
+                <a16:creationId xmlns:a16="http://schemas.microsoft.com/office/drawing/2014/main" id="{BD6C69A3-4F01-4D77-8441-986D88861E47}"/>
               </a:ext>
             </a:extLst>
           </p:cNvPr>
@@ -2609,7 +2609,7 @@
           <p:cNvPr id="4" name="s10-footer">
             <a:extLst xmlns:a="http://schemas.openxmlformats.org/drawingml/2006/main">
               <a:ext uri="{FF2B5EF4-FFF2-40B4-BE49-F238E27FC236}">
-                <a16:creationId xmlns:a16="http://schemas.microsoft.com/office/drawing/2014/main" id="{1CE37098-6A72-4757-A4D0-3D6D77B05C7E}"/>
+                <a16:creationId xmlns:a16="http://schemas.microsoft.com/office/drawing/2014/main" id="{8446843C-D055-40E2-8834-D6AFC78D4048}"/>
               </a:ext>
             </a:extLst>
           </p:cNvPr>
@@ -2640,7 +2640,7 @@
           <p:cNvPr id="5" name="s10-identity">
             <a:extLst xmlns:a="http://schemas.openxmlformats.org/drawingml/2006/main">
               <a:ext uri="{FF2B5EF4-FFF2-40B4-BE49-F238E27FC236}">
-                <a16:creationId xmlns:a16="http://schemas.microsoft.com/office/drawing/2014/main" id="{56F541A0-CE05-430B-A056-4419DBA0E2B8}"/>
+                <a16:creationId xmlns:a16="http://schemas.microsoft.com/office/drawing/2014/main" id="{9D60C98D-83C7-4B87-A994-433A487E95F6}"/>
               </a:ext>
             </a:extLst>
           </p:cNvPr>
@@ -2698,7 +2698,7 @@
           <p:cNvPr id="6" name="practice-circle-0">
             <a:extLst xmlns:a="http://schemas.openxmlformats.org/drawingml/2006/main">
               <a:ext uri="{FF2B5EF4-FFF2-40B4-BE49-F238E27FC236}">
-                <a16:creationId xmlns:a16="http://schemas.microsoft.com/office/drawing/2014/main" id="{2C4B47E0-6078-4061-801E-3560B7CAC312}"/>
+                <a16:creationId xmlns:a16="http://schemas.microsoft.com/office/drawing/2014/main" id="{EF1DAD33-E164-4213-8798-E653F5DD7533}"/>
               </a:ext>
             </a:extLst>
           </p:cNvPr>
@@ -2731,7 +2731,7 @@
           <p:cNvPr id="7" name="practice-number-0">
             <a:extLst xmlns:a="http://schemas.openxmlformats.org/drawingml/2006/main">
               <a:ext uri="{FF2B5EF4-FFF2-40B4-BE49-F238E27FC236}">
-                <a16:creationId xmlns:a16="http://schemas.microsoft.com/office/drawing/2014/main" id="{6F06C089-A282-4AD8-93CA-59F005FAADF1}"/>
+                <a16:creationId xmlns:a16="http://schemas.microsoft.com/office/drawing/2014/main" id="{FCEA6C86-BC8D-423D-9BF2-EF3EEC3F3752}"/>
               </a:ext>
             </a:extLst>
           </p:cNvPr>
@@ -2789,7 +2789,7 @@
           <p:cNvPr id="8" name="practice-item-0">
             <a:extLst xmlns:a="http://schemas.openxmlformats.org/drawingml/2006/main">
               <a:ext uri="{FF2B5EF4-FFF2-40B4-BE49-F238E27FC236}">
-                <a16:creationId xmlns:a16="http://schemas.microsoft.com/office/drawing/2014/main" id="{962B758A-41E6-4AF7-A6EF-5C20C0977353}"/>
+                <a16:creationId xmlns:a16="http://schemas.microsoft.com/office/drawing/2014/main" id="{0DC48A68-3ADE-450A-9D25-CEDB414989A2}"/>
               </a:ext>
             </a:extLst>
           </p:cNvPr>
@@ -2853,7 +2853,7 @@
           <p:cNvPr id="9" name="practice-connector-0">
             <a:extLst xmlns:a="http://schemas.openxmlformats.org/drawingml/2006/main">
               <a:ext uri="{FF2B5EF4-FFF2-40B4-BE49-F238E27FC236}">
-                <a16:creationId xmlns:a16="http://schemas.microsoft.com/office/drawing/2014/main" id="{CAC6AF87-5EF2-4924-BCE2-A9CFCB2BC730}"/>
+                <a16:creationId xmlns:a16="http://schemas.microsoft.com/office/drawing/2014/main" id="{55929D5B-304B-4E95-9A63-6F9D1A452F99}"/>
               </a:ext>
             </a:extLst>
           </p:cNvPr>
@@ -2884,7 +2884,7 @@
           <p:cNvPr id="10" name="practice-circle-1">
             <a:extLst xmlns:a="http://schemas.openxmlformats.org/drawingml/2006/main">
               <a:ext uri="{FF2B5EF4-FFF2-40B4-BE49-F238E27FC236}">
-                <a16:creationId xmlns:a16="http://schemas.microsoft.com/office/drawing/2014/main" id="{017415C1-5E15-4BBC-B2D1-B56F58197BF9}"/>
+                <a16:creationId xmlns:a16="http://schemas.microsoft.com/office/drawing/2014/main" id="{B3687106-049D-4E64-9C92-49A2CCF023AA}"/>
               </a:ext>
             </a:extLst>
           </p:cNvPr>
@@ -2917,7 +2917,7 @@
           <p:cNvPr id="11" name="practice-number-1">
             <a:extLst xmlns:a="http://schemas.openxmlformats.org/drawingml/2006/main">
               <a:ext uri="{FF2B5EF4-FFF2-40B4-BE49-F238E27FC236}">
-                <a16:creationId xmlns:a16="http://schemas.microsoft.com/office/drawing/2014/main" id="{666FA892-18DB-47AB-A10B-B4C960728E72}"/>
+                <a16:creationId xmlns:a16="http://schemas.microsoft.com/office/drawing/2014/main" id="{DE447861-1EAB-4D72-B9A6-DD4577596297}"/>
               </a:ext>
             </a:extLst>
           </p:cNvPr>
@@ -2975,7 +2975,7 @@
           <p:cNvPr id="12" name="practice-item-1">
             <a:extLst xmlns:a="http://schemas.openxmlformats.org/drawingml/2006/main">
               <a:ext uri="{FF2B5EF4-FFF2-40B4-BE49-F238E27FC236}">
-                <a16:creationId xmlns:a16="http://schemas.microsoft.com/office/drawing/2014/main" id="{0312731B-B535-435F-8A5C-A2944E21164C}"/>
+                <a16:creationId xmlns:a16="http://schemas.microsoft.com/office/drawing/2014/main" id="{41ADA3DC-95E2-4CC3-9014-FA9F79016D5A}"/>
               </a:ext>
             </a:extLst>
           </p:cNvPr>
@@ -3039,7 +3039,7 @@
           <p:cNvPr id="13" name="practice-connector-1">
             <a:extLst xmlns:a="http://schemas.openxmlformats.org/drawingml/2006/main">
               <a:ext uri="{FF2B5EF4-FFF2-40B4-BE49-F238E27FC236}">
-                <a16:creationId xmlns:a16="http://schemas.microsoft.com/office/drawing/2014/main" id="{0FBBBFD8-964D-4DC0-A2FC-C71A25501BA0}"/>
+                <a16:creationId xmlns:a16="http://schemas.microsoft.com/office/drawing/2014/main" id="{8DC997FB-2EFE-474C-AFB7-2EA9E04DBDA9}"/>
               </a:ext>
             </a:extLst>
           </p:cNvPr>
@@ -3070,7 +3070,7 @@
           <p:cNvPr id="14" name="practice-circle-2">
             <a:extLst xmlns:a="http://schemas.openxmlformats.org/drawingml/2006/main">
               <a:ext uri="{FF2B5EF4-FFF2-40B4-BE49-F238E27FC236}">
-                <a16:creationId xmlns:a16="http://schemas.microsoft.com/office/drawing/2014/main" id="{A8D0ED57-941A-4044-9BBB-40DC68C4D226}"/>
+                <a16:creationId xmlns:a16="http://schemas.microsoft.com/office/drawing/2014/main" id="{678027D0-4C35-42CB-A254-76DCBC04ACAF}"/>
               </a:ext>
             </a:extLst>
           </p:cNvPr>
@@ -3103,7 +3103,7 @@
           <p:cNvPr id="15" name="practice-number-2">
             <a:extLst xmlns:a="http://schemas.openxmlformats.org/drawingml/2006/main">
               <a:ext uri="{FF2B5EF4-FFF2-40B4-BE49-F238E27FC236}">
-                <a16:creationId xmlns:a16="http://schemas.microsoft.com/office/drawing/2014/main" id="{605D76A0-15EF-4FC4-9A42-948665CBBB70}"/>
+                <a16:creationId xmlns:a16="http://schemas.microsoft.com/office/drawing/2014/main" id="{2F6AB596-7B22-4889-A95D-3BDC960A8572}"/>
               </a:ext>
             </a:extLst>
           </p:cNvPr>
@@ -3161,7 +3161,7 @@
           <p:cNvPr id="16" name="practice-item-2">
             <a:extLst xmlns:a="http://schemas.openxmlformats.org/drawingml/2006/main">
               <a:ext uri="{FF2B5EF4-FFF2-40B4-BE49-F238E27FC236}">
-                <a16:creationId xmlns:a16="http://schemas.microsoft.com/office/drawing/2014/main" id="{C24C313A-7166-43B2-BA3E-AA782B63BC3D}"/>
+                <a16:creationId xmlns:a16="http://schemas.microsoft.com/office/drawing/2014/main" id="{29B0B877-843C-472F-9876-BD032C730A2D}"/>
               </a:ext>
             </a:extLst>
           </p:cNvPr>
@@ -3223,7 +3223,7 @@
     </p:spTree>
     <p:extLst>
       <p:ext uri="{BB962C8B-B14F-4D97-AF65-F5344CB8AC3E}">
-        <p14:creationId xmlns:p14="http://schemas.microsoft.com/office/powerpoint/2010/main" val="986130777"/>
+        <p14:creationId xmlns:p14="http://schemas.microsoft.com/office/powerpoint/2010/main" val="911505911"/>
       </p:ext>
     </p:extLst>
   </p:cSld>
@@ -3254,7 +3254,7 @@
           <p:cNvPr id="1" name="s11-rule">
             <a:extLst xmlns:a="http://schemas.openxmlformats.org/drawingml/2006/main">
               <a:ext uri="{FF2B5EF4-FFF2-40B4-BE49-F238E27FC236}">
-                <a16:creationId xmlns:a16="http://schemas.microsoft.com/office/drawing/2014/main" id="{52B4E367-C862-45B0-852E-43B067C5080C}"/>
+                <a16:creationId xmlns:a16="http://schemas.microsoft.com/office/drawing/2014/main" id="{19E47066-4C99-4FA5-9CDC-128CD9AF7FEC}"/>
               </a:ext>
             </a:extLst>
           </p:cNvPr>
@@ -3287,7 +3287,7 @@
           <p:cNvPr id="2" name="s11-eyebrow">
             <a:extLst xmlns:a="http://schemas.openxmlformats.org/drawingml/2006/main">
               <a:ext uri="{FF2B5EF4-FFF2-40B4-BE49-F238E27FC236}">
-                <a16:creationId xmlns:a16="http://schemas.microsoft.com/office/drawing/2014/main" id="{1EB6DCC1-9A49-4927-8C6B-ACFC01D91BB5}"/>
+                <a16:creationId xmlns:a16="http://schemas.microsoft.com/office/drawing/2014/main" id="{B9F5E4E9-9D48-4764-AAB9-E4BF66B6AA38}"/>
               </a:ext>
             </a:extLst>
           </p:cNvPr>
@@ -3345,7 +3345,7 @@
           <p:cNvPr id="3" name="s11-title">
             <a:extLst xmlns:a="http://schemas.openxmlformats.org/drawingml/2006/main">
               <a:ext uri="{FF2B5EF4-FFF2-40B4-BE49-F238E27FC236}">
-                <a16:creationId xmlns:a16="http://schemas.microsoft.com/office/drawing/2014/main" id="{6A77E337-DE10-4C87-B486-94EF374D4170}"/>
+                <a16:creationId xmlns:a16="http://schemas.microsoft.com/office/drawing/2014/main" id="{DB5EFFE5-13DD-41E1-8FE8-6B2283A7B876}"/>
               </a:ext>
             </a:extLst>
           </p:cNvPr>
@@ -3403,7 +3403,7 @@
           <p:cNvPr id="4" name="s11-footer">
             <a:extLst xmlns:a="http://schemas.openxmlformats.org/drawingml/2006/main">
               <a:ext uri="{FF2B5EF4-FFF2-40B4-BE49-F238E27FC236}">
-                <a16:creationId xmlns:a16="http://schemas.microsoft.com/office/drawing/2014/main" id="{88B48B81-A88E-48CF-985D-164EAE77EFED}"/>
+                <a16:creationId xmlns:a16="http://schemas.microsoft.com/office/drawing/2014/main" id="{7FE6FBBE-7B59-43E2-888E-21E96EC0DF5D}"/>
               </a:ext>
             </a:extLst>
           </p:cNvPr>
@@ -3434,7 +3434,7 @@
           <p:cNvPr id="5" name="s11-identity">
             <a:extLst xmlns:a="http://schemas.openxmlformats.org/drawingml/2006/main">
               <a:ext uri="{FF2B5EF4-FFF2-40B4-BE49-F238E27FC236}">
-                <a16:creationId xmlns:a16="http://schemas.microsoft.com/office/drawing/2014/main" id="{FDB0BF24-9E9D-4594-A7F5-A7125AC78C9D}"/>
+                <a16:creationId xmlns:a16="http://schemas.microsoft.com/office/drawing/2014/main" id="{B6F2C647-914D-4EEE-8B28-9767407EE97F}"/>
               </a:ext>
             </a:extLst>
           </p:cNvPr>
@@ -3492,7 +3492,7 @@
           <p:cNvPr id="6" name="recap-circle-0">
             <a:extLst xmlns:a="http://schemas.openxmlformats.org/drawingml/2006/main">
               <a:ext uri="{FF2B5EF4-FFF2-40B4-BE49-F238E27FC236}">
-                <a16:creationId xmlns:a16="http://schemas.microsoft.com/office/drawing/2014/main" id="{6732B91D-1063-4BB2-A4A7-E0DC37E4A1A2}"/>
+                <a16:creationId xmlns:a16="http://schemas.microsoft.com/office/drawing/2014/main" id="{CC932DDE-AAFC-40AF-B329-8FA4A03DC713}"/>
               </a:ext>
             </a:extLst>
           </p:cNvPr>
@@ -3525,7 +3525,7 @@
           <p:cNvPr id="7" name="recap-number-0">
             <a:extLst xmlns:a="http://schemas.openxmlformats.org/drawingml/2006/main">
               <a:ext uri="{FF2B5EF4-FFF2-40B4-BE49-F238E27FC236}">
-                <a16:creationId xmlns:a16="http://schemas.microsoft.com/office/drawing/2014/main" id="{0B4AF07F-A332-4FD0-8E12-90F5F4E631B1}"/>
+                <a16:creationId xmlns:a16="http://schemas.microsoft.com/office/drawing/2014/main" id="{2736BCB5-0572-42D8-9E81-3406A0308724}"/>
               </a:ext>
             </a:extLst>
           </p:cNvPr>
@@ -3583,7 +3583,7 @@
           <p:cNvPr id="8" name="recap-item-0">
             <a:extLst xmlns:a="http://schemas.openxmlformats.org/drawingml/2006/main">
               <a:ext uri="{FF2B5EF4-FFF2-40B4-BE49-F238E27FC236}">
-                <a16:creationId xmlns:a16="http://schemas.microsoft.com/office/drawing/2014/main" id="{DC940BC8-B480-45B6-8FA4-F3FD20B70E52}"/>
+                <a16:creationId xmlns:a16="http://schemas.microsoft.com/office/drawing/2014/main" id="{16CFB51A-5C6B-407B-865C-DBF81CF2DA9C}"/>
               </a:ext>
             </a:extLst>
           </p:cNvPr>
@@ -3647,7 +3647,7 @@
           <p:cNvPr id="9" name="recap-connector-0">
             <a:extLst xmlns:a="http://schemas.openxmlformats.org/drawingml/2006/main">
               <a:ext uri="{FF2B5EF4-FFF2-40B4-BE49-F238E27FC236}">
-                <a16:creationId xmlns:a16="http://schemas.microsoft.com/office/drawing/2014/main" id="{E5781B67-1CD1-4269-89FE-3A09979B581C}"/>
+                <a16:creationId xmlns:a16="http://schemas.microsoft.com/office/drawing/2014/main" id="{F02C5E91-3B41-47EA-AA50-0D0C3490770D}"/>
               </a:ext>
             </a:extLst>
           </p:cNvPr>
@@ -3678,7 +3678,7 @@
           <p:cNvPr id="10" name="recap-circle-1">
             <a:extLst xmlns:a="http://schemas.openxmlformats.org/drawingml/2006/main">
               <a:ext uri="{FF2B5EF4-FFF2-40B4-BE49-F238E27FC236}">
-                <a16:creationId xmlns:a16="http://schemas.microsoft.com/office/drawing/2014/main" id="{C2559151-7F17-4E01-A054-17A7F76808C7}"/>
+                <a16:creationId xmlns:a16="http://schemas.microsoft.com/office/drawing/2014/main" id="{2F4E94C9-6F05-4F47-A95E-1254EB035D53}"/>
               </a:ext>
             </a:extLst>
           </p:cNvPr>
@@ -3711,7 +3711,7 @@
           <p:cNvPr id="11" name="recap-number-1">
             <a:extLst xmlns:a="http://schemas.openxmlformats.org/drawingml/2006/main">
               <a:ext uri="{FF2B5EF4-FFF2-40B4-BE49-F238E27FC236}">
-                <a16:creationId xmlns:a16="http://schemas.microsoft.com/office/drawing/2014/main" id="{1F3DAB8E-3902-4A83-A628-F81865781EB6}"/>
+                <a16:creationId xmlns:a16="http://schemas.microsoft.com/office/drawing/2014/main" id="{E060EDBF-ED4A-427F-80F7-EFA5AA7F3073}"/>
               </a:ext>
             </a:extLst>
           </p:cNvPr>
@@ -3769,7 +3769,7 @@
           <p:cNvPr id="12" name="recap-item-1">
             <a:extLst xmlns:a="http://schemas.openxmlformats.org/drawingml/2006/main">
               <a:ext uri="{FF2B5EF4-FFF2-40B4-BE49-F238E27FC236}">
-                <a16:creationId xmlns:a16="http://schemas.microsoft.com/office/drawing/2014/main" id="{BA0C3D0A-5895-4B4B-91D5-D33EF28090A3}"/>
+                <a16:creationId xmlns:a16="http://schemas.microsoft.com/office/drawing/2014/main" id="{58038E18-2DE8-44A9-B777-A6E7D20A1F12}"/>
               </a:ext>
             </a:extLst>
           </p:cNvPr>
@@ -3833,7 +3833,7 @@
           <p:cNvPr id="13" name="recap-connector-1">
             <a:extLst xmlns:a="http://schemas.openxmlformats.org/drawingml/2006/main">
               <a:ext uri="{FF2B5EF4-FFF2-40B4-BE49-F238E27FC236}">
-                <a16:creationId xmlns:a16="http://schemas.microsoft.com/office/drawing/2014/main" id="{783E01E1-8B3A-472A-8DA3-6D5562C11A24}"/>
+                <a16:creationId xmlns:a16="http://schemas.microsoft.com/office/drawing/2014/main" id="{ACF9583B-1869-4214-832C-1766372C89AB}"/>
               </a:ext>
             </a:extLst>
           </p:cNvPr>
@@ -3864,7 +3864,7 @@
           <p:cNvPr id="14" name="recap-circle-2">
             <a:extLst xmlns:a="http://schemas.openxmlformats.org/drawingml/2006/main">
               <a:ext uri="{FF2B5EF4-FFF2-40B4-BE49-F238E27FC236}">
-                <a16:creationId xmlns:a16="http://schemas.microsoft.com/office/drawing/2014/main" id="{ACAEB8C2-E196-4E73-9AC2-CEA400F71D66}"/>
+                <a16:creationId xmlns:a16="http://schemas.microsoft.com/office/drawing/2014/main" id="{11D52041-AE8D-42A4-AF3F-427554FF2365}"/>
               </a:ext>
             </a:extLst>
           </p:cNvPr>
@@ -3897,7 +3897,7 @@
           <p:cNvPr id="15" name="recap-number-2">
             <a:extLst xmlns:a="http://schemas.openxmlformats.org/drawingml/2006/main">
               <a:ext uri="{FF2B5EF4-FFF2-40B4-BE49-F238E27FC236}">
-                <a16:creationId xmlns:a16="http://schemas.microsoft.com/office/drawing/2014/main" id="{9F38631E-DEB2-4E86-BA0A-920AE4DEFD44}"/>
+                <a16:creationId xmlns:a16="http://schemas.microsoft.com/office/drawing/2014/main" id="{7CB75F6B-0986-43CA-A400-213ECF03A0E9}"/>
               </a:ext>
             </a:extLst>
           </p:cNvPr>
@@ -3955,7 +3955,7 @@
           <p:cNvPr id="16" name="recap-item-2">
             <a:extLst xmlns:a="http://schemas.openxmlformats.org/drawingml/2006/main">
               <a:ext uri="{FF2B5EF4-FFF2-40B4-BE49-F238E27FC236}">
-                <a16:creationId xmlns:a16="http://schemas.microsoft.com/office/drawing/2014/main" id="{529A5AB4-FDF4-4508-923C-80440372301A}"/>
+                <a16:creationId xmlns:a16="http://schemas.microsoft.com/office/drawing/2014/main" id="{E848BC4D-6C48-4F1A-A88D-8C37A7D41246}"/>
               </a:ext>
             </a:extLst>
           </p:cNvPr>
@@ -4017,7 +4017,7 @@
     </p:spTree>
     <p:extLst>
       <p:ext uri="{BB962C8B-B14F-4D97-AF65-F5344CB8AC3E}">
-        <p14:creationId xmlns:p14="http://schemas.microsoft.com/office/powerpoint/2010/main" val="1647887648"/>
+        <p14:creationId xmlns:p14="http://schemas.microsoft.com/office/powerpoint/2010/main" val="378573017"/>
       </p:ext>
     </p:extLst>
   </p:cSld>
@@ -4048,7 +4048,7 @@
           <p:cNvPr id="1" name="s12-rule">
             <a:extLst xmlns:a="http://schemas.openxmlformats.org/drawingml/2006/main">
               <a:ext uri="{FF2B5EF4-FFF2-40B4-BE49-F238E27FC236}">
-                <a16:creationId xmlns:a16="http://schemas.microsoft.com/office/drawing/2014/main" id="{5C1846AE-68BC-4979-9295-205E2E68210A}"/>
+                <a16:creationId xmlns:a16="http://schemas.microsoft.com/office/drawing/2014/main" id="{E62E684C-BD31-4555-B5E4-BCC29A66904C}"/>
               </a:ext>
             </a:extLst>
           </p:cNvPr>
@@ -4081,7 +4081,7 @@
           <p:cNvPr id="2" name="s12-eyebrow">
             <a:extLst xmlns:a="http://schemas.openxmlformats.org/drawingml/2006/main">
               <a:ext uri="{FF2B5EF4-FFF2-40B4-BE49-F238E27FC236}">
-                <a16:creationId xmlns:a16="http://schemas.microsoft.com/office/drawing/2014/main" id="{F612A2AF-C87E-4B65-8F19-3D5AB69F1703}"/>
+                <a16:creationId xmlns:a16="http://schemas.microsoft.com/office/drawing/2014/main" id="{6B64CCCF-B15F-4C7F-95A1-82B27D6DF0C9}"/>
               </a:ext>
             </a:extLst>
           </p:cNvPr>
@@ -4139,7 +4139,7 @@
           <p:cNvPr id="3" name="s12-title">
             <a:extLst xmlns:a="http://schemas.openxmlformats.org/drawingml/2006/main">
               <a:ext uri="{FF2B5EF4-FFF2-40B4-BE49-F238E27FC236}">
-                <a16:creationId xmlns:a16="http://schemas.microsoft.com/office/drawing/2014/main" id="{0A207342-1E4C-447C-805F-F553E5550C64}"/>
+                <a16:creationId xmlns:a16="http://schemas.microsoft.com/office/drawing/2014/main" id="{9C92DBB8-0CAD-46F7-9FF6-5A4CC7F1B3F0}"/>
               </a:ext>
             </a:extLst>
           </p:cNvPr>
@@ -4197,7 +4197,7 @@
           <p:cNvPr id="4" name="s12-footer">
             <a:extLst xmlns:a="http://schemas.openxmlformats.org/drawingml/2006/main">
               <a:ext uri="{FF2B5EF4-FFF2-40B4-BE49-F238E27FC236}">
-                <a16:creationId xmlns:a16="http://schemas.microsoft.com/office/drawing/2014/main" id="{B59C545E-CFF6-4169-81C0-B5C4165785D0}"/>
+                <a16:creationId xmlns:a16="http://schemas.microsoft.com/office/drawing/2014/main" id="{A2020913-1226-4932-AAF1-28F265A54A14}"/>
               </a:ext>
             </a:extLst>
           </p:cNvPr>
@@ -4228,7 +4228,7 @@
           <p:cNvPr id="5" name="s12-identity">
             <a:extLst xmlns:a="http://schemas.openxmlformats.org/drawingml/2006/main">
               <a:ext uri="{FF2B5EF4-FFF2-40B4-BE49-F238E27FC236}">
-                <a16:creationId xmlns:a16="http://schemas.microsoft.com/office/drawing/2014/main" id="{6F359B6E-401F-4346-9E6B-DC9530228374}"/>
+                <a16:creationId xmlns:a16="http://schemas.microsoft.com/office/drawing/2014/main" id="{79F7E512-1CE9-4407-8399-812C3F81016E}"/>
               </a:ext>
             </a:extLst>
           </p:cNvPr>
@@ -4286,7 +4286,7 @@
           <p:cNvPr id="6" name="source-0">
             <a:extLst xmlns:a="http://schemas.openxmlformats.org/drawingml/2006/main">
               <a:ext uri="{FF2B5EF4-FFF2-40B4-BE49-F238E27FC236}">
-                <a16:creationId xmlns:a16="http://schemas.microsoft.com/office/drawing/2014/main" id="{A5D63F11-1FB7-443A-A4CF-2A3935AD647B}"/>
+                <a16:creationId xmlns:a16="http://schemas.microsoft.com/office/drawing/2014/main" id="{23AE1227-E99C-47E5-9132-9795FDB9CAFF}"/>
               </a:ext>
             </a:extLst>
           </p:cNvPr>
@@ -4350,7 +4350,7 @@
           <p:cNvPr id="7" name="source-1">
             <a:extLst xmlns:a="http://schemas.openxmlformats.org/drawingml/2006/main">
               <a:ext uri="{FF2B5EF4-FFF2-40B4-BE49-F238E27FC236}">
-                <a16:creationId xmlns:a16="http://schemas.microsoft.com/office/drawing/2014/main" id="{8FADDDAB-9635-49FA-858F-D93C057F73E0}"/>
+                <a16:creationId xmlns:a16="http://schemas.microsoft.com/office/drawing/2014/main" id="{648FB366-00EC-4625-9A38-D328C8E8B858}"/>
               </a:ext>
             </a:extLst>
           </p:cNvPr>
@@ -4414,7 +4414,7 @@
           <p:cNvPr id="8" name="source-2">
             <a:extLst xmlns:a="http://schemas.openxmlformats.org/drawingml/2006/main">
               <a:ext uri="{FF2B5EF4-FFF2-40B4-BE49-F238E27FC236}">
-                <a16:creationId xmlns:a16="http://schemas.microsoft.com/office/drawing/2014/main" id="{514BE7C3-D8FF-4385-A9C2-BEB0DC5AF3E6}"/>
+                <a16:creationId xmlns:a16="http://schemas.microsoft.com/office/drawing/2014/main" id="{BB60A355-C4DA-4FDC-A208-E47E0334360C}"/>
               </a:ext>
             </a:extLst>
           </p:cNvPr>
@@ -4478,7 +4478,7 @@
           <p:cNvPr id="9" name="s12-takeaway-rule">
             <a:extLst xmlns:a="http://schemas.openxmlformats.org/drawingml/2006/main">
               <a:ext uri="{FF2B5EF4-FFF2-40B4-BE49-F238E27FC236}">
-                <a16:creationId xmlns:a16="http://schemas.microsoft.com/office/drawing/2014/main" id="{84042574-01A4-4709-AE5F-17D10E884494}"/>
+                <a16:creationId xmlns:a16="http://schemas.microsoft.com/office/drawing/2014/main" id="{759D9772-E04B-45B8-AA61-C3C164E3903F}"/>
               </a:ext>
             </a:extLst>
           </p:cNvPr>
@@ -4511,7 +4511,7 @@
           <p:cNvPr id="10" name="s12-takeaway">
             <a:extLst xmlns:a="http://schemas.openxmlformats.org/drawingml/2006/main">
               <a:ext uri="{FF2B5EF4-FFF2-40B4-BE49-F238E27FC236}">
-                <a16:creationId xmlns:a16="http://schemas.microsoft.com/office/drawing/2014/main" id="{5631A251-C0BD-4A0F-B90D-09BF5E42DB2B}"/>
+                <a16:creationId xmlns:a16="http://schemas.microsoft.com/office/drawing/2014/main" id="{54A2F267-4FE0-4E17-8452-8E2C7FE5DD42}"/>
               </a:ext>
             </a:extLst>
           </p:cNvPr>
@@ -4536,7 +4536,7 @@
         </p:spPr>
         <p:txBody>
           <a:bodyPr xmlns:a="http://schemas.openxmlformats.org/drawingml/2006/main" lIns="0" tIns="0" rIns="0" bIns="0" anchor="ctr">
-            <a:normAutofit fontScale="100000"/>
+            <a:normAutofit fontScale="95911"/>
           </a:bodyPr>
           <a:lstStyle xmlns:a="http://schemas.openxmlformats.org/drawingml/2006/main"/>
           <a:p xmlns:a="http://schemas.openxmlformats.org/drawingml/2006/main">
@@ -4559,7 +4559,7 @@
                 <a:ea typeface="PingFang SC"/>
                 <a:cs typeface="PingFang SC"/>
               </a:rPr>
-              <a:t>公开幻灯片只使用课程原创文字与原生图形；完整论证、链接和事实边界请见本节讲义。</a:t>
+              <a:t>课程精编页用于讲授主线；播放器中的“原课件”模式保留团队 PowerPoint 精选页、真实图片和可播放视频。</a:t>
             </a:r>
           </a:p>
         </p:txBody>
@@ -4567,7 +4567,7 @@
     </p:spTree>
     <p:extLst>
       <p:ext uri="{BB962C8B-B14F-4D97-AF65-F5344CB8AC3E}">
-        <p14:creationId xmlns:p14="http://schemas.microsoft.com/office/powerpoint/2010/main" val="1014622029"/>
+        <p14:creationId xmlns:p14="http://schemas.microsoft.com/office/powerpoint/2010/main" val="777751451"/>
       </p:ext>
     </p:extLst>
   </p:cSld>
@@ -4598,7 +4598,7 @@
           <p:cNvPr id="1" name="s2-rule">
             <a:extLst xmlns:a="http://schemas.openxmlformats.org/drawingml/2006/main">
               <a:ext uri="{FF2B5EF4-FFF2-40B4-BE49-F238E27FC236}">
-                <a16:creationId xmlns:a16="http://schemas.microsoft.com/office/drawing/2014/main" id="{79DAF940-D282-4479-8347-B11456A37467}"/>
+                <a16:creationId xmlns:a16="http://schemas.microsoft.com/office/drawing/2014/main" id="{5A45853A-A43E-4EA0-A840-E0DA7DBAF3E3}"/>
               </a:ext>
             </a:extLst>
           </p:cNvPr>
@@ -4631,7 +4631,7 @@
           <p:cNvPr id="2" name="s2-eyebrow">
             <a:extLst xmlns:a="http://schemas.openxmlformats.org/drawingml/2006/main">
               <a:ext uri="{FF2B5EF4-FFF2-40B4-BE49-F238E27FC236}">
-                <a16:creationId xmlns:a16="http://schemas.microsoft.com/office/drawing/2014/main" id="{D3AD6E01-9FCF-4E7F-8299-30FF316D1006}"/>
+                <a16:creationId xmlns:a16="http://schemas.microsoft.com/office/drawing/2014/main" id="{B1A7C543-9443-401E-B728-132D59FEA50A}"/>
               </a:ext>
             </a:extLst>
           </p:cNvPr>
@@ -4689,7 +4689,7 @@
           <p:cNvPr id="3" name="s2-title">
             <a:extLst xmlns:a="http://schemas.openxmlformats.org/drawingml/2006/main">
               <a:ext uri="{FF2B5EF4-FFF2-40B4-BE49-F238E27FC236}">
-                <a16:creationId xmlns:a16="http://schemas.microsoft.com/office/drawing/2014/main" id="{A9FD6756-81C0-4246-96CB-BD26E056A763}"/>
+                <a16:creationId xmlns:a16="http://schemas.microsoft.com/office/drawing/2014/main" id="{6FD6F77E-2D63-4C9E-9838-0D7A41AE8FFD}"/>
               </a:ext>
             </a:extLst>
           </p:cNvPr>
@@ -4747,7 +4747,7 @@
           <p:cNvPr id="4" name="s2-footer">
             <a:extLst xmlns:a="http://schemas.openxmlformats.org/drawingml/2006/main">
               <a:ext uri="{FF2B5EF4-FFF2-40B4-BE49-F238E27FC236}">
-                <a16:creationId xmlns:a16="http://schemas.microsoft.com/office/drawing/2014/main" id="{55625414-FBC2-4DA1-9106-63046D285CB3}"/>
+                <a16:creationId xmlns:a16="http://schemas.microsoft.com/office/drawing/2014/main" id="{19D589F8-99BB-43A0-9627-197C5CF50BA1}"/>
               </a:ext>
             </a:extLst>
           </p:cNvPr>
@@ -4778,7 +4778,7 @@
           <p:cNvPr id="5" name="s2-identity">
             <a:extLst xmlns:a="http://schemas.openxmlformats.org/drawingml/2006/main">
               <a:ext uri="{FF2B5EF4-FFF2-40B4-BE49-F238E27FC236}">
-                <a16:creationId xmlns:a16="http://schemas.microsoft.com/office/drawing/2014/main" id="{ABF830B4-2270-4615-9592-24BE58A028C7}"/>
+                <a16:creationId xmlns:a16="http://schemas.microsoft.com/office/drawing/2014/main" id="{F5286B1E-E72A-4089-B101-5903422D31C8}"/>
               </a:ext>
             </a:extLst>
           </p:cNvPr>
@@ -4836,7 +4836,7 @@
           <p:cNvPr id="6" name="objective-1">
             <a:extLst xmlns:a="http://schemas.openxmlformats.org/drawingml/2006/main">
               <a:ext uri="{FF2B5EF4-FFF2-40B4-BE49-F238E27FC236}">
-                <a16:creationId xmlns:a16="http://schemas.microsoft.com/office/drawing/2014/main" id="{9B064D5E-2A85-4FA3-AF13-E160C4C0C8F3}"/>
+                <a16:creationId xmlns:a16="http://schemas.microsoft.com/office/drawing/2014/main" id="{35E5DF61-8387-4DD4-A8C2-513A6129C0CB}"/>
               </a:ext>
             </a:extLst>
           </p:cNvPr>
@@ -4923,7 +4923,7 @@
           <p:cNvPr id="7" name="objective-2">
             <a:extLst xmlns:a="http://schemas.openxmlformats.org/drawingml/2006/main">
               <a:ext uri="{FF2B5EF4-FFF2-40B4-BE49-F238E27FC236}">
-                <a16:creationId xmlns:a16="http://schemas.microsoft.com/office/drawing/2014/main" id="{8AE91D3A-2E70-4A65-828A-6694220D3CB9}"/>
+                <a16:creationId xmlns:a16="http://schemas.microsoft.com/office/drawing/2014/main" id="{DA49D5C9-AEAB-4619-8967-071830A617A4}"/>
               </a:ext>
             </a:extLst>
           </p:cNvPr>
@@ -5010,7 +5010,7 @@
           <p:cNvPr id="8" name="objective-3">
             <a:extLst xmlns:a="http://schemas.openxmlformats.org/drawingml/2006/main">
               <a:ext uri="{FF2B5EF4-FFF2-40B4-BE49-F238E27FC236}">
-                <a16:creationId xmlns:a16="http://schemas.microsoft.com/office/drawing/2014/main" id="{41CE8993-55CF-4A6D-A074-32841EE5967C}"/>
+                <a16:creationId xmlns:a16="http://schemas.microsoft.com/office/drawing/2014/main" id="{BA09B36E-0A32-41A6-B8C6-C6F3AC21E9A7}"/>
               </a:ext>
             </a:extLst>
           </p:cNvPr>
@@ -5095,7 +5095,7 @@
     </p:spTree>
     <p:extLst>
       <p:ext uri="{BB962C8B-B14F-4D97-AF65-F5344CB8AC3E}">
-        <p14:creationId xmlns:p14="http://schemas.microsoft.com/office/powerpoint/2010/main" val="1529144320"/>
+        <p14:creationId xmlns:p14="http://schemas.microsoft.com/office/powerpoint/2010/main" val="1751892151"/>
       </p:ext>
     </p:extLst>
   </p:cSld>
@@ -5126,7 +5126,7 @@
           <p:cNvPr id="1" name="s3-rule">
             <a:extLst xmlns:a="http://schemas.openxmlformats.org/drawingml/2006/main">
               <a:ext uri="{FF2B5EF4-FFF2-40B4-BE49-F238E27FC236}">
-                <a16:creationId xmlns:a16="http://schemas.microsoft.com/office/drawing/2014/main" id="{0825EE88-821D-416D-BA60-B76C6D4A065A}"/>
+                <a16:creationId xmlns:a16="http://schemas.microsoft.com/office/drawing/2014/main" id="{DFDB7F19-7224-4E45-9257-DED09F5C7F15}"/>
               </a:ext>
             </a:extLst>
           </p:cNvPr>
@@ -5159,7 +5159,7 @@
           <p:cNvPr id="2" name="s3-eyebrow">
             <a:extLst xmlns:a="http://schemas.openxmlformats.org/drawingml/2006/main">
               <a:ext uri="{FF2B5EF4-FFF2-40B4-BE49-F238E27FC236}">
-                <a16:creationId xmlns:a16="http://schemas.microsoft.com/office/drawing/2014/main" id="{64988E11-C980-4B86-BE96-B286EF1DF785}"/>
+                <a16:creationId xmlns:a16="http://schemas.microsoft.com/office/drawing/2014/main" id="{541C3FCC-C10A-41E3-98C8-543F520A645A}"/>
               </a:ext>
             </a:extLst>
           </p:cNvPr>
@@ -5217,7 +5217,7 @@
           <p:cNvPr id="3" name="s3-title">
             <a:extLst xmlns:a="http://schemas.openxmlformats.org/drawingml/2006/main">
               <a:ext uri="{FF2B5EF4-FFF2-40B4-BE49-F238E27FC236}">
-                <a16:creationId xmlns:a16="http://schemas.microsoft.com/office/drawing/2014/main" id="{AD281FFA-1D54-4648-9909-B7405EA3F506}"/>
+                <a16:creationId xmlns:a16="http://schemas.microsoft.com/office/drawing/2014/main" id="{F6B08290-8667-4638-92D9-6740166EBF80}"/>
               </a:ext>
             </a:extLst>
           </p:cNvPr>
@@ -5275,7 +5275,7 @@
           <p:cNvPr id="4" name="s3-footer">
             <a:extLst xmlns:a="http://schemas.openxmlformats.org/drawingml/2006/main">
               <a:ext uri="{FF2B5EF4-FFF2-40B4-BE49-F238E27FC236}">
-                <a16:creationId xmlns:a16="http://schemas.microsoft.com/office/drawing/2014/main" id="{D4E8E145-CA3D-4A9D-9FFB-9519DF1CD810}"/>
+                <a16:creationId xmlns:a16="http://schemas.microsoft.com/office/drawing/2014/main" id="{547A932A-0D88-4532-BC87-A3EA5A383BAA}"/>
               </a:ext>
             </a:extLst>
           </p:cNvPr>
@@ -5306,7 +5306,7 @@
           <p:cNvPr id="5" name="s3-identity">
             <a:extLst xmlns:a="http://schemas.openxmlformats.org/drawingml/2006/main">
               <a:ext uri="{FF2B5EF4-FFF2-40B4-BE49-F238E27FC236}">
-                <a16:creationId xmlns:a16="http://schemas.microsoft.com/office/drawing/2014/main" id="{D7FA5258-3C40-4179-B49F-3D0F2E34FF45}"/>
+                <a16:creationId xmlns:a16="http://schemas.microsoft.com/office/drawing/2014/main" id="{A7B57FC5-0AC2-4E60-94BF-2141DBBF4AEF}"/>
               </a:ext>
             </a:extLst>
           </p:cNvPr>
@@ -5364,7 +5364,7 @@
           <p:cNvPr id="6" name="core-no-0">
             <a:extLst xmlns:a="http://schemas.openxmlformats.org/drawingml/2006/main">
               <a:ext uri="{FF2B5EF4-FFF2-40B4-BE49-F238E27FC236}">
-                <a16:creationId xmlns:a16="http://schemas.microsoft.com/office/drawing/2014/main" id="{4CE5ECCD-3A47-491C-B0D2-9859C1A61FEA}"/>
+                <a16:creationId xmlns:a16="http://schemas.microsoft.com/office/drawing/2014/main" id="{400D03AF-A88B-48B7-902F-167179969F8B}"/>
               </a:ext>
             </a:extLst>
           </p:cNvPr>
@@ -5422,7 +5422,7 @@
           <p:cNvPr id="7" name="core-label-0">
             <a:extLst xmlns:a="http://schemas.openxmlformats.org/drawingml/2006/main">
               <a:ext uri="{FF2B5EF4-FFF2-40B4-BE49-F238E27FC236}">
-                <a16:creationId xmlns:a16="http://schemas.microsoft.com/office/drawing/2014/main" id="{92BCB44D-C4C0-4C55-8C54-F8B35F9B9C48}"/>
+                <a16:creationId xmlns:a16="http://schemas.microsoft.com/office/drawing/2014/main" id="{A236839A-292E-4076-8A1A-4582D5F7AB43}"/>
               </a:ext>
             </a:extLst>
           </p:cNvPr>
@@ -5480,7 +5480,7 @@
           <p:cNvPr id="8" name="core-body-0">
             <a:extLst xmlns:a="http://schemas.openxmlformats.org/drawingml/2006/main">
               <a:ext uri="{FF2B5EF4-FFF2-40B4-BE49-F238E27FC236}">
-                <a16:creationId xmlns:a16="http://schemas.microsoft.com/office/drawing/2014/main" id="{94A1F073-8795-4EC5-BDFC-9928FC661A90}"/>
+                <a16:creationId xmlns:a16="http://schemas.microsoft.com/office/drawing/2014/main" id="{BC53BF5C-F606-4484-B252-7878934700E9}"/>
               </a:ext>
             </a:extLst>
           </p:cNvPr>
@@ -5544,7 +5544,7 @@
           <p:cNvPr id="9" name="core-no-1">
             <a:extLst xmlns:a="http://schemas.openxmlformats.org/drawingml/2006/main">
               <a:ext uri="{FF2B5EF4-FFF2-40B4-BE49-F238E27FC236}">
-                <a16:creationId xmlns:a16="http://schemas.microsoft.com/office/drawing/2014/main" id="{A020DABF-838F-402E-99EB-7A4B5949F768}"/>
+                <a16:creationId xmlns:a16="http://schemas.microsoft.com/office/drawing/2014/main" id="{17E189FA-64A6-4781-B7C0-E363B811E1E9}"/>
               </a:ext>
             </a:extLst>
           </p:cNvPr>
@@ -5602,7 +5602,7 @@
           <p:cNvPr id="10" name="core-body-1">
             <a:extLst xmlns:a="http://schemas.openxmlformats.org/drawingml/2006/main">
               <a:ext uri="{FF2B5EF4-FFF2-40B4-BE49-F238E27FC236}">
-                <a16:creationId xmlns:a16="http://schemas.microsoft.com/office/drawing/2014/main" id="{53A0543A-C6D3-4480-A005-109AD13D5852}"/>
+                <a16:creationId xmlns:a16="http://schemas.microsoft.com/office/drawing/2014/main" id="{DB72EC0E-CDA2-4F81-B2BB-440391C4E188}"/>
               </a:ext>
             </a:extLst>
           </p:cNvPr>
@@ -5666,7 +5666,7 @@
           <p:cNvPr id="11" name="core-no-2">
             <a:extLst xmlns:a="http://schemas.openxmlformats.org/drawingml/2006/main">
               <a:ext uri="{FF2B5EF4-FFF2-40B4-BE49-F238E27FC236}">
-                <a16:creationId xmlns:a16="http://schemas.microsoft.com/office/drawing/2014/main" id="{516ECB64-1A9C-4503-B8EF-3A566B448851}"/>
+                <a16:creationId xmlns:a16="http://schemas.microsoft.com/office/drawing/2014/main" id="{EC5F8B13-BC41-4432-8B39-2C39426F7F2B}"/>
               </a:ext>
             </a:extLst>
           </p:cNvPr>
@@ -5724,7 +5724,7 @@
           <p:cNvPr id="12" name="core-body-2">
             <a:extLst xmlns:a="http://schemas.openxmlformats.org/drawingml/2006/main">
               <a:ext uri="{FF2B5EF4-FFF2-40B4-BE49-F238E27FC236}">
-                <a16:creationId xmlns:a16="http://schemas.microsoft.com/office/drawing/2014/main" id="{22200695-DC9C-47CF-BD61-4B2760B3B100}"/>
+                <a16:creationId xmlns:a16="http://schemas.microsoft.com/office/drawing/2014/main" id="{D7012697-3B51-4A9B-8E38-2182BC8200F8}"/>
               </a:ext>
             </a:extLst>
           </p:cNvPr>
@@ -5788,7 +5788,7 @@
           <p:cNvPr id="13" name="s3-takeaway-rule">
             <a:extLst xmlns:a="http://schemas.openxmlformats.org/drawingml/2006/main">
               <a:ext uri="{FF2B5EF4-FFF2-40B4-BE49-F238E27FC236}">
-                <a16:creationId xmlns:a16="http://schemas.microsoft.com/office/drawing/2014/main" id="{E7BEAFDF-1FAC-47CA-AE07-404AD40048BB}"/>
+                <a16:creationId xmlns:a16="http://schemas.microsoft.com/office/drawing/2014/main" id="{C9F56CA2-DAA7-480A-A690-9ADDFF366D66}"/>
               </a:ext>
             </a:extLst>
           </p:cNvPr>
@@ -5821,7 +5821,7 @@
           <p:cNvPr id="14" name="s3-takeaway">
             <a:extLst xmlns:a="http://schemas.openxmlformats.org/drawingml/2006/main">
               <a:ext uri="{FF2B5EF4-FFF2-40B4-BE49-F238E27FC236}">
-                <a16:creationId xmlns:a16="http://schemas.microsoft.com/office/drawing/2014/main" id="{005AFE91-333C-47BB-95B8-B807528FA684}"/>
+                <a16:creationId xmlns:a16="http://schemas.microsoft.com/office/drawing/2014/main" id="{EC081A4D-D318-46E7-A7CA-842A6E9E997F}"/>
               </a:ext>
             </a:extLst>
           </p:cNvPr>
@@ -5877,7 +5877,7 @@
     </p:spTree>
     <p:extLst>
       <p:ext uri="{BB962C8B-B14F-4D97-AF65-F5344CB8AC3E}">
-        <p14:creationId xmlns:p14="http://schemas.microsoft.com/office/powerpoint/2010/main" val="129541963"/>
+        <p14:creationId xmlns:p14="http://schemas.microsoft.com/office/powerpoint/2010/main" val="1078160518"/>
       </p:ext>
     </p:extLst>
   </p:cSld>
@@ -5908,7 +5908,7 @@
           <p:cNvPr id="1" name="s4-rule">
             <a:extLst xmlns:a="http://schemas.openxmlformats.org/drawingml/2006/main">
               <a:ext uri="{FF2B5EF4-FFF2-40B4-BE49-F238E27FC236}">
-                <a16:creationId xmlns:a16="http://schemas.microsoft.com/office/drawing/2014/main" id="{C345B327-832C-4760-BF72-47EC1293886D}"/>
+                <a16:creationId xmlns:a16="http://schemas.microsoft.com/office/drawing/2014/main" id="{6E3E46FB-7111-4CEF-A997-6EDEF3B27C78}"/>
               </a:ext>
             </a:extLst>
           </p:cNvPr>
@@ -5941,7 +5941,7 @@
           <p:cNvPr id="2" name="s4-eyebrow">
             <a:extLst xmlns:a="http://schemas.openxmlformats.org/drawingml/2006/main">
               <a:ext uri="{FF2B5EF4-FFF2-40B4-BE49-F238E27FC236}">
-                <a16:creationId xmlns:a16="http://schemas.microsoft.com/office/drawing/2014/main" id="{E7BA5CA6-997C-4907-AF13-50D1AE207F47}"/>
+                <a16:creationId xmlns:a16="http://schemas.microsoft.com/office/drawing/2014/main" id="{36D23052-80C2-48FE-9047-06FAB4206B49}"/>
               </a:ext>
             </a:extLst>
           </p:cNvPr>
@@ -5999,7 +5999,7 @@
           <p:cNvPr id="3" name="s4-title">
             <a:extLst xmlns:a="http://schemas.openxmlformats.org/drawingml/2006/main">
               <a:ext uri="{FF2B5EF4-FFF2-40B4-BE49-F238E27FC236}">
-                <a16:creationId xmlns:a16="http://schemas.microsoft.com/office/drawing/2014/main" id="{95C8AE43-2389-46E5-8029-3DF518244C46}"/>
+                <a16:creationId xmlns:a16="http://schemas.microsoft.com/office/drawing/2014/main" id="{43873E6E-BD68-40DA-8B35-AFC716C5B970}"/>
               </a:ext>
             </a:extLst>
           </p:cNvPr>
@@ -6057,7 +6057,7 @@
           <p:cNvPr id="4" name="s4-footer">
             <a:extLst xmlns:a="http://schemas.openxmlformats.org/drawingml/2006/main">
               <a:ext uri="{FF2B5EF4-FFF2-40B4-BE49-F238E27FC236}">
-                <a16:creationId xmlns:a16="http://schemas.microsoft.com/office/drawing/2014/main" id="{BAB68C64-99AC-4F9B-8056-7F1D1E473639}"/>
+                <a16:creationId xmlns:a16="http://schemas.microsoft.com/office/drawing/2014/main" id="{11E54748-D233-4C29-895B-1DF6D3214823}"/>
               </a:ext>
             </a:extLst>
           </p:cNvPr>
@@ -6088,7 +6088,7 @@
           <p:cNvPr id="5" name="s4-identity">
             <a:extLst xmlns:a="http://schemas.openxmlformats.org/drawingml/2006/main">
               <a:ext uri="{FF2B5EF4-FFF2-40B4-BE49-F238E27FC236}">
-                <a16:creationId xmlns:a16="http://schemas.microsoft.com/office/drawing/2014/main" id="{3DA9A562-9750-4E6E-B398-4C9E7EA262A3}"/>
+                <a16:creationId xmlns:a16="http://schemas.microsoft.com/office/drawing/2014/main" id="{4A91A69A-7857-4306-8C48-3E6DB5A6EC17}"/>
               </a:ext>
             </a:extLst>
           </p:cNvPr>
@@ -6146,7 +6146,7 @@
           <p:cNvPr id="6" name="core-no-0">
             <a:extLst xmlns:a="http://schemas.openxmlformats.org/drawingml/2006/main">
               <a:ext uri="{FF2B5EF4-FFF2-40B4-BE49-F238E27FC236}">
-                <a16:creationId xmlns:a16="http://schemas.microsoft.com/office/drawing/2014/main" id="{A6AA7037-DF75-4C91-8ABD-8DF59D5A9E82}"/>
+                <a16:creationId xmlns:a16="http://schemas.microsoft.com/office/drawing/2014/main" id="{49FFB20B-7295-4EDF-AEC4-9F806305F99A}"/>
               </a:ext>
             </a:extLst>
           </p:cNvPr>
@@ -6204,7 +6204,7 @@
           <p:cNvPr id="7" name="core-label-0">
             <a:extLst xmlns:a="http://schemas.openxmlformats.org/drawingml/2006/main">
               <a:ext uri="{FF2B5EF4-FFF2-40B4-BE49-F238E27FC236}">
-                <a16:creationId xmlns:a16="http://schemas.microsoft.com/office/drawing/2014/main" id="{14D69F09-D13B-4A53-B916-32B4A3E1A4E0}"/>
+                <a16:creationId xmlns:a16="http://schemas.microsoft.com/office/drawing/2014/main" id="{8D7CA615-F221-48E0-8574-46FC98D2FE3E}"/>
               </a:ext>
             </a:extLst>
           </p:cNvPr>
@@ -6262,7 +6262,7 @@
           <p:cNvPr id="8" name="core-body-0">
             <a:extLst xmlns:a="http://schemas.openxmlformats.org/drawingml/2006/main">
               <a:ext uri="{FF2B5EF4-FFF2-40B4-BE49-F238E27FC236}">
-                <a16:creationId xmlns:a16="http://schemas.microsoft.com/office/drawing/2014/main" id="{98459111-7455-4BDA-8463-C03C93FBD3F1}"/>
+                <a16:creationId xmlns:a16="http://schemas.microsoft.com/office/drawing/2014/main" id="{795D9FD2-BCBC-4063-B90A-4A81519B8EAD}"/>
               </a:ext>
             </a:extLst>
           </p:cNvPr>
@@ -6326,7 +6326,7 @@
           <p:cNvPr id="9" name="core-no-1">
             <a:extLst xmlns:a="http://schemas.openxmlformats.org/drawingml/2006/main">
               <a:ext uri="{FF2B5EF4-FFF2-40B4-BE49-F238E27FC236}">
-                <a16:creationId xmlns:a16="http://schemas.microsoft.com/office/drawing/2014/main" id="{EFFB6668-FEDF-44DD-943D-C218DFC1C964}"/>
+                <a16:creationId xmlns:a16="http://schemas.microsoft.com/office/drawing/2014/main" id="{E92D36D0-A7B3-4FBE-8DFE-97F96540014F}"/>
               </a:ext>
             </a:extLst>
           </p:cNvPr>
@@ -6384,7 +6384,7 @@
           <p:cNvPr id="10" name="core-body-1">
             <a:extLst xmlns:a="http://schemas.openxmlformats.org/drawingml/2006/main">
               <a:ext uri="{FF2B5EF4-FFF2-40B4-BE49-F238E27FC236}">
-                <a16:creationId xmlns:a16="http://schemas.microsoft.com/office/drawing/2014/main" id="{921910EE-1A49-406F-A8D3-387681502E33}"/>
+                <a16:creationId xmlns:a16="http://schemas.microsoft.com/office/drawing/2014/main" id="{BEF1861B-C1A2-47FB-B4D1-5B13495B8F04}"/>
               </a:ext>
             </a:extLst>
           </p:cNvPr>
@@ -6448,7 +6448,7 @@
           <p:cNvPr id="11" name="s4-takeaway-rule">
             <a:extLst xmlns:a="http://schemas.openxmlformats.org/drawingml/2006/main">
               <a:ext uri="{FF2B5EF4-FFF2-40B4-BE49-F238E27FC236}">
-                <a16:creationId xmlns:a16="http://schemas.microsoft.com/office/drawing/2014/main" id="{97F9CC01-F6AF-4664-8AC5-91F5773F648C}"/>
+                <a16:creationId xmlns:a16="http://schemas.microsoft.com/office/drawing/2014/main" id="{26A082DF-4F62-4CC1-95AB-EC869D53AB24}"/>
               </a:ext>
             </a:extLst>
           </p:cNvPr>
@@ -6481,7 +6481,7 @@
           <p:cNvPr id="12" name="s4-takeaway">
             <a:extLst xmlns:a="http://schemas.openxmlformats.org/drawingml/2006/main">
               <a:ext uri="{FF2B5EF4-FFF2-40B4-BE49-F238E27FC236}">
-                <a16:creationId xmlns:a16="http://schemas.microsoft.com/office/drawing/2014/main" id="{4FC57A76-E3AF-46C2-8174-723013576A59}"/>
+                <a16:creationId xmlns:a16="http://schemas.microsoft.com/office/drawing/2014/main" id="{09577251-2AC3-430D-B324-4309F5F7C424}"/>
               </a:ext>
             </a:extLst>
           </p:cNvPr>
@@ -6537,7 +6537,7 @@
     </p:spTree>
     <p:extLst>
       <p:ext uri="{BB962C8B-B14F-4D97-AF65-F5344CB8AC3E}">
-        <p14:creationId xmlns:p14="http://schemas.microsoft.com/office/powerpoint/2010/main" val="1781504871"/>
+        <p14:creationId xmlns:p14="http://schemas.microsoft.com/office/powerpoint/2010/main" val="1887741132"/>
       </p:ext>
     </p:extLst>
   </p:cSld>
@@ -6568,7 +6568,7 @@
           <p:cNvPr id="1" name="s5-rule">
             <a:extLst xmlns:a="http://schemas.openxmlformats.org/drawingml/2006/main">
               <a:ext uri="{FF2B5EF4-FFF2-40B4-BE49-F238E27FC236}">
-                <a16:creationId xmlns:a16="http://schemas.microsoft.com/office/drawing/2014/main" id="{E8AC532A-F1D2-4AA1-9E9E-E56D26B2BD60}"/>
+                <a16:creationId xmlns:a16="http://schemas.microsoft.com/office/drawing/2014/main" id="{9FEF54DE-1EE5-407C-9D39-D1E812C9F9FD}"/>
               </a:ext>
             </a:extLst>
           </p:cNvPr>
@@ -6601,7 +6601,7 @@
           <p:cNvPr id="2" name="s5-eyebrow">
             <a:extLst xmlns:a="http://schemas.openxmlformats.org/drawingml/2006/main">
               <a:ext uri="{FF2B5EF4-FFF2-40B4-BE49-F238E27FC236}">
-                <a16:creationId xmlns:a16="http://schemas.microsoft.com/office/drawing/2014/main" id="{3D4F56F6-C2F4-493B-A1F1-47C28BD84DDD}"/>
+                <a16:creationId xmlns:a16="http://schemas.microsoft.com/office/drawing/2014/main" id="{135111A9-63CF-4F97-9282-0C61CFC75117}"/>
               </a:ext>
             </a:extLst>
           </p:cNvPr>
@@ -6659,7 +6659,7 @@
           <p:cNvPr id="3" name="s5-title">
             <a:extLst xmlns:a="http://schemas.openxmlformats.org/drawingml/2006/main">
               <a:ext uri="{FF2B5EF4-FFF2-40B4-BE49-F238E27FC236}">
-                <a16:creationId xmlns:a16="http://schemas.microsoft.com/office/drawing/2014/main" id="{DF3EFD10-FBD0-46C4-A410-D126A4B1F766}"/>
+                <a16:creationId xmlns:a16="http://schemas.microsoft.com/office/drawing/2014/main" id="{516CB9A4-113F-4F0F-BCFE-C7D02DD05798}"/>
               </a:ext>
             </a:extLst>
           </p:cNvPr>
@@ -6717,7 +6717,7 @@
           <p:cNvPr id="4" name="s5-footer">
             <a:extLst xmlns:a="http://schemas.openxmlformats.org/drawingml/2006/main">
               <a:ext uri="{FF2B5EF4-FFF2-40B4-BE49-F238E27FC236}">
-                <a16:creationId xmlns:a16="http://schemas.microsoft.com/office/drawing/2014/main" id="{7445D71C-313B-45E7-B685-89B23B889DBE}"/>
+                <a16:creationId xmlns:a16="http://schemas.microsoft.com/office/drawing/2014/main" id="{5452CDD8-5A3C-4E6B-8758-75DBA266BE69}"/>
               </a:ext>
             </a:extLst>
           </p:cNvPr>
@@ -6748,7 +6748,7 @@
           <p:cNvPr id="5" name="s5-identity">
             <a:extLst xmlns:a="http://schemas.openxmlformats.org/drawingml/2006/main">
               <a:ext uri="{FF2B5EF4-FFF2-40B4-BE49-F238E27FC236}">
-                <a16:creationId xmlns:a16="http://schemas.microsoft.com/office/drawing/2014/main" id="{0713DBA6-9358-4413-A268-C02CB05EDC80}"/>
+                <a16:creationId xmlns:a16="http://schemas.microsoft.com/office/drawing/2014/main" id="{22D02E77-B3E4-4E58-ADA6-EE13FDEA2FFE}"/>
               </a:ext>
             </a:extLst>
           </p:cNvPr>
@@ -6806,7 +6806,7 @@
           <p:cNvPr id="6" name="core-no-0">
             <a:extLst xmlns:a="http://schemas.openxmlformats.org/drawingml/2006/main">
               <a:ext uri="{FF2B5EF4-FFF2-40B4-BE49-F238E27FC236}">
-                <a16:creationId xmlns:a16="http://schemas.microsoft.com/office/drawing/2014/main" id="{3EFEC533-436F-4768-B1E8-6F4C52FCBEF8}"/>
+                <a16:creationId xmlns:a16="http://schemas.microsoft.com/office/drawing/2014/main" id="{7FEA4B8F-067D-4F37-A86E-9FC914B8FA7C}"/>
               </a:ext>
             </a:extLst>
           </p:cNvPr>
@@ -6864,7 +6864,7 @@
           <p:cNvPr id="7" name="core-label-0">
             <a:extLst xmlns:a="http://schemas.openxmlformats.org/drawingml/2006/main">
               <a:ext uri="{FF2B5EF4-FFF2-40B4-BE49-F238E27FC236}">
-                <a16:creationId xmlns:a16="http://schemas.microsoft.com/office/drawing/2014/main" id="{BD5772BD-BE00-4FF4-B6A1-11DA288300A5}"/>
+                <a16:creationId xmlns:a16="http://schemas.microsoft.com/office/drawing/2014/main" id="{1784CADA-1C78-4AF0-B53C-D087A9F3766E}"/>
               </a:ext>
             </a:extLst>
           </p:cNvPr>
@@ -6922,7 +6922,7 @@
           <p:cNvPr id="8" name="core-body-0">
             <a:extLst xmlns:a="http://schemas.openxmlformats.org/drawingml/2006/main">
               <a:ext uri="{FF2B5EF4-FFF2-40B4-BE49-F238E27FC236}">
-                <a16:creationId xmlns:a16="http://schemas.microsoft.com/office/drawing/2014/main" id="{9A621F7E-6C86-4436-A0BA-55E2E491ABDE}"/>
+                <a16:creationId xmlns:a16="http://schemas.microsoft.com/office/drawing/2014/main" id="{53D96C68-E67E-47D2-B598-46A24EEC102A}"/>
               </a:ext>
             </a:extLst>
           </p:cNvPr>
@@ -6986,7 +6986,7 @@
           <p:cNvPr id="9" name="core-no-1">
             <a:extLst xmlns:a="http://schemas.openxmlformats.org/drawingml/2006/main">
               <a:ext uri="{FF2B5EF4-FFF2-40B4-BE49-F238E27FC236}">
-                <a16:creationId xmlns:a16="http://schemas.microsoft.com/office/drawing/2014/main" id="{22D88425-4650-475D-B3D3-49F2067D470F}"/>
+                <a16:creationId xmlns:a16="http://schemas.microsoft.com/office/drawing/2014/main" id="{F49A60E5-1BCB-48DE-8D97-92C1A96F5621}"/>
               </a:ext>
             </a:extLst>
           </p:cNvPr>
@@ -7044,7 +7044,7 @@
           <p:cNvPr id="10" name="core-body-1">
             <a:extLst xmlns:a="http://schemas.openxmlformats.org/drawingml/2006/main">
               <a:ext uri="{FF2B5EF4-FFF2-40B4-BE49-F238E27FC236}">
-                <a16:creationId xmlns:a16="http://schemas.microsoft.com/office/drawing/2014/main" id="{8C70F8A0-5446-4EE3-A7CF-6D21533C4684}"/>
+                <a16:creationId xmlns:a16="http://schemas.microsoft.com/office/drawing/2014/main" id="{31814981-6ADB-477F-B96E-00358642B440}"/>
               </a:ext>
             </a:extLst>
           </p:cNvPr>
@@ -7108,7 +7108,7 @@
           <p:cNvPr id="11" name="core-no-2">
             <a:extLst xmlns:a="http://schemas.openxmlformats.org/drawingml/2006/main">
               <a:ext uri="{FF2B5EF4-FFF2-40B4-BE49-F238E27FC236}">
-                <a16:creationId xmlns:a16="http://schemas.microsoft.com/office/drawing/2014/main" id="{30E7132F-72F4-41B5-843D-42A389DFD784}"/>
+                <a16:creationId xmlns:a16="http://schemas.microsoft.com/office/drawing/2014/main" id="{16211B93-867B-4F0D-AB9E-AFAE9EEF1112}"/>
               </a:ext>
             </a:extLst>
           </p:cNvPr>
@@ -7166,7 +7166,7 @@
           <p:cNvPr id="12" name="core-body-2">
             <a:extLst xmlns:a="http://schemas.openxmlformats.org/drawingml/2006/main">
               <a:ext uri="{FF2B5EF4-FFF2-40B4-BE49-F238E27FC236}">
-                <a16:creationId xmlns:a16="http://schemas.microsoft.com/office/drawing/2014/main" id="{51097104-EA9E-42A8-80CD-19529E9CE13C}"/>
+                <a16:creationId xmlns:a16="http://schemas.microsoft.com/office/drawing/2014/main" id="{90546B06-F788-42BB-8E21-C9AF7EE33C6C}"/>
               </a:ext>
             </a:extLst>
           </p:cNvPr>
@@ -7230,7 +7230,7 @@
           <p:cNvPr id="13" name="s5-takeaway-rule">
             <a:extLst xmlns:a="http://schemas.openxmlformats.org/drawingml/2006/main">
               <a:ext uri="{FF2B5EF4-FFF2-40B4-BE49-F238E27FC236}">
-                <a16:creationId xmlns:a16="http://schemas.microsoft.com/office/drawing/2014/main" id="{38D0169F-80E9-48E7-BEB0-08457C64BA8B}"/>
+                <a16:creationId xmlns:a16="http://schemas.microsoft.com/office/drawing/2014/main" id="{7F047B18-B4BE-4B0F-9622-2595EC22D249}"/>
               </a:ext>
             </a:extLst>
           </p:cNvPr>
@@ -7263,7 +7263,7 @@
           <p:cNvPr id="14" name="s5-takeaway">
             <a:extLst xmlns:a="http://schemas.openxmlformats.org/drawingml/2006/main">
               <a:ext uri="{FF2B5EF4-FFF2-40B4-BE49-F238E27FC236}">
-                <a16:creationId xmlns:a16="http://schemas.microsoft.com/office/drawing/2014/main" id="{11397907-4824-4B24-A065-372D0B4E59E9}"/>
+                <a16:creationId xmlns:a16="http://schemas.microsoft.com/office/drawing/2014/main" id="{7EFB7FA2-05E5-4654-A977-97975F7F2147}"/>
               </a:ext>
             </a:extLst>
           </p:cNvPr>
@@ -7319,7 +7319,7 @@
     </p:spTree>
     <p:extLst>
       <p:ext uri="{BB962C8B-B14F-4D97-AF65-F5344CB8AC3E}">
-        <p14:creationId xmlns:p14="http://schemas.microsoft.com/office/powerpoint/2010/main" val="712875151"/>
+        <p14:creationId xmlns:p14="http://schemas.microsoft.com/office/powerpoint/2010/main" val="1359705019"/>
       </p:ext>
     </p:extLst>
   </p:cSld>
@@ -7350,7 +7350,7 @@
           <p:cNvPr id="1" name="s6-rule">
             <a:extLst xmlns:a="http://schemas.openxmlformats.org/drawingml/2006/main">
               <a:ext uri="{FF2B5EF4-FFF2-40B4-BE49-F238E27FC236}">
-                <a16:creationId xmlns:a16="http://schemas.microsoft.com/office/drawing/2014/main" id="{331177B3-481E-45EF-91D7-2ADD31410B7E}"/>
+                <a16:creationId xmlns:a16="http://schemas.microsoft.com/office/drawing/2014/main" id="{F46DF35F-4911-406A-8B80-99F2A0A3D440}"/>
               </a:ext>
             </a:extLst>
           </p:cNvPr>
@@ -7383,7 +7383,7 @@
           <p:cNvPr id="2" name="s6-eyebrow">
             <a:extLst xmlns:a="http://schemas.openxmlformats.org/drawingml/2006/main">
               <a:ext uri="{FF2B5EF4-FFF2-40B4-BE49-F238E27FC236}">
-                <a16:creationId xmlns:a16="http://schemas.microsoft.com/office/drawing/2014/main" id="{BBAD9D5B-47F0-4125-82FA-17EE9B77C368}"/>
+                <a16:creationId xmlns:a16="http://schemas.microsoft.com/office/drawing/2014/main" id="{F01E3C64-2AAA-40EF-B80A-D52008CD865E}"/>
               </a:ext>
             </a:extLst>
           </p:cNvPr>
@@ -7441,7 +7441,7 @@
           <p:cNvPr id="3" name="s6-title">
             <a:extLst xmlns:a="http://schemas.openxmlformats.org/drawingml/2006/main">
               <a:ext uri="{FF2B5EF4-FFF2-40B4-BE49-F238E27FC236}">
-                <a16:creationId xmlns:a16="http://schemas.microsoft.com/office/drawing/2014/main" id="{9D6B6B4A-CFBA-41BE-A372-BAFC4A201CB4}"/>
+                <a16:creationId xmlns:a16="http://schemas.microsoft.com/office/drawing/2014/main" id="{CB87BDA4-9333-4146-AB40-948D74978EC8}"/>
               </a:ext>
             </a:extLst>
           </p:cNvPr>
@@ -7499,7 +7499,7 @@
           <p:cNvPr id="4" name="s6-footer">
             <a:extLst xmlns:a="http://schemas.openxmlformats.org/drawingml/2006/main">
               <a:ext uri="{FF2B5EF4-FFF2-40B4-BE49-F238E27FC236}">
-                <a16:creationId xmlns:a16="http://schemas.microsoft.com/office/drawing/2014/main" id="{E5DE8C48-4168-45E6-A375-B74AAD91C55E}"/>
+                <a16:creationId xmlns:a16="http://schemas.microsoft.com/office/drawing/2014/main" id="{932FD1C0-6875-44B1-BC1A-04E64BB28BEF}"/>
               </a:ext>
             </a:extLst>
           </p:cNvPr>
@@ -7530,7 +7530,7 @@
           <p:cNvPr id="5" name="s6-identity">
             <a:extLst xmlns:a="http://schemas.openxmlformats.org/drawingml/2006/main">
               <a:ext uri="{FF2B5EF4-FFF2-40B4-BE49-F238E27FC236}">
-                <a16:creationId xmlns:a16="http://schemas.microsoft.com/office/drawing/2014/main" id="{5B3C9153-25D7-4773-AFDD-6610822D1AA2}"/>
+                <a16:creationId xmlns:a16="http://schemas.microsoft.com/office/drawing/2014/main" id="{9A12C24D-BFD7-4EC4-B7BA-7E682D7C572C}"/>
               </a:ext>
             </a:extLst>
           </p:cNvPr>
@@ -7588,7 +7588,7 @@
           <p:cNvPr id="6" name="core-no-0">
             <a:extLst xmlns:a="http://schemas.openxmlformats.org/drawingml/2006/main">
               <a:ext uri="{FF2B5EF4-FFF2-40B4-BE49-F238E27FC236}">
-                <a16:creationId xmlns:a16="http://schemas.microsoft.com/office/drawing/2014/main" id="{AF9130B6-F8EB-4A1F-B423-6FC39B487212}"/>
+                <a16:creationId xmlns:a16="http://schemas.microsoft.com/office/drawing/2014/main" id="{4443B0E4-E9CB-4FF4-8396-22A3949D0694}"/>
               </a:ext>
             </a:extLst>
           </p:cNvPr>
@@ -7646,7 +7646,7 @@
           <p:cNvPr id="7" name="core-label-0">
             <a:extLst xmlns:a="http://schemas.openxmlformats.org/drawingml/2006/main">
               <a:ext uri="{FF2B5EF4-FFF2-40B4-BE49-F238E27FC236}">
-                <a16:creationId xmlns:a16="http://schemas.microsoft.com/office/drawing/2014/main" id="{39A8291E-9108-40F3-9D56-7F7CD38C41B9}"/>
+                <a16:creationId xmlns:a16="http://schemas.microsoft.com/office/drawing/2014/main" id="{3BAB0171-CE76-4638-B27F-4BE40F27CB3D}"/>
               </a:ext>
             </a:extLst>
           </p:cNvPr>
@@ -7704,7 +7704,7 @@
           <p:cNvPr id="8" name="core-body-0">
             <a:extLst xmlns:a="http://schemas.openxmlformats.org/drawingml/2006/main">
               <a:ext uri="{FF2B5EF4-FFF2-40B4-BE49-F238E27FC236}">
-                <a16:creationId xmlns:a16="http://schemas.microsoft.com/office/drawing/2014/main" id="{94BAEFFE-CE29-4311-A3D5-56DC94299BBB}"/>
+                <a16:creationId xmlns:a16="http://schemas.microsoft.com/office/drawing/2014/main" id="{4583B1EC-FAEB-478A-B084-6239D94D7AEE}"/>
               </a:ext>
             </a:extLst>
           </p:cNvPr>
@@ -7768,7 +7768,7 @@
           <p:cNvPr id="9" name="core-no-1">
             <a:extLst xmlns:a="http://schemas.openxmlformats.org/drawingml/2006/main">
               <a:ext uri="{FF2B5EF4-FFF2-40B4-BE49-F238E27FC236}">
-                <a16:creationId xmlns:a16="http://schemas.microsoft.com/office/drawing/2014/main" id="{7E6583F0-BFB3-4E32-86EF-4833C0D8275D}"/>
+                <a16:creationId xmlns:a16="http://schemas.microsoft.com/office/drawing/2014/main" id="{96D9BF12-FB26-4BC3-9571-D3A532FC648E}"/>
               </a:ext>
             </a:extLst>
           </p:cNvPr>
@@ -7826,7 +7826,7 @@
           <p:cNvPr id="10" name="core-body-1">
             <a:extLst xmlns:a="http://schemas.openxmlformats.org/drawingml/2006/main">
               <a:ext uri="{FF2B5EF4-FFF2-40B4-BE49-F238E27FC236}">
-                <a16:creationId xmlns:a16="http://schemas.microsoft.com/office/drawing/2014/main" id="{2FDA0B52-FB53-4F23-BE04-F1BF2E5BE3C4}"/>
+                <a16:creationId xmlns:a16="http://schemas.microsoft.com/office/drawing/2014/main" id="{F8019FCF-8B4A-4427-A46B-897A4E2DCDC9}"/>
               </a:ext>
             </a:extLst>
           </p:cNvPr>
@@ -7890,7 +7890,7 @@
           <p:cNvPr id="11" name="s6-takeaway-rule">
             <a:extLst xmlns:a="http://schemas.openxmlformats.org/drawingml/2006/main">
               <a:ext uri="{FF2B5EF4-FFF2-40B4-BE49-F238E27FC236}">
-                <a16:creationId xmlns:a16="http://schemas.microsoft.com/office/drawing/2014/main" id="{AA6A7BF6-2446-4C97-AED5-5C805E43CE5F}"/>
+                <a16:creationId xmlns:a16="http://schemas.microsoft.com/office/drawing/2014/main" id="{2A5C9945-92C7-4AA8-94AA-4EC87286385C}"/>
               </a:ext>
             </a:extLst>
           </p:cNvPr>
@@ -7923,7 +7923,7 @@
           <p:cNvPr id="12" name="s6-takeaway">
             <a:extLst xmlns:a="http://schemas.openxmlformats.org/drawingml/2006/main">
               <a:ext uri="{FF2B5EF4-FFF2-40B4-BE49-F238E27FC236}">
-                <a16:creationId xmlns:a16="http://schemas.microsoft.com/office/drawing/2014/main" id="{C5F10DAB-D5DC-48F8-8A27-93B143E04C2E}"/>
+                <a16:creationId xmlns:a16="http://schemas.microsoft.com/office/drawing/2014/main" id="{866AF8A7-2301-4197-BD25-44A008C1E878}"/>
               </a:ext>
             </a:extLst>
           </p:cNvPr>
@@ -7979,7 +7979,7 @@
     </p:spTree>
     <p:extLst>
       <p:ext uri="{BB962C8B-B14F-4D97-AF65-F5344CB8AC3E}">
-        <p14:creationId xmlns:p14="http://schemas.microsoft.com/office/powerpoint/2010/main" val="736097750"/>
+        <p14:creationId xmlns:p14="http://schemas.microsoft.com/office/powerpoint/2010/main" val="1443693016"/>
       </p:ext>
     </p:extLst>
   </p:cSld>
@@ -8010,7 +8010,7 @@
           <p:cNvPr id="1" name="s7-rule">
             <a:extLst xmlns:a="http://schemas.openxmlformats.org/drawingml/2006/main">
               <a:ext uri="{FF2B5EF4-FFF2-40B4-BE49-F238E27FC236}">
-                <a16:creationId xmlns:a16="http://schemas.microsoft.com/office/drawing/2014/main" id="{77F9EAC4-9D89-407B-A00C-7517D39D0157}"/>
+                <a16:creationId xmlns:a16="http://schemas.microsoft.com/office/drawing/2014/main" id="{1ED7AE0E-145A-4F57-B196-FD6CE0CD6FA1}"/>
               </a:ext>
             </a:extLst>
           </p:cNvPr>
@@ -8043,7 +8043,7 @@
           <p:cNvPr id="2" name="s7-eyebrow">
             <a:extLst xmlns:a="http://schemas.openxmlformats.org/drawingml/2006/main">
               <a:ext uri="{FF2B5EF4-FFF2-40B4-BE49-F238E27FC236}">
-                <a16:creationId xmlns:a16="http://schemas.microsoft.com/office/drawing/2014/main" id="{5E50885B-13D6-435C-8AA9-AC3F123C53D2}"/>
+                <a16:creationId xmlns:a16="http://schemas.microsoft.com/office/drawing/2014/main" id="{BA4E5206-A65D-4C5C-B456-CE7CF8A58AE7}"/>
               </a:ext>
             </a:extLst>
           </p:cNvPr>
@@ -8101,7 +8101,7 @@
           <p:cNvPr id="3" name="s7-title">
             <a:extLst xmlns:a="http://schemas.openxmlformats.org/drawingml/2006/main">
               <a:ext uri="{FF2B5EF4-FFF2-40B4-BE49-F238E27FC236}">
-                <a16:creationId xmlns:a16="http://schemas.microsoft.com/office/drawing/2014/main" id="{CEDD5E96-26FB-40D2-AEF1-A9D9990E5F5B}"/>
+                <a16:creationId xmlns:a16="http://schemas.microsoft.com/office/drawing/2014/main" id="{2BE2E14F-3C7D-4EBA-A0D5-E559CA30C492}"/>
               </a:ext>
             </a:extLst>
           </p:cNvPr>
@@ -8159,7 +8159,7 @@
           <p:cNvPr id="4" name="s7-footer">
             <a:extLst xmlns:a="http://schemas.openxmlformats.org/drawingml/2006/main">
               <a:ext uri="{FF2B5EF4-FFF2-40B4-BE49-F238E27FC236}">
-                <a16:creationId xmlns:a16="http://schemas.microsoft.com/office/drawing/2014/main" id="{7ACA475F-A855-4E70-8C9D-2B4B62B3B609}"/>
+                <a16:creationId xmlns:a16="http://schemas.microsoft.com/office/drawing/2014/main" id="{F1682E59-8E59-4370-A1C7-B78FCE821AFD}"/>
               </a:ext>
             </a:extLst>
           </p:cNvPr>
@@ -8190,7 +8190,7 @@
           <p:cNvPr id="5" name="s7-identity">
             <a:extLst xmlns:a="http://schemas.openxmlformats.org/drawingml/2006/main">
               <a:ext uri="{FF2B5EF4-FFF2-40B4-BE49-F238E27FC236}">
-                <a16:creationId xmlns:a16="http://schemas.microsoft.com/office/drawing/2014/main" id="{803A8DF6-0766-4995-8527-CC1F64294FB8}"/>
+                <a16:creationId xmlns:a16="http://schemas.microsoft.com/office/drawing/2014/main" id="{D3735608-527F-450E-955D-D73A679E374E}"/>
               </a:ext>
             </a:extLst>
           </p:cNvPr>
@@ -8248,7 +8248,7 @@
           <p:cNvPr id="6" name="case-title">
             <a:extLst xmlns:a="http://schemas.openxmlformats.org/drawingml/2006/main">
               <a:ext uri="{FF2B5EF4-FFF2-40B4-BE49-F238E27FC236}">
-                <a16:creationId xmlns:a16="http://schemas.microsoft.com/office/drawing/2014/main" id="{3E16BE66-C9BB-49A4-A350-56EC073146BD}"/>
+                <a16:creationId xmlns:a16="http://schemas.microsoft.com/office/drawing/2014/main" id="{72B57D30-33BB-4099-A38E-888BEB0D7F04}"/>
               </a:ext>
             </a:extLst>
           </p:cNvPr>
@@ -8312,7 +8312,7 @@
           <p:cNvPr id="7" name="case-row-0">
             <a:extLst xmlns:a="http://schemas.openxmlformats.org/drawingml/2006/main">
               <a:ext uri="{FF2B5EF4-FFF2-40B4-BE49-F238E27FC236}">
-                <a16:creationId xmlns:a16="http://schemas.microsoft.com/office/drawing/2014/main" id="{0F7DC0F9-D5F5-4C85-ADA9-8886D5FE0327}"/>
+                <a16:creationId xmlns:a16="http://schemas.microsoft.com/office/drawing/2014/main" id="{F744A0BA-E5AA-4168-B10E-995E0DC28122}"/>
               </a:ext>
             </a:extLst>
           </p:cNvPr>
@@ -8376,7 +8376,7 @@
           <p:cNvPr id="8" name="case-row-1">
             <a:extLst xmlns:a="http://schemas.openxmlformats.org/drawingml/2006/main">
               <a:ext uri="{FF2B5EF4-FFF2-40B4-BE49-F238E27FC236}">
-                <a16:creationId xmlns:a16="http://schemas.microsoft.com/office/drawing/2014/main" id="{617D1F97-26C7-4103-B1EB-ECA8169768CC}"/>
+                <a16:creationId xmlns:a16="http://schemas.microsoft.com/office/drawing/2014/main" id="{E6B14B81-E5A3-49A5-BFC5-C3E996A703D1}"/>
               </a:ext>
             </a:extLst>
           </p:cNvPr>
@@ -8440,7 +8440,7 @@
           <p:cNvPr id="9" name="case-row-2">
             <a:extLst xmlns:a="http://schemas.openxmlformats.org/drawingml/2006/main">
               <a:ext uri="{FF2B5EF4-FFF2-40B4-BE49-F238E27FC236}">
-                <a16:creationId xmlns:a16="http://schemas.microsoft.com/office/drawing/2014/main" id="{BBAB0CF5-33BB-4DAE-A46A-53522F8BE387}"/>
+                <a16:creationId xmlns:a16="http://schemas.microsoft.com/office/drawing/2014/main" id="{19930614-87BA-4E1E-98B2-AF16DB5DC210}"/>
               </a:ext>
             </a:extLst>
           </p:cNvPr>
@@ -8504,7 +8504,7 @@
           <p:cNvPr id="10" name="s7-takeaway-rule">
             <a:extLst xmlns:a="http://schemas.openxmlformats.org/drawingml/2006/main">
               <a:ext uri="{FF2B5EF4-FFF2-40B4-BE49-F238E27FC236}">
-                <a16:creationId xmlns:a16="http://schemas.microsoft.com/office/drawing/2014/main" id="{27C377A4-DF49-4688-9F21-CD87AA65B6AE}"/>
+                <a16:creationId xmlns:a16="http://schemas.microsoft.com/office/drawing/2014/main" id="{F03D070E-017A-4F4F-86D6-4E14713D9642}"/>
               </a:ext>
             </a:extLst>
           </p:cNvPr>
@@ -8537,7 +8537,7 @@
           <p:cNvPr id="11" name="s7-takeaway">
             <a:extLst xmlns:a="http://schemas.openxmlformats.org/drawingml/2006/main">
               <a:ext uri="{FF2B5EF4-FFF2-40B4-BE49-F238E27FC236}">
-                <a16:creationId xmlns:a16="http://schemas.microsoft.com/office/drawing/2014/main" id="{453361F4-9AAB-4F4A-994B-E2993B697F26}"/>
+                <a16:creationId xmlns:a16="http://schemas.microsoft.com/office/drawing/2014/main" id="{24847354-DC7C-44A7-ABFA-434DE9251122}"/>
               </a:ext>
             </a:extLst>
           </p:cNvPr>
@@ -8593,7 +8593,7 @@
     </p:spTree>
     <p:extLst>
       <p:ext uri="{BB962C8B-B14F-4D97-AF65-F5344CB8AC3E}">
-        <p14:creationId xmlns:p14="http://schemas.microsoft.com/office/powerpoint/2010/main" val="1194999955"/>
+        <p14:creationId xmlns:p14="http://schemas.microsoft.com/office/powerpoint/2010/main" val="264300570"/>
       </p:ext>
     </p:extLst>
   </p:cSld>
@@ -8624,7 +8624,7 @@
           <p:cNvPr id="1" name="s8-rule">
             <a:extLst xmlns:a="http://schemas.openxmlformats.org/drawingml/2006/main">
               <a:ext uri="{FF2B5EF4-FFF2-40B4-BE49-F238E27FC236}">
-                <a16:creationId xmlns:a16="http://schemas.microsoft.com/office/drawing/2014/main" id="{991372D1-FCDA-4D25-9211-29195C2A8E6F}"/>
+                <a16:creationId xmlns:a16="http://schemas.microsoft.com/office/drawing/2014/main" id="{F1F8B22E-3F1B-499D-B6A7-765BF56059A1}"/>
               </a:ext>
             </a:extLst>
           </p:cNvPr>
@@ -8657,7 +8657,7 @@
           <p:cNvPr id="2" name="s8-eyebrow">
             <a:extLst xmlns:a="http://schemas.openxmlformats.org/drawingml/2006/main">
               <a:ext uri="{FF2B5EF4-FFF2-40B4-BE49-F238E27FC236}">
-                <a16:creationId xmlns:a16="http://schemas.microsoft.com/office/drawing/2014/main" id="{00E3B625-F1F9-406A-8DB5-110165FB9301}"/>
+                <a16:creationId xmlns:a16="http://schemas.microsoft.com/office/drawing/2014/main" id="{7C60DBFF-B48A-4823-97A0-701ABCAF2475}"/>
               </a:ext>
             </a:extLst>
           </p:cNvPr>
@@ -8715,7 +8715,7 @@
           <p:cNvPr id="3" name="s8-title">
             <a:extLst xmlns:a="http://schemas.openxmlformats.org/drawingml/2006/main">
               <a:ext uri="{FF2B5EF4-FFF2-40B4-BE49-F238E27FC236}">
-                <a16:creationId xmlns:a16="http://schemas.microsoft.com/office/drawing/2014/main" id="{861271F1-DB21-4150-BAE7-39A6F60DD60F}"/>
+                <a16:creationId xmlns:a16="http://schemas.microsoft.com/office/drawing/2014/main" id="{2E6B0A0D-EADA-48C0-8961-1DA227D11A00}"/>
               </a:ext>
             </a:extLst>
           </p:cNvPr>
@@ -8773,7 +8773,7 @@
           <p:cNvPr id="4" name="s8-footer">
             <a:extLst xmlns:a="http://schemas.openxmlformats.org/drawingml/2006/main">
               <a:ext uri="{FF2B5EF4-FFF2-40B4-BE49-F238E27FC236}">
-                <a16:creationId xmlns:a16="http://schemas.microsoft.com/office/drawing/2014/main" id="{277AA886-B27C-47C6-96C8-30C01AAECBC2}"/>
+                <a16:creationId xmlns:a16="http://schemas.microsoft.com/office/drawing/2014/main" id="{D616DD1E-3B3C-4913-B1F5-EF71ED17A485}"/>
               </a:ext>
             </a:extLst>
           </p:cNvPr>
@@ -8804,7 +8804,7 @@
           <p:cNvPr id="5" name="s8-identity">
             <a:extLst xmlns:a="http://schemas.openxmlformats.org/drawingml/2006/main">
               <a:ext uri="{FF2B5EF4-FFF2-40B4-BE49-F238E27FC236}">
-                <a16:creationId xmlns:a16="http://schemas.microsoft.com/office/drawing/2014/main" id="{5493AFB6-7B25-4A5B-A0F1-750D2FD339EF}"/>
+                <a16:creationId xmlns:a16="http://schemas.microsoft.com/office/drawing/2014/main" id="{DAA4D5CC-9DFD-4F2B-AC0D-5DFDFA3F838D}"/>
               </a:ext>
             </a:extLst>
           </p:cNvPr>
@@ -8862,7 +8862,7 @@
           <p:cNvPr id="6" name="case-title">
             <a:extLst xmlns:a="http://schemas.openxmlformats.org/drawingml/2006/main">
               <a:ext uri="{FF2B5EF4-FFF2-40B4-BE49-F238E27FC236}">
-                <a16:creationId xmlns:a16="http://schemas.microsoft.com/office/drawing/2014/main" id="{5B0886FE-1788-43EB-8F0A-4FA50F7B7E7D}"/>
+                <a16:creationId xmlns:a16="http://schemas.microsoft.com/office/drawing/2014/main" id="{99B5D349-EA8E-4CC1-9178-3F6FA3836736}"/>
               </a:ext>
             </a:extLst>
           </p:cNvPr>
@@ -8926,7 +8926,7 @@
           <p:cNvPr id="7" name="case-row-0">
             <a:extLst xmlns:a="http://schemas.openxmlformats.org/drawingml/2006/main">
               <a:ext uri="{FF2B5EF4-FFF2-40B4-BE49-F238E27FC236}">
-                <a16:creationId xmlns:a16="http://schemas.microsoft.com/office/drawing/2014/main" id="{892A027A-85AA-41F3-A819-DC6314D25F00}"/>
+                <a16:creationId xmlns:a16="http://schemas.microsoft.com/office/drawing/2014/main" id="{423AC480-D858-4A67-BA92-5FB0DECDB94C}"/>
               </a:ext>
             </a:extLst>
           </p:cNvPr>
@@ -8990,7 +8990,7 @@
           <p:cNvPr id="8" name="case-row-1">
             <a:extLst xmlns:a="http://schemas.openxmlformats.org/drawingml/2006/main">
               <a:ext uri="{FF2B5EF4-FFF2-40B4-BE49-F238E27FC236}">
-                <a16:creationId xmlns:a16="http://schemas.microsoft.com/office/drawing/2014/main" id="{7D020AAD-64AF-4483-9B5D-9CAEB2CD7AC7}"/>
+                <a16:creationId xmlns:a16="http://schemas.microsoft.com/office/drawing/2014/main" id="{1DC117E7-571B-4D9E-814C-2ECFD43D05FF}"/>
               </a:ext>
             </a:extLst>
           </p:cNvPr>
@@ -9054,7 +9054,7 @@
           <p:cNvPr id="9" name="s8-takeaway-rule">
             <a:extLst xmlns:a="http://schemas.openxmlformats.org/drawingml/2006/main">
               <a:ext uri="{FF2B5EF4-FFF2-40B4-BE49-F238E27FC236}">
-                <a16:creationId xmlns:a16="http://schemas.microsoft.com/office/drawing/2014/main" id="{50B4B011-8045-472B-B5F5-C7AC88476C2B}"/>
+                <a16:creationId xmlns:a16="http://schemas.microsoft.com/office/drawing/2014/main" id="{4F472A12-A4C5-42F0-9149-381A83756B31}"/>
               </a:ext>
             </a:extLst>
           </p:cNvPr>
@@ -9087,7 +9087,7 @@
           <p:cNvPr id="10" name="s8-takeaway">
             <a:extLst xmlns:a="http://schemas.openxmlformats.org/drawingml/2006/main">
               <a:ext uri="{FF2B5EF4-FFF2-40B4-BE49-F238E27FC236}">
-                <a16:creationId xmlns:a16="http://schemas.microsoft.com/office/drawing/2014/main" id="{F31F6D6A-3D0E-4F37-BB42-B365697FEAE0}"/>
+                <a16:creationId xmlns:a16="http://schemas.microsoft.com/office/drawing/2014/main" id="{D85160F7-0C90-4A0B-BA51-C7B8F0744874}"/>
               </a:ext>
             </a:extLst>
           </p:cNvPr>
@@ -9143,7 +9143,7 @@
     </p:spTree>
     <p:extLst>
       <p:ext uri="{BB962C8B-B14F-4D97-AF65-F5344CB8AC3E}">
-        <p14:creationId xmlns:p14="http://schemas.microsoft.com/office/powerpoint/2010/main" val="959083459"/>
+        <p14:creationId xmlns:p14="http://schemas.microsoft.com/office/powerpoint/2010/main" val="1375502671"/>
       </p:ext>
     </p:extLst>
   </p:cSld>
@@ -9174,7 +9174,7 @@
           <p:cNvPr id="1" name="s9-rule">
             <a:extLst xmlns:a="http://schemas.openxmlformats.org/drawingml/2006/main">
               <a:ext uri="{FF2B5EF4-FFF2-40B4-BE49-F238E27FC236}">
-                <a16:creationId xmlns:a16="http://schemas.microsoft.com/office/drawing/2014/main" id="{FF53F98F-03B2-4BFC-8D11-E41DF348307E}"/>
+                <a16:creationId xmlns:a16="http://schemas.microsoft.com/office/drawing/2014/main" id="{43147C58-A0CB-470E-AD5E-63196E155A63}"/>
               </a:ext>
             </a:extLst>
           </p:cNvPr>
@@ -9207,7 +9207,7 @@
           <p:cNvPr id="2" name="s9-eyebrow">
             <a:extLst xmlns:a="http://schemas.openxmlformats.org/drawingml/2006/main">
               <a:ext uri="{FF2B5EF4-FFF2-40B4-BE49-F238E27FC236}">
-                <a16:creationId xmlns:a16="http://schemas.microsoft.com/office/drawing/2014/main" id="{7D6B4079-2DAD-46D3-88C8-AB1586372176}"/>
+                <a16:creationId xmlns:a16="http://schemas.microsoft.com/office/drawing/2014/main" id="{4F0FD8FD-4F3E-4D9F-A28C-7505AC1D1BDC}"/>
               </a:ext>
             </a:extLst>
           </p:cNvPr>
@@ -9265,7 +9265,7 @@
           <p:cNvPr id="3" name="s9-title">
             <a:extLst xmlns:a="http://schemas.openxmlformats.org/drawingml/2006/main">
               <a:ext uri="{FF2B5EF4-FFF2-40B4-BE49-F238E27FC236}">
-                <a16:creationId xmlns:a16="http://schemas.microsoft.com/office/drawing/2014/main" id="{E57B30A5-3D31-4380-9F48-0618EA0D6EAA}"/>
+                <a16:creationId xmlns:a16="http://schemas.microsoft.com/office/drawing/2014/main" id="{5D775361-3402-497D-90A2-EA1296E581D0}"/>
               </a:ext>
             </a:extLst>
           </p:cNvPr>
@@ -9323,7 +9323,7 @@
           <p:cNvPr id="4" name="s9-footer">
             <a:extLst xmlns:a="http://schemas.openxmlformats.org/drawingml/2006/main">
               <a:ext uri="{FF2B5EF4-FFF2-40B4-BE49-F238E27FC236}">
-                <a16:creationId xmlns:a16="http://schemas.microsoft.com/office/drawing/2014/main" id="{56EDCA7A-2125-4F63-913C-3F9C1CE82B2B}"/>
+                <a16:creationId xmlns:a16="http://schemas.microsoft.com/office/drawing/2014/main" id="{F3E3873B-E7D8-4D9A-8518-55E5C369A087}"/>
               </a:ext>
             </a:extLst>
           </p:cNvPr>
@@ -9354,7 +9354,7 @@
           <p:cNvPr id="5" name="s9-identity">
             <a:extLst xmlns:a="http://schemas.openxmlformats.org/drawingml/2006/main">
               <a:ext uri="{FF2B5EF4-FFF2-40B4-BE49-F238E27FC236}">
-                <a16:creationId xmlns:a16="http://schemas.microsoft.com/office/drawing/2014/main" id="{5C9648D8-59F0-4BA0-9574-F88AA8B06DCF}"/>
+                <a16:creationId xmlns:a16="http://schemas.microsoft.com/office/drawing/2014/main" id="{0A782446-E659-410B-96B3-170D86359C31}"/>
               </a:ext>
             </a:extLst>
           </p:cNvPr>
@@ -9412,7 +9412,7 @@
           <p:cNvPr id="6" name="case-title">
             <a:extLst xmlns:a="http://schemas.openxmlformats.org/drawingml/2006/main">
               <a:ext uri="{FF2B5EF4-FFF2-40B4-BE49-F238E27FC236}">
-                <a16:creationId xmlns:a16="http://schemas.microsoft.com/office/drawing/2014/main" id="{65A03B46-25BF-4D5A-91E0-F270C054B077}"/>
+                <a16:creationId xmlns:a16="http://schemas.microsoft.com/office/drawing/2014/main" id="{5A9661A3-DB60-4F5D-AB31-DEFB5B043F47}"/>
               </a:ext>
             </a:extLst>
           </p:cNvPr>
@@ -9476,7 +9476,7 @@
           <p:cNvPr id="7" name="case-row-0">
             <a:extLst xmlns:a="http://schemas.openxmlformats.org/drawingml/2006/main">
               <a:ext uri="{FF2B5EF4-FFF2-40B4-BE49-F238E27FC236}">
-                <a16:creationId xmlns:a16="http://schemas.microsoft.com/office/drawing/2014/main" id="{26C91762-0EC4-4B4D-8B22-810494EEB0B9}"/>
+                <a16:creationId xmlns:a16="http://schemas.microsoft.com/office/drawing/2014/main" id="{E12E5EF0-2944-4545-854A-9C46FC5E1D77}"/>
               </a:ext>
             </a:extLst>
           </p:cNvPr>
@@ -9540,7 +9540,7 @@
           <p:cNvPr id="8" name="case-row-1">
             <a:extLst xmlns:a="http://schemas.openxmlformats.org/drawingml/2006/main">
               <a:ext uri="{FF2B5EF4-FFF2-40B4-BE49-F238E27FC236}">
-                <a16:creationId xmlns:a16="http://schemas.microsoft.com/office/drawing/2014/main" id="{813DC20F-9756-4D30-80D0-D10E738DB03F}"/>
+                <a16:creationId xmlns:a16="http://schemas.microsoft.com/office/drawing/2014/main" id="{0D0689DD-17B7-4CA0-8018-3D9112B99C28}"/>
               </a:ext>
             </a:extLst>
           </p:cNvPr>
@@ -9604,7 +9604,7 @@
           <p:cNvPr id="9" name="case-row-2">
             <a:extLst xmlns:a="http://schemas.openxmlformats.org/drawingml/2006/main">
               <a:ext uri="{FF2B5EF4-FFF2-40B4-BE49-F238E27FC236}">
-                <a16:creationId xmlns:a16="http://schemas.microsoft.com/office/drawing/2014/main" id="{AAF3B48A-B8D2-4241-9EDB-FB115778A64C}"/>
+                <a16:creationId xmlns:a16="http://schemas.microsoft.com/office/drawing/2014/main" id="{5C460E74-99F1-49DC-9BC9-1BF758D203A8}"/>
               </a:ext>
             </a:extLst>
           </p:cNvPr>
@@ -9668,7 +9668,7 @@
           <p:cNvPr id="10" name="s9-takeaway-rule">
             <a:extLst xmlns:a="http://schemas.openxmlformats.org/drawingml/2006/main">
               <a:ext uri="{FF2B5EF4-FFF2-40B4-BE49-F238E27FC236}">
-                <a16:creationId xmlns:a16="http://schemas.microsoft.com/office/drawing/2014/main" id="{A8EF773E-98D4-4199-AAC8-6C610B749AA1}"/>
+                <a16:creationId xmlns:a16="http://schemas.microsoft.com/office/drawing/2014/main" id="{4624F725-C39F-4992-BE6E-91444A07B9A3}"/>
               </a:ext>
             </a:extLst>
           </p:cNvPr>
@@ -9701,7 +9701,7 @@
           <p:cNvPr id="11" name="s9-takeaway">
             <a:extLst xmlns:a="http://schemas.openxmlformats.org/drawingml/2006/main">
               <a:ext uri="{FF2B5EF4-FFF2-40B4-BE49-F238E27FC236}">
-                <a16:creationId xmlns:a16="http://schemas.microsoft.com/office/drawing/2014/main" id="{C8339470-217D-40EA-A728-1CCF052FA996}"/>
+                <a16:creationId xmlns:a16="http://schemas.microsoft.com/office/drawing/2014/main" id="{282E5195-A91F-484B-9FD3-07A63EDF7901}"/>
               </a:ext>
             </a:extLst>
           </p:cNvPr>
@@ -9757,7 +9757,7 @@
     </p:spTree>
     <p:extLst>
       <p:ext uri="{BB962C8B-B14F-4D97-AF65-F5344CB8AC3E}">
-        <p14:creationId xmlns:p14="http://schemas.microsoft.com/office/powerpoint/2010/main" val="1229622862"/>
+        <p14:creationId xmlns:p14="http://schemas.microsoft.com/office/powerpoint/2010/main" val="209667219"/>
       </p:ext>
     </p:extLst>
   </p:cSld>

--- a/docs/public/course-assets/course-pptx/ov-001.pptx
+++ b/docs/public/course-assets/course-pptx/ov-001.pptx
@@ -2,24 +2,24 @@
 <file path=ppt/presentation.xml><?xml version="1.0" encoding="utf-8"?>
 <p:presentation xmlns:p="http://schemas.openxmlformats.org/presentationml/2006/main">
   <p:sldMasterIdLst>
-    <p:sldMasterId xmlns:r="http://schemas.openxmlformats.org/officeDocument/2006/relationships" id="2147483648" r:id="Rf8e6ac979f6b4836"/>
+    <p:sldMasterId xmlns:r="http://schemas.openxmlformats.org/officeDocument/2006/relationships" id="2147483648" r:id="Rcbb5988617cf4e22"/>
   </p:sldMasterIdLst>
   <p:notesMasterIdLst>
-    <p:notesMasterId xmlns:r="http://schemas.openxmlformats.org/officeDocument/2006/relationships" r:id="Re3817c35b4ca4afd"/>
+    <p:notesMasterId xmlns:r="http://schemas.openxmlformats.org/officeDocument/2006/relationships" r:id="R466ebe336fbf4902"/>
   </p:notesMasterIdLst>
   <p:sldIdLst>
-    <p:sldId xmlns:r="http://schemas.openxmlformats.org/officeDocument/2006/relationships" id="256" r:id="R524c7b36b753457e"/>
-    <p:sldId xmlns:r="http://schemas.openxmlformats.org/officeDocument/2006/relationships" id="257" r:id="R889000e4da154570"/>
-    <p:sldId xmlns:r="http://schemas.openxmlformats.org/officeDocument/2006/relationships" id="258" r:id="Rc63dfb72f1af42e9"/>
-    <p:sldId xmlns:r="http://schemas.openxmlformats.org/officeDocument/2006/relationships" id="259" r:id="R9010177b6e6f45cc"/>
-    <p:sldId xmlns:r="http://schemas.openxmlformats.org/officeDocument/2006/relationships" id="260" r:id="R11a2afbf89f144ec"/>
-    <p:sldId xmlns:r="http://schemas.openxmlformats.org/officeDocument/2006/relationships" id="261" r:id="R65444c5ceff34b32"/>
-    <p:sldId xmlns:r="http://schemas.openxmlformats.org/officeDocument/2006/relationships" id="262" r:id="Recb3cf642a2848bd"/>
-    <p:sldId xmlns:r="http://schemas.openxmlformats.org/officeDocument/2006/relationships" id="263" r:id="Rd6518d34e41e4653"/>
-    <p:sldId xmlns:r="http://schemas.openxmlformats.org/officeDocument/2006/relationships" id="264" r:id="R6c98ffd3b0764a38"/>
-    <p:sldId xmlns:r="http://schemas.openxmlformats.org/officeDocument/2006/relationships" id="265" r:id="Rceb1fdc4156047f0"/>
-    <p:sldId xmlns:r="http://schemas.openxmlformats.org/officeDocument/2006/relationships" id="266" r:id="R815512e05d5a4e1c"/>
-    <p:sldId xmlns:r="http://schemas.openxmlformats.org/officeDocument/2006/relationships" id="267" r:id="R12d2f057c77145da"/>
+    <p:sldId xmlns:r="http://schemas.openxmlformats.org/officeDocument/2006/relationships" id="256" r:id="R0f3e1d60bb1e44ce"/>
+    <p:sldId xmlns:r="http://schemas.openxmlformats.org/officeDocument/2006/relationships" id="257" r:id="R6ca5c679ea3d40d5"/>
+    <p:sldId xmlns:r="http://schemas.openxmlformats.org/officeDocument/2006/relationships" id="258" r:id="Rcfc364b6f9734136"/>
+    <p:sldId xmlns:r="http://schemas.openxmlformats.org/officeDocument/2006/relationships" id="259" r:id="R3007cf3a28384cef"/>
+    <p:sldId xmlns:r="http://schemas.openxmlformats.org/officeDocument/2006/relationships" id="260" r:id="R9b4e6e198a364f3a"/>
+    <p:sldId xmlns:r="http://schemas.openxmlformats.org/officeDocument/2006/relationships" id="261" r:id="R697c80009db14260"/>
+    <p:sldId xmlns:r="http://schemas.openxmlformats.org/officeDocument/2006/relationships" id="262" r:id="R7da9d680f9054ba0"/>
+    <p:sldId xmlns:r="http://schemas.openxmlformats.org/officeDocument/2006/relationships" id="263" r:id="R7e13783cfc514c8d"/>
+    <p:sldId xmlns:r="http://schemas.openxmlformats.org/officeDocument/2006/relationships" id="264" r:id="Ra9ac7c8dd2be4529"/>
+    <p:sldId xmlns:r="http://schemas.openxmlformats.org/officeDocument/2006/relationships" id="265" r:id="R646ee48be53445df"/>
+    <p:sldId xmlns:r="http://schemas.openxmlformats.org/officeDocument/2006/relationships" id="266" r:id="Rc6a7fd3a32db4efa"/>
+    <p:sldId xmlns:r="http://schemas.openxmlformats.org/officeDocument/2006/relationships" id="267" r:id="R7d7f298eb31247e7"/>
   </p:sldIdLst>
   <p:sldSz cx="12192000" cy="6858000"/>
   <p:notesSz cx="6858000" cy="9144000"/>
@@ -1338,7 +1338,7 @@
   </p:cSld>
   <p:clrMap bg1="lt1" tx1="dk1" bg2="lt2" tx2="dk2" accent1="accent1" accent2="accent2" accent3="accent3" accent4="accent4" accent5="accent5" accent6="accent6" hlink="hlink" folHlink="folHlink"/>
   <p:sldLayoutIdLst>
-    <p:sldLayoutId xmlns:r="http://schemas.openxmlformats.org/officeDocument/2006/relationships" id="2147483649" r:id="R2c71d34a54924fbf"/>
+    <p:sldLayoutId xmlns:r="http://schemas.openxmlformats.org/officeDocument/2006/relationships" id="2147483649" r:id="Rb526b3b302af49f4"/>
   </p:sldLayoutIdLst>
   <p:txStyles>
     <p:titleStyle>
@@ -1889,7 +1889,7 @@
           <p:cNvPr id="1" name="cover-rule">
             <a:extLst xmlns:a="http://schemas.openxmlformats.org/drawingml/2006/main">
               <a:ext uri="{FF2B5EF4-FFF2-40B4-BE49-F238E27FC236}">
-                <a16:creationId xmlns:a16="http://schemas.microsoft.com/office/drawing/2014/main" id="{0FE41C0F-2DAD-4EC8-861F-77533816D1D6}"/>
+                <a16:creationId xmlns:a16="http://schemas.microsoft.com/office/drawing/2014/main" id="{08754BC3-28FE-4850-9F8F-3C89CE10D3CF}"/>
               </a:ext>
             </a:extLst>
           </p:cNvPr>
@@ -1922,7 +1922,7 @@
           <p:cNvPr id="2" name="cover-ring-1">
             <a:extLst xmlns:a="http://schemas.openxmlformats.org/drawingml/2006/main">
               <a:ext uri="{FF2B5EF4-FFF2-40B4-BE49-F238E27FC236}">
-                <a16:creationId xmlns:a16="http://schemas.microsoft.com/office/drawing/2014/main" id="{B504AA06-A601-48EE-BC66-D406E0FDE2F2}"/>
+                <a16:creationId xmlns:a16="http://schemas.microsoft.com/office/drawing/2014/main" id="{D245CF06-D163-4519-B55F-46F360B060F0}"/>
               </a:ext>
             </a:extLst>
           </p:cNvPr>
@@ -1953,7 +1953,7 @@
           <p:cNvPr id="3" name="cover-ring-2">
             <a:extLst xmlns:a="http://schemas.openxmlformats.org/drawingml/2006/main">
               <a:ext uri="{FF2B5EF4-FFF2-40B4-BE49-F238E27FC236}">
-                <a16:creationId xmlns:a16="http://schemas.microsoft.com/office/drawing/2014/main" id="{A12DE5FC-056E-4361-96B8-8377BA5B7B56}"/>
+                <a16:creationId xmlns:a16="http://schemas.microsoft.com/office/drawing/2014/main" id="{2F27B3C7-B000-4DAC-8AFC-70FE30DDBE72}"/>
               </a:ext>
             </a:extLst>
           </p:cNvPr>
@@ -1984,7 +1984,7 @@
           <p:cNvPr id="4" name="cover-core">
             <a:extLst xmlns:a="http://schemas.openxmlformats.org/drawingml/2006/main">
               <a:ext uri="{FF2B5EF4-FFF2-40B4-BE49-F238E27FC236}">
-                <a16:creationId xmlns:a16="http://schemas.microsoft.com/office/drawing/2014/main" id="{576F4182-2851-4967-AE62-4E3B6AE468CC}"/>
+                <a16:creationId xmlns:a16="http://schemas.microsoft.com/office/drawing/2014/main" id="{1D0A25C8-9FD1-4A6D-B083-EE92DC4616F2}"/>
               </a:ext>
             </a:extLst>
           </p:cNvPr>
@@ -2017,7 +2017,7 @@
           <p:cNvPr id="5" name="cover-line-1">
             <a:extLst xmlns:a="http://schemas.openxmlformats.org/drawingml/2006/main">
               <a:ext uri="{FF2B5EF4-FFF2-40B4-BE49-F238E27FC236}">
-                <a16:creationId xmlns:a16="http://schemas.microsoft.com/office/drawing/2014/main" id="{B556D91B-FBB3-4CA8-9E42-20162725683D}"/>
+                <a16:creationId xmlns:a16="http://schemas.microsoft.com/office/drawing/2014/main" id="{8AD75D55-F78C-432E-AFE8-DCD67944E6CD}"/>
               </a:ext>
             </a:extLst>
           </p:cNvPr>
@@ -2048,7 +2048,7 @@
           <p:cNvPr id="6" name="cover-line-2">
             <a:extLst xmlns:a="http://schemas.openxmlformats.org/drawingml/2006/main">
               <a:ext uri="{FF2B5EF4-FFF2-40B4-BE49-F238E27FC236}">
-                <a16:creationId xmlns:a16="http://schemas.microsoft.com/office/drawing/2014/main" id="{11F834CF-9207-4579-AD7B-C9D63AAF5F40}"/>
+                <a16:creationId xmlns:a16="http://schemas.microsoft.com/office/drawing/2014/main" id="{1FCFAFC3-49AF-4F0F-9158-078FD32A662E}"/>
               </a:ext>
             </a:extLst>
           </p:cNvPr>
@@ -2079,7 +2079,7 @@
           <p:cNvPr id="7" name="cover-eyebrow">
             <a:extLst xmlns:a="http://schemas.openxmlformats.org/drawingml/2006/main">
               <a:ext uri="{FF2B5EF4-FFF2-40B4-BE49-F238E27FC236}">
-                <a16:creationId xmlns:a16="http://schemas.microsoft.com/office/drawing/2014/main" id="{9E37B5C6-266B-4AA3-A8C9-62EDA2B213A3}"/>
+                <a16:creationId xmlns:a16="http://schemas.microsoft.com/office/drawing/2014/main" id="{9A6B40A7-AF62-4BED-A1A3-BB1A00FEFD64}"/>
               </a:ext>
             </a:extLst>
           </p:cNvPr>
@@ -2137,7 +2137,7 @@
           <p:cNvPr id="8" name="cover-title">
             <a:extLst xmlns:a="http://schemas.openxmlformats.org/drawingml/2006/main">
               <a:ext uri="{FF2B5EF4-FFF2-40B4-BE49-F238E27FC236}">
-                <a16:creationId xmlns:a16="http://schemas.microsoft.com/office/drawing/2014/main" id="{8CC5DD61-9AB1-44B8-9E31-AD1DD2778C48}"/>
+                <a16:creationId xmlns:a16="http://schemas.microsoft.com/office/drawing/2014/main" id="{2631944A-6FE1-44EF-B845-547127180E2D}"/>
               </a:ext>
             </a:extLst>
           </p:cNvPr>
@@ -2195,7 +2195,7 @@
           <p:cNvPr id="9" name="cover-subtitle">
             <a:extLst xmlns:a="http://schemas.openxmlformats.org/drawingml/2006/main">
               <a:ext uri="{FF2B5EF4-FFF2-40B4-BE49-F238E27FC236}">
-                <a16:creationId xmlns:a16="http://schemas.microsoft.com/office/drawing/2014/main" id="{7916C537-02EA-4C55-BBB6-5DC064346A5C}"/>
+                <a16:creationId xmlns:a16="http://schemas.microsoft.com/office/drawing/2014/main" id="{7CD7C6C8-737D-4199-A9E4-B951E1FE2BB0}"/>
               </a:ext>
             </a:extLst>
           </p:cNvPr>
@@ -2257,7 +2257,7 @@
           <p:cNvPr id="10" name="cover-lead">
             <a:extLst xmlns:a="http://schemas.openxmlformats.org/drawingml/2006/main">
               <a:ext uri="{FF2B5EF4-FFF2-40B4-BE49-F238E27FC236}">
-                <a16:creationId xmlns:a16="http://schemas.microsoft.com/office/drawing/2014/main" id="{4EF9E02B-1BFB-417C-B0F9-144D8AE17EB0}"/>
+                <a16:creationId xmlns:a16="http://schemas.microsoft.com/office/drawing/2014/main" id="{39DA2F30-15B6-4667-832D-71EAD600384B}"/>
               </a:ext>
             </a:extLst>
           </p:cNvPr>
@@ -2315,7 +2315,7 @@
           <p:cNvPr id="11" name="cover-course">
             <a:extLst xmlns:a="http://schemas.openxmlformats.org/drawingml/2006/main">
               <a:ext uri="{FF2B5EF4-FFF2-40B4-BE49-F238E27FC236}">
-                <a16:creationId xmlns:a16="http://schemas.microsoft.com/office/drawing/2014/main" id="{79204D09-6909-40B1-88C4-AD2E801A15BD}"/>
+                <a16:creationId xmlns:a16="http://schemas.microsoft.com/office/drawing/2014/main" id="{FA4C16DC-DEB4-4C74-A0E7-DADA012BF2F1}"/>
               </a:ext>
             </a:extLst>
           </p:cNvPr>
@@ -2373,7 +2373,7 @@
           <p:cNvPr id="12" name="cover-id">
             <a:extLst xmlns:a="http://schemas.openxmlformats.org/drawingml/2006/main">
               <a:ext uri="{FF2B5EF4-FFF2-40B4-BE49-F238E27FC236}">
-                <a16:creationId xmlns:a16="http://schemas.microsoft.com/office/drawing/2014/main" id="{BA24A1AA-4D75-43A2-A31B-F3DDCD079911}"/>
+                <a16:creationId xmlns:a16="http://schemas.microsoft.com/office/drawing/2014/main" id="{4A674CE5-F3D4-42D4-81B0-661031C7C4FB}"/>
               </a:ext>
             </a:extLst>
           </p:cNvPr>
@@ -2429,7 +2429,7 @@
     </p:spTree>
     <p:extLst>
       <p:ext uri="{BB962C8B-B14F-4D97-AF65-F5344CB8AC3E}">
-        <p14:creationId xmlns:p14="http://schemas.microsoft.com/office/powerpoint/2010/main" val="1408048153"/>
+        <p14:creationId xmlns:p14="http://schemas.microsoft.com/office/powerpoint/2010/main" val="1276559243"/>
       </p:ext>
     </p:extLst>
   </p:cSld>
@@ -2460,7 +2460,7 @@
           <p:cNvPr id="1" name="s10-rule">
             <a:extLst xmlns:a="http://schemas.openxmlformats.org/drawingml/2006/main">
               <a:ext uri="{FF2B5EF4-FFF2-40B4-BE49-F238E27FC236}">
-                <a16:creationId xmlns:a16="http://schemas.microsoft.com/office/drawing/2014/main" id="{62090F50-71D0-4E5F-A87F-E0808A644EBC}"/>
+                <a16:creationId xmlns:a16="http://schemas.microsoft.com/office/drawing/2014/main" id="{8E2CFE1B-1058-44FF-AA76-E4F7D7811594}"/>
               </a:ext>
             </a:extLst>
           </p:cNvPr>
@@ -2493,7 +2493,7 @@
           <p:cNvPr id="2" name="s10-eyebrow">
             <a:extLst xmlns:a="http://schemas.openxmlformats.org/drawingml/2006/main">
               <a:ext uri="{FF2B5EF4-FFF2-40B4-BE49-F238E27FC236}">
-                <a16:creationId xmlns:a16="http://schemas.microsoft.com/office/drawing/2014/main" id="{1DB5169F-5E47-426F-8FA6-F4B9BA84FDBA}"/>
+                <a16:creationId xmlns:a16="http://schemas.microsoft.com/office/drawing/2014/main" id="{F3B3BB88-4D88-445C-863C-760B916BD327}"/>
               </a:ext>
             </a:extLst>
           </p:cNvPr>
@@ -2551,7 +2551,7 @@
           <p:cNvPr id="3" name="s10-title">
             <a:extLst xmlns:a="http://schemas.openxmlformats.org/drawingml/2006/main">
               <a:ext uri="{FF2B5EF4-FFF2-40B4-BE49-F238E27FC236}">
-                <a16:creationId xmlns:a16="http://schemas.microsoft.com/office/drawing/2014/main" id="{BD6C69A3-4F01-4D77-8441-986D88861E47}"/>
+                <a16:creationId xmlns:a16="http://schemas.microsoft.com/office/drawing/2014/main" id="{ACDF7CEE-84AB-4A03-86BB-A672C649A258}"/>
               </a:ext>
             </a:extLst>
           </p:cNvPr>
@@ -2609,7 +2609,7 @@
           <p:cNvPr id="4" name="s10-footer">
             <a:extLst xmlns:a="http://schemas.openxmlformats.org/drawingml/2006/main">
               <a:ext uri="{FF2B5EF4-FFF2-40B4-BE49-F238E27FC236}">
-                <a16:creationId xmlns:a16="http://schemas.microsoft.com/office/drawing/2014/main" id="{8446843C-D055-40E2-8834-D6AFC78D4048}"/>
+                <a16:creationId xmlns:a16="http://schemas.microsoft.com/office/drawing/2014/main" id="{A26FC913-52B0-4C10-8FE0-33214592CC64}"/>
               </a:ext>
             </a:extLst>
           </p:cNvPr>
@@ -2640,7 +2640,7 @@
           <p:cNvPr id="5" name="s10-identity">
             <a:extLst xmlns:a="http://schemas.openxmlformats.org/drawingml/2006/main">
               <a:ext uri="{FF2B5EF4-FFF2-40B4-BE49-F238E27FC236}">
-                <a16:creationId xmlns:a16="http://schemas.microsoft.com/office/drawing/2014/main" id="{9D60C98D-83C7-4B87-A994-433A487E95F6}"/>
+                <a16:creationId xmlns:a16="http://schemas.microsoft.com/office/drawing/2014/main" id="{95F42980-88FD-44C5-ABD7-B91AE7707E0E}"/>
               </a:ext>
             </a:extLst>
           </p:cNvPr>
@@ -2698,7 +2698,7 @@
           <p:cNvPr id="6" name="practice-circle-0">
             <a:extLst xmlns:a="http://schemas.openxmlformats.org/drawingml/2006/main">
               <a:ext uri="{FF2B5EF4-FFF2-40B4-BE49-F238E27FC236}">
-                <a16:creationId xmlns:a16="http://schemas.microsoft.com/office/drawing/2014/main" id="{EF1DAD33-E164-4213-8798-E653F5DD7533}"/>
+                <a16:creationId xmlns:a16="http://schemas.microsoft.com/office/drawing/2014/main" id="{11F34A96-533D-48B3-B06B-ECEB9DEBFE98}"/>
               </a:ext>
             </a:extLst>
           </p:cNvPr>
@@ -2731,7 +2731,7 @@
           <p:cNvPr id="7" name="practice-number-0">
             <a:extLst xmlns:a="http://schemas.openxmlformats.org/drawingml/2006/main">
               <a:ext uri="{FF2B5EF4-FFF2-40B4-BE49-F238E27FC236}">
-                <a16:creationId xmlns:a16="http://schemas.microsoft.com/office/drawing/2014/main" id="{FCEA6C86-BC8D-423D-9BF2-EF3EEC3F3752}"/>
+                <a16:creationId xmlns:a16="http://schemas.microsoft.com/office/drawing/2014/main" id="{DD734CA1-628E-4A8E-8CD5-990DCA001173}"/>
               </a:ext>
             </a:extLst>
           </p:cNvPr>
@@ -2789,7 +2789,7 @@
           <p:cNvPr id="8" name="practice-item-0">
             <a:extLst xmlns:a="http://schemas.openxmlformats.org/drawingml/2006/main">
               <a:ext uri="{FF2B5EF4-FFF2-40B4-BE49-F238E27FC236}">
-                <a16:creationId xmlns:a16="http://schemas.microsoft.com/office/drawing/2014/main" id="{0DC48A68-3ADE-450A-9D25-CEDB414989A2}"/>
+                <a16:creationId xmlns:a16="http://schemas.microsoft.com/office/drawing/2014/main" id="{95B956DE-ACA6-432F-A9C0-3E13EB79B6C1}"/>
               </a:ext>
             </a:extLst>
           </p:cNvPr>
@@ -2853,7 +2853,7 @@
           <p:cNvPr id="9" name="practice-connector-0">
             <a:extLst xmlns:a="http://schemas.openxmlformats.org/drawingml/2006/main">
               <a:ext uri="{FF2B5EF4-FFF2-40B4-BE49-F238E27FC236}">
-                <a16:creationId xmlns:a16="http://schemas.microsoft.com/office/drawing/2014/main" id="{55929D5B-304B-4E95-9A63-6F9D1A452F99}"/>
+                <a16:creationId xmlns:a16="http://schemas.microsoft.com/office/drawing/2014/main" id="{A7A71FFF-5AD1-4F0D-949B-792142604570}"/>
               </a:ext>
             </a:extLst>
           </p:cNvPr>
@@ -2884,7 +2884,7 @@
           <p:cNvPr id="10" name="practice-circle-1">
             <a:extLst xmlns:a="http://schemas.openxmlformats.org/drawingml/2006/main">
               <a:ext uri="{FF2B5EF4-FFF2-40B4-BE49-F238E27FC236}">
-                <a16:creationId xmlns:a16="http://schemas.microsoft.com/office/drawing/2014/main" id="{B3687106-049D-4E64-9C92-49A2CCF023AA}"/>
+                <a16:creationId xmlns:a16="http://schemas.microsoft.com/office/drawing/2014/main" id="{97C9944E-E9D0-4976-AA3C-CA13DEACD5C9}"/>
               </a:ext>
             </a:extLst>
           </p:cNvPr>
@@ -2917,7 +2917,7 @@
           <p:cNvPr id="11" name="practice-number-1">
             <a:extLst xmlns:a="http://schemas.openxmlformats.org/drawingml/2006/main">
               <a:ext uri="{FF2B5EF4-FFF2-40B4-BE49-F238E27FC236}">
-                <a16:creationId xmlns:a16="http://schemas.microsoft.com/office/drawing/2014/main" id="{DE447861-1EAB-4D72-B9A6-DD4577596297}"/>
+                <a16:creationId xmlns:a16="http://schemas.microsoft.com/office/drawing/2014/main" id="{546DC736-F250-4C99-B600-DBFAF51D17E1}"/>
               </a:ext>
             </a:extLst>
           </p:cNvPr>
@@ -2975,7 +2975,7 @@
           <p:cNvPr id="12" name="practice-item-1">
             <a:extLst xmlns:a="http://schemas.openxmlformats.org/drawingml/2006/main">
               <a:ext uri="{FF2B5EF4-FFF2-40B4-BE49-F238E27FC236}">
-                <a16:creationId xmlns:a16="http://schemas.microsoft.com/office/drawing/2014/main" id="{41ADA3DC-95E2-4CC3-9014-FA9F79016D5A}"/>
+                <a16:creationId xmlns:a16="http://schemas.microsoft.com/office/drawing/2014/main" id="{24A1F2BD-A7D9-4618-8852-712546D1C344}"/>
               </a:ext>
             </a:extLst>
           </p:cNvPr>
@@ -3039,7 +3039,7 @@
           <p:cNvPr id="13" name="practice-connector-1">
             <a:extLst xmlns:a="http://schemas.openxmlformats.org/drawingml/2006/main">
               <a:ext uri="{FF2B5EF4-FFF2-40B4-BE49-F238E27FC236}">
-                <a16:creationId xmlns:a16="http://schemas.microsoft.com/office/drawing/2014/main" id="{8DC997FB-2EFE-474C-AFB7-2EA9E04DBDA9}"/>
+                <a16:creationId xmlns:a16="http://schemas.microsoft.com/office/drawing/2014/main" id="{5034ED7F-6F35-417F-8F84-FAE21250FA3A}"/>
               </a:ext>
             </a:extLst>
           </p:cNvPr>
@@ -3070,7 +3070,7 @@
           <p:cNvPr id="14" name="practice-circle-2">
             <a:extLst xmlns:a="http://schemas.openxmlformats.org/drawingml/2006/main">
               <a:ext uri="{FF2B5EF4-FFF2-40B4-BE49-F238E27FC236}">
-                <a16:creationId xmlns:a16="http://schemas.microsoft.com/office/drawing/2014/main" id="{678027D0-4C35-42CB-A254-76DCBC04ACAF}"/>
+                <a16:creationId xmlns:a16="http://schemas.microsoft.com/office/drawing/2014/main" id="{57FC2BCE-F8D9-49F9-AF34-053779B814A2}"/>
               </a:ext>
             </a:extLst>
           </p:cNvPr>
@@ -3103,7 +3103,7 @@
           <p:cNvPr id="15" name="practice-number-2">
             <a:extLst xmlns:a="http://schemas.openxmlformats.org/drawingml/2006/main">
               <a:ext uri="{FF2B5EF4-FFF2-40B4-BE49-F238E27FC236}">
-                <a16:creationId xmlns:a16="http://schemas.microsoft.com/office/drawing/2014/main" id="{2F6AB596-7B22-4889-A95D-3BDC960A8572}"/>
+                <a16:creationId xmlns:a16="http://schemas.microsoft.com/office/drawing/2014/main" id="{3B8DC639-2A92-47CC-BF17-8AA18E6E3B7A}"/>
               </a:ext>
             </a:extLst>
           </p:cNvPr>
@@ -3161,7 +3161,7 @@
           <p:cNvPr id="16" name="practice-item-2">
             <a:extLst xmlns:a="http://schemas.openxmlformats.org/drawingml/2006/main">
               <a:ext uri="{FF2B5EF4-FFF2-40B4-BE49-F238E27FC236}">
-                <a16:creationId xmlns:a16="http://schemas.microsoft.com/office/drawing/2014/main" id="{29B0B877-843C-472F-9876-BD032C730A2D}"/>
+                <a16:creationId xmlns:a16="http://schemas.microsoft.com/office/drawing/2014/main" id="{34FFFE0A-D6C9-4D0C-93F7-11194EEEB6C7}"/>
               </a:ext>
             </a:extLst>
           </p:cNvPr>
@@ -3223,7 +3223,7 @@
     </p:spTree>
     <p:extLst>
       <p:ext uri="{BB962C8B-B14F-4D97-AF65-F5344CB8AC3E}">
-        <p14:creationId xmlns:p14="http://schemas.microsoft.com/office/powerpoint/2010/main" val="911505911"/>
+        <p14:creationId xmlns:p14="http://schemas.microsoft.com/office/powerpoint/2010/main" val="654771640"/>
       </p:ext>
     </p:extLst>
   </p:cSld>
@@ -3254,7 +3254,7 @@
           <p:cNvPr id="1" name="s11-rule">
             <a:extLst xmlns:a="http://schemas.openxmlformats.org/drawingml/2006/main">
               <a:ext uri="{FF2B5EF4-FFF2-40B4-BE49-F238E27FC236}">
-                <a16:creationId xmlns:a16="http://schemas.microsoft.com/office/drawing/2014/main" id="{19E47066-4C99-4FA5-9CDC-128CD9AF7FEC}"/>
+                <a16:creationId xmlns:a16="http://schemas.microsoft.com/office/drawing/2014/main" id="{21CCBFB0-B759-4AF7-9D85-DA45CA705155}"/>
               </a:ext>
             </a:extLst>
           </p:cNvPr>
@@ -3287,7 +3287,7 @@
           <p:cNvPr id="2" name="s11-eyebrow">
             <a:extLst xmlns:a="http://schemas.openxmlformats.org/drawingml/2006/main">
               <a:ext uri="{FF2B5EF4-FFF2-40B4-BE49-F238E27FC236}">
-                <a16:creationId xmlns:a16="http://schemas.microsoft.com/office/drawing/2014/main" id="{B9F5E4E9-9D48-4764-AAB9-E4BF66B6AA38}"/>
+                <a16:creationId xmlns:a16="http://schemas.microsoft.com/office/drawing/2014/main" id="{A4FA7209-42D6-4981-8F18-2B1393ECCB3B}"/>
               </a:ext>
             </a:extLst>
           </p:cNvPr>
@@ -3345,7 +3345,7 @@
           <p:cNvPr id="3" name="s11-title">
             <a:extLst xmlns:a="http://schemas.openxmlformats.org/drawingml/2006/main">
               <a:ext uri="{FF2B5EF4-FFF2-40B4-BE49-F238E27FC236}">
-                <a16:creationId xmlns:a16="http://schemas.microsoft.com/office/drawing/2014/main" id="{DB5EFFE5-13DD-41E1-8FE8-6B2283A7B876}"/>
+                <a16:creationId xmlns:a16="http://schemas.microsoft.com/office/drawing/2014/main" id="{332E99C6-5D9D-4E69-99C1-EBD7B59EB65E}"/>
               </a:ext>
             </a:extLst>
           </p:cNvPr>
@@ -3403,7 +3403,7 @@
           <p:cNvPr id="4" name="s11-footer">
             <a:extLst xmlns:a="http://schemas.openxmlformats.org/drawingml/2006/main">
               <a:ext uri="{FF2B5EF4-FFF2-40B4-BE49-F238E27FC236}">
-                <a16:creationId xmlns:a16="http://schemas.microsoft.com/office/drawing/2014/main" id="{7FE6FBBE-7B59-43E2-888E-21E96EC0DF5D}"/>
+                <a16:creationId xmlns:a16="http://schemas.microsoft.com/office/drawing/2014/main" id="{2C03998F-C0AB-412D-BFE2-FB239D3AEA5A}"/>
               </a:ext>
             </a:extLst>
           </p:cNvPr>
@@ -3434,7 +3434,7 @@
           <p:cNvPr id="5" name="s11-identity">
             <a:extLst xmlns:a="http://schemas.openxmlformats.org/drawingml/2006/main">
               <a:ext uri="{FF2B5EF4-FFF2-40B4-BE49-F238E27FC236}">
-                <a16:creationId xmlns:a16="http://schemas.microsoft.com/office/drawing/2014/main" id="{B6F2C647-914D-4EEE-8B28-9767407EE97F}"/>
+                <a16:creationId xmlns:a16="http://schemas.microsoft.com/office/drawing/2014/main" id="{9B2E6327-F60B-4FE0-BC29-5377C9D9A2CE}"/>
               </a:ext>
             </a:extLst>
           </p:cNvPr>
@@ -3492,7 +3492,7 @@
           <p:cNvPr id="6" name="recap-circle-0">
             <a:extLst xmlns:a="http://schemas.openxmlformats.org/drawingml/2006/main">
               <a:ext uri="{FF2B5EF4-FFF2-40B4-BE49-F238E27FC236}">
-                <a16:creationId xmlns:a16="http://schemas.microsoft.com/office/drawing/2014/main" id="{CC932DDE-AAFC-40AF-B329-8FA4A03DC713}"/>
+                <a16:creationId xmlns:a16="http://schemas.microsoft.com/office/drawing/2014/main" id="{9EA924BC-708B-4E76-A271-40E5B86B0882}"/>
               </a:ext>
             </a:extLst>
           </p:cNvPr>
@@ -3525,7 +3525,7 @@
           <p:cNvPr id="7" name="recap-number-0">
             <a:extLst xmlns:a="http://schemas.openxmlformats.org/drawingml/2006/main">
               <a:ext uri="{FF2B5EF4-FFF2-40B4-BE49-F238E27FC236}">
-                <a16:creationId xmlns:a16="http://schemas.microsoft.com/office/drawing/2014/main" id="{2736BCB5-0572-42D8-9E81-3406A0308724}"/>
+                <a16:creationId xmlns:a16="http://schemas.microsoft.com/office/drawing/2014/main" id="{EC99E122-000C-4ABE-89DE-67C7B3B6ABD3}"/>
               </a:ext>
             </a:extLst>
           </p:cNvPr>
@@ -3583,7 +3583,7 @@
           <p:cNvPr id="8" name="recap-item-0">
             <a:extLst xmlns:a="http://schemas.openxmlformats.org/drawingml/2006/main">
               <a:ext uri="{FF2B5EF4-FFF2-40B4-BE49-F238E27FC236}">
-                <a16:creationId xmlns:a16="http://schemas.microsoft.com/office/drawing/2014/main" id="{16CFB51A-5C6B-407B-865C-DBF81CF2DA9C}"/>
+                <a16:creationId xmlns:a16="http://schemas.microsoft.com/office/drawing/2014/main" id="{2A5C84C4-A666-43F7-9797-D863DC0F6580}"/>
               </a:ext>
             </a:extLst>
           </p:cNvPr>
@@ -3647,7 +3647,7 @@
           <p:cNvPr id="9" name="recap-connector-0">
             <a:extLst xmlns:a="http://schemas.openxmlformats.org/drawingml/2006/main">
               <a:ext uri="{FF2B5EF4-FFF2-40B4-BE49-F238E27FC236}">
-                <a16:creationId xmlns:a16="http://schemas.microsoft.com/office/drawing/2014/main" id="{F02C5E91-3B41-47EA-AA50-0D0C3490770D}"/>
+                <a16:creationId xmlns:a16="http://schemas.microsoft.com/office/drawing/2014/main" id="{D1FBA861-F3E5-40BE-ABF1-CA200A4A00C6}"/>
               </a:ext>
             </a:extLst>
           </p:cNvPr>
@@ -3678,7 +3678,7 @@
           <p:cNvPr id="10" name="recap-circle-1">
             <a:extLst xmlns:a="http://schemas.openxmlformats.org/drawingml/2006/main">
               <a:ext uri="{FF2B5EF4-FFF2-40B4-BE49-F238E27FC236}">
-                <a16:creationId xmlns:a16="http://schemas.microsoft.com/office/drawing/2014/main" id="{2F4E94C9-6F05-4F47-A95E-1254EB035D53}"/>
+                <a16:creationId xmlns:a16="http://schemas.microsoft.com/office/drawing/2014/main" id="{D8F8304B-4DFF-4131-A9DC-A740A11174EF}"/>
               </a:ext>
             </a:extLst>
           </p:cNvPr>
@@ -3711,7 +3711,7 @@
           <p:cNvPr id="11" name="recap-number-1">
             <a:extLst xmlns:a="http://schemas.openxmlformats.org/drawingml/2006/main">
               <a:ext uri="{FF2B5EF4-FFF2-40B4-BE49-F238E27FC236}">
-                <a16:creationId xmlns:a16="http://schemas.microsoft.com/office/drawing/2014/main" id="{E060EDBF-ED4A-427F-80F7-EFA5AA7F3073}"/>
+                <a16:creationId xmlns:a16="http://schemas.microsoft.com/office/drawing/2014/main" id="{05B0F69E-4E39-4649-AE56-4E5E3FB39E93}"/>
               </a:ext>
             </a:extLst>
           </p:cNvPr>
@@ -3769,7 +3769,7 @@
           <p:cNvPr id="12" name="recap-item-1">
             <a:extLst xmlns:a="http://schemas.openxmlformats.org/drawingml/2006/main">
               <a:ext uri="{FF2B5EF4-FFF2-40B4-BE49-F238E27FC236}">
-                <a16:creationId xmlns:a16="http://schemas.microsoft.com/office/drawing/2014/main" id="{58038E18-2DE8-44A9-B777-A6E7D20A1F12}"/>
+                <a16:creationId xmlns:a16="http://schemas.microsoft.com/office/drawing/2014/main" id="{38B82F28-FE78-4E2C-B078-E1148228E2AA}"/>
               </a:ext>
             </a:extLst>
           </p:cNvPr>
@@ -3833,7 +3833,7 @@
           <p:cNvPr id="13" name="recap-connector-1">
             <a:extLst xmlns:a="http://schemas.openxmlformats.org/drawingml/2006/main">
               <a:ext uri="{FF2B5EF4-FFF2-40B4-BE49-F238E27FC236}">
-                <a16:creationId xmlns:a16="http://schemas.microsoft.com/office/drawing/2014/main" id="{ACF9583B-1869-4214-832C-1766372C89AB}"/>
+                <a16:creationId xmlns:a16="http://schemas.microsoft.com/office/drawing/2014/main" id="{A8D8A815-E6BD-49B6-A532-19349303F02E}"/>
               </a:ext>
             </a:extLst>
           </p:cNvPr>
@@ -3864,7 +3864,7 @@
           <p:cNvPr id="14" name="recap-circle-2">
             <a:extLst xmlns:a="http://schemas.openxmlformats.org/drawingml/2006/main">
               <a:ext uri="{FF2B5EF4-FFF2-40B4-BE49-F238E27FC236}">
-                <a16:creationId xmlns:a16="http://schemas.microsoft.com/office/drawing/2014/main" id="{11D52041-AE8D-42A4-AF3F-427554FF2365}"/>
+                <a16:creationId xmlns:a16="http://schemas.microsoft.com/office/drawing/2014/main" id="{893556A8-B5DC-4ECC-9CAB-447A00B600BA}"/>
               </a:ext>
             </a:extLst>
           </p:cNvPr>
@@ -3897,7 +3897,7 @@
           <p:cNvPr id="15" name="recap-number-2">
             <a:extLst xmlns:a="http://schemas.openxmlformats.org/drawingml/2006/main">
               <a:ext uri="{FF2B5EF4-FFF2-40B4-BE49-F238E27FC236}">
-                <a16:creationId xmlns:a16="http://schemas.microsoft.com/office/drawing/2014/main" id="{7CB75F6B-0986-43CA-A400-213ECF03A0E9}"/>
+                <a16:creationId xmlns:a16="http://schemas.microsoft.com/office/drawing/2014/main" id="{A0A19AAF-92C1-44F9-8083-30655153A4E8}"/>
               </a:ext>
             </a:extLst>
           </p:cNvPr>
@@ -3955,7 +3955,7 @@
           <p:cNvPr id="16" name="recap-item-2">
             <a:extLst xmlns:a="http://schemas.openxmlformats.org/drawingml/2006/main">
               <a:ext uri="{FF2B5EF4-FFF2-40B4-BE49-F238E27FC236}">
-                <a16:creationId xmlns:a16="http://schemas.microsoft.com/office/drawing/2014/main" id="{E848BC4D-6C48-4F1A-A88D-8C37A7D41246}"/>
+                <a16:creationId xmlns:a16="http://schemas.microsoft.com/office/drawing/2014/main" id="{3CCCFDDE-FC59-456D-A37C-93E011987857}"/>
               </a:ext>
             </a:extLst>
           </p:cNvPr>
@@ -4017,7 +4017,7 @@
     </p:spTree>
     <p:extLst>
       <p:ext uri="{BB962C8B-B14F-4D97-AF65-F5344CB8AC3E}">
-        <p14:creationId xmlns:p14="http://schemas.microsoft.com/office/powerpoint/2010/main" val="378573017"/>
+        <p14:creationId xmlns:p14="http://schemas.microsoft.com/office/powerpoint/2010/main" val="1631535979"/>
       </p:ext>
     </p:extLst>
   </p:cSld>
@@ -4048,7 +4048,7 @@
           <p:cNvPr id="1" name="s12-rule">
             <a:extLst xmlns:a="http://schemas.openxmlformats.org/drawingml/2006/main">
               <a:ext uri="{FF2B5EF4-FFF2-40B4-BE49-F238E27FC236}">
-                <a16:creationId xmlns:a16="http://schemas.microsoft.com/office/drawing/2014/main" id="{E62E684C-BD31-4555-B5E4-BCC29A66904C}"/>
+                <a16:creationId xmlns:a16="http://schemas.microsoft.com/office/drawing/2014/main" id="{752D1AAB-A940-40B1-A33B-E080F378AA59}"/>
               </a:ext>
             </a:extLst>
           </p:cNvPr>
@@ -4081,7 +4081,7 @@
           <p:cNvPr id="2" name="s12-eyebrow">
             <a:extLst xmlns:a="http://schemas.openxmlformats.org/drawingml/2006/main">
               <a:ext uri="{FF2B5EF4-FFF2-40B4-BE49-F238E27FC236}">
-                <a16:creationId xmlns:a16="http://schemas.microsoft.com/office/drawing/2014/main" id="{6B64CCCF-B15F-4C7F-95A1-82B27D6DF0C9}"/>
+                <a16:creationId xmlns:a16="http://schemas.microsoft.com/office/drawing/2014/main" id="{A6CB81FE-BAD1-4A10-8B5B-3C082C208CD2}"/>
               </a:ext>
             </a:extLst>
           </p:cNvPr>
@@ -4139,7 +4139,7 @@
           <p:cNvPr id="3" name="s12-title">
             <a:extLst xmlns:a="http://schemas.openxmlformats.org/drawingml/2006/main">
               <a:ext uri="{FF2B5EF4-FFF2-40B4-BE49-F238E27FC236}">
-                <a16:creationId xmlns:a16="http://schemas.microsoft.com/office/drawing/2014/main" id="{9C92DBB8-0CAD-46F7-9FF6-5A4CC7F1B3F0}"/>
+                <a16:creationId xmlns:a16="http://schemas.microsoft.com/office/drawing/2014/main" id="{3E95C8B9-B11E-40ED-8190-9230DF9E54E3}"/>
               </a:ext>
             </a:extLst>
           </p:cNvPr>
@@ -4197,7 +4197,7 @@
           <p:cNvPr id="4" name="s12-footer">
             <a:extLst xmlns:a="http://schemas.openxmlformats.org/drawingml/2006/main">
               <a:ext uri="{FF2B5EF4-FFF2-40B4-BE49-F238E27FC236}">
-                <a16:creationId xmlns:a16="http://schemas.microsoft.com/office/drawing/2014/main" id="{A2020913-1226-4932-AAF1-28F265A54A14}"/>
+                <a16:creationId xmlns:a16="http://schemas.microsoft.com/office/drawing/2014/main" id="{737CDB3F-2B38-44B7-9896-D681DC2C9750}"/>
               </a:ext>
             </a:extLst>
           </p:cNvPr>
@@ -4228,7 +4228,7 @@
           <p:cNvPr id="5" name="s12-identity">
             <a:extLst xmlns:a="http://schemas.openxmlformats.org/drawingml/2006/main">
               <a:ext uri="{FF2B5EF4-FFF2-40B4-BE49-F238E27FC236}">
-                <a16:creationId xmlns:a16="http://schemas.microsoft.com/office/drawing/2014/main" id="{79F7E512-1CE9-4407-8399-812C3F81016E}"/>
+                <a16:creationId xmlns:a16="http://schemas.microsoft.com/office/drawing/2014/main" id="{F2DEE8F3-0DD9-4724-8893-0D69B4FE63E0}"/>
               </a:ext>
             </a:extLst>
           </p:cNvPr>
@@ -4286,7 +4286,7 @@
           <p:cNvPr id="6" name="source-0">
             <a:extLst xmlns:a="http://schemas.openxmlformats.org/drawingml/2006/main">
               <a:ext uri="{FF2B5EF4-FFF2-40B4-BE49-F238E27FC236}">
-                <a16:creationId xmlns:a16="http://schemas.microsoft.com/office/drawing/2014/main" id="{23AE1227-E99C-47E5-9132-9795FDB9CAFF}"/>
+                <a16:creationId xmlns:a16="http://schemas.microsoft.com/office/drawing/2014/main" id="{E2B1DEAF-FE25-46C9-90A4-3C5CB766E4A6}"/>
               </a:ext>
             </a:extLst>
           </p:cNvPr>
@@ -4340,7 +4340,7 @@
                 <a:ea typeface="PingFang SC"/>
                 <a:cs typeface="PingFang SC"/>
               </a:rPr>
-              <a:t>01  团队既有课程资料经重新组织、改写与原创视觉重制</a:t>
+              <a:t>01  Computing Machinery and Intelligence：图灵 1950 年原文；阅读时注意模仿游戏与“证明机器拥有意识”不是同一命题</a:t>
             </a:r>
           </a:p>
         </p:txBody>
@@ -4350,7 +4350,7 @@
           <p:cNvPr id="7" name="source-1">
             <a:extLst xmlns:a="http://schemas.openxmlformats.org/drawingml/2006/main">
               <a:ext uri="{FF2B5EF4-FFF2-40B4-BE49-F238E27FC236}">
-                <a16:creationId xmlns:a16="http://schemas.microsoft.com/office/drawing/2014/main" id="{648FB366-00EC-4625-9A38-D328C8E8B858}"/>
+                <a16:creationId xmlns:a16="http://schemas.microsoft.com/office/drawing/2014/main" id="{F4D230A0-DF4C-41CA-8C97-6299EF66303B}"/>
               </a:ext>
             </a:extLst>
           </p:cNvPr>
@@ -4404,81 +4404,17 @@
                 <a:ea typeface="PingFang SC"/>
                 <a:cs typeface="PingFang SC"/>
               </a:rPr>
-              <a:t>02  Computing Machinery and Intelligence：图灵 1950 年原文；阅读时注意模仿游戏与“证明机器拥有意识”不是同一命题</a:t>
-            </a:r>
-          </a:p>
-        </p:txBody>
-      </p:sp>
-      <p:sp>
-        <p:nvSpPr>
-          <p:cNvPr id="8" name="source-2">
-            <a:extLst xmlns:a="http://schemas.openxmlformats.org/drawingml/2006/main">
-              <a:ext uri="{FF2B5EF4-FFF2-40B4-BE49-F238E27FC236}">
-                <a16:creationId xmlns:a16="http://schemas.microsoft.com/office/drawing/2014/main" id="{BB60A355-C4DA-4FDC-A208-E47E0334360C}"/>
-              </a:ext>
-            </a:extLst>
-          </p:cNvPr>
-          <p:cNvSpPr>
-            <a:spLocks xmlns:a="http://schemas.openxmlformats.org/drawingml/2006/main" noGrp="1"/>
-          </p:cNvSpPr>
-          <p:nvPr/>
-        </p:nvSpPr>
-        <p:spPr>
-          <a:xfrm xmlns:a="http://schemas.openxmlformats.org/drawingml/2006/main">
-            <a:off x="914400" y="3314700"/>
-            <a:ext cx="10363200" cy="533400"/>
-          </a:xfrm>
-          <a:prstGeom xmlns:a="http://schemas.openxmlformats.org/drawingml/2006/main" prst="roundRect">
-            <a:avLst>
-              <a:gd name="adj" fmla="val 21429"/>
-            </a:avLst>
-          </a:prstGeom>
-          <a:solidFill xmlns:a="http://schemas.openxmlformats.org/drawingml/2006/main">
-            <a:srgbClr val="FFFFFF"/>
-          </a:solidFill>
-          <a:ln xmlns:a="http://schemas.openxmlformats.org/drawingml/2006/main" w="9525">
-            <a:solidFill>
-              <a:srgbClr val="D8E0E8"/>
-            </a:solidFill>
-            <a:prstDash val="solid"/>
-          </a:ln>
-        </p:spPr>
-        <p:txBody>
-          <a:bodyPr xmlns:a="http://schemas.openxmlformats.org/drawingml/2006/main" lIns="152400" tIns="133350" rIns="152400" bIns="133350" anchor="ctr">
-            <a:normAutofit fontScale="87377"/>
-          </a:bodyPr>
-          <a:lstStyle xmlns:a="http://schemas.openxmlformats.org/drawingml/2006/main"/>
-          <a:p xmlns:a="http://schemas.openxmlformats.org/drawingml/2006/main">
-            <a:pPr algn="l">
-              <a:defRPr sz="1500" b="0">
-                <a:solidFill>
-                  <a:srgbClr val="10233F"/>
-                </a:solidFill>
-                <a:latin typeface="PingFang SC"/>
-                <a:ea typeface="PingFang SC"/>
-                <a:cs typeface="PingFang SC"/>
-              </a:defRPr>
-            </a:pPr>
-            <a:r>
-              <a:rPr sz="1500" b="0">
-                <a:solidFill>
-                  <a:srgbClr val="10233F"/>
-                </a:solidFill>
-                <a:latin typeface="PingFang SC"/>
-                <a:ea typeface="PingFang SC"/>
-                <a:cs typeface="PingFang SC"/>
-              </a:rPr>
-              <a:t>03  Large Language Models Pass the Turing Test：上述 73% 结论的原始研究；阅读时要同时关注实验条件与结论边界</a:t>
-            </a:r>
-          </a:p>
-        </p:txBody>
-      </p:sp>
-      <p:sp>
-        <p:nvSpPr>
-          <p:cNvPr id="9" name="s12-takeaway-rule">
-            <a:extLst xmlns:a="http://schemas.openxmlformats.org/drawingml/2006/main">
-              <a:ext uri="{FF2B5EF4-FFF2-40B4-BE49-F238E27FC236}">
-                <a16:creationId xmlns:a16="http://schemas.microsoft.com/office/drawing/2014/main" id="{759D9772-E04B-45B8-AA61-C3C164E3903F}"/>
+              <a:t>02  Large Language Models Pass the Turing Test：上述 73% 结论的原始研究；阅读时要同时关注实验条件与结论边界</a:t>
+            </a:r>
+          </a:p>
+        </p:txBody>
+      </p:sp>
+      <p:sp>
+        <p:nvSpPr>
+          <p:cNvPr id="8" name="s12-takeaway-rule">
+            <a:extLst xmlns:a="http://schemas.openxmlformats.org/drawingml/2006/main">
+              <a:ext uri="{FF2B5EF4-FFF2-40B4-BE49-F238E27FC236}">
+                <a16:creationId xmlns:a16="http://schemas.microsoft.com/office/drawing/2014/main" id="{C012BF28-9300-4D59-8436-6D9412C9F539}"/>
               </a:ext>
             </a:extLst>
           </p:cNvPr>
@@ -4508,10 +4444,10 @@
       </p:sp>
       <p:sp>
         <p:nvSpPr>
-          <p:cNvPr id="10" name="s12-takeaway">
-            <a:extLst xmlns:a="http://schemas.openxmlformats.org/drawingml/2006/main">
-              <a:ext uri="{FF2B5EF4-FFF2-40B4-BE49-F238E27FC236}">
-                <a16:creationId xmlns:a16="http://schemas.microsoft.com/office/drawing/2014/main" id="{54A2F267-4FE0-4E17-8452-8E2C7FE5DD42}"/>
+          <p:cNvPr id="9" name="s12-takeaway">
+            <a:extLst xmlns:a="http://schemas.openxmlformats.org/drawingml/2006/main">
+              <a:ext uri="{FF2B5EF4-FFF2-40B4-BE49-F238E27FC236}">
+                <a16:creationId xmlns:a16="http://schemas.microsoft.com/office/drawing/2014/main" id="{7316324A-E6F6-4594-8D4C-6F872E6A3AD5}"/>
               </a:ext>
             </a:extLst>
           </p:cNvPr>
@@ -4536,7 +4472,7 @@
         </p:spPr>
         <p:txBody>
           <a:bodyPr xmlns:a="http://schemas.openxmlformats.org/drawingml/2006/main" lIns="0" tIns="0" rIns="0" bIns="0" anchor="ctr">
-            <a:normAutofit fontScale="95911"/>
+            <a:normAutofit fontScale="100000"/>
           </a:bodyPr>
           <a:lstStyle xmlns:a="http://schemas.openxmlformats.org/drawingml/2006/main"/>
           <a:p xmlns:a="http://schemas.openxmlformats.org/drawingml/2006/main">
@@ -4559,7 +4495,7 @@
                 <a:ea typeface="PingFang SC"/>
                 <a:cs typeface="PingFang SC"/>
               </a:rPr>
-              <a:t>课程精编页用于讲授主线；播放器中的“原课件”模式保留团队 PowerPoint 精选页、真实图片和可播放视频。</a:t>
+              <a:t>课程正文与幻灯片共享同一知识主线，图片和视频用于帮助理解本节概念与案例。</a:t>
             </a:r>
           </a:p>
         </p:txBody>
@@ -4567,7 +4503,7 @@
     </p:spTree>
     <p:extLst>
       <p:ext uri="{BB962C8B-B14F-4D97-AF65-F5344CB8AC3E}">
-        <p14:creationId xmlns:p14="http://schemas.microsoft.com/office/powerpoint/2010/main" val="777751451"/>
+        <p14:creationId xmlns:p14="http://schemas.microsoft.com/office/powerpoint/2010/main" val="316798417"/>
       </p:ext>
     </p:extLst>
   </p:cSld>
@@ -4598,7 +4534,7 @@
           <p:cNvPr id="1" name="s2-rule">
             <a:extLst xmlns:a="http://schemas.openxmlformats.org/drawingml/2006/main">
               <a:ext uri="{FF2B5EF4-FFF2-40B4-BE49-F238E27FC236}">
-                <a16:creationId xmlns:a16="http://schemas.microsoft.com/office/drawing/2014/main" id="{5A45853A-A43E-4EA0-A840-E0DA7DBAF3E3}"/>
+                <a16:creationId xmlns:a16="http://schemas.microsoft.com/office/drawing/2014/main" id="{BE4D8EE4-E3BF-4D1D-866A-B939D474049C}"/>
               </a:ext>
             </a:extLst>
           </p:cNvPr>
@@ -4631,7 +4567,7 @@
           <p:cNvPr id="2" name="s2-eyebrow">
             <a:extLst xmlns:a="http://schemas.openxmlformats.org/drawingml/2006/main">
               <a:ext uri="{FF2B5EF4-FFF2-40B4-BE49-F238E27FC236}">
-                <a16:creationId xmlns:a16="http://schemas.microsoft.com/office/drawing/2014/main" id="{B1A7C543-9443-401E-B728-132D59FEA50A}"/>
+                <a16:creationId xmlns:a16="http://schemas.microsoft.com/office/drawing/2014/main" id="{D4252006-AEF2-4275-A501-5B0D9516F71D}"/>
               </a:ext>
             </a:extLst>
           </p:cNvPr>
@@ -4689,7 +4625,7 @@
           <p:cNvPr id="3" name="s2-title">
             <a:extLst xmlns:a="http://schemas.openxmlformats.org/drawingml/2006/main">
               <a:ext uri="{FF2B5EF4-FFF2-40B4-BE49-F238E27FC236}">
-                <a16:creationId xmlns:a16="http://schemas.microsoft.com/office/drawing/2014/main" id="{6FD6F77E-2D63-4C9E-9838-0D7A41AE8FFD}"/>
+                <a16:creationId xmlns:a16="http://schemas.microsoft.com/office/drawing/2014/main" id="{464E876C-B2F7-45EA-878C-4F382018D90C}"/>
               </a:ext>
             </a:extLst>
           </p:cNvPr>
@@ -4747,7 +4683,7 @@
           <p:cNvPr id="4" name="s2-footer">
             <a:extLst xmlns:a="http://schemas.openxmlformats.org/drawingml/2006/main">
               <a:ext uri="{FF2B5EF4-FFF2-40B4-BE49-F238E27FC236}">
-                <a16:creationId xmlns:a16="http://schemas.microsoft.com/office/drawing/2014/main" id="{19D589F8-99BB-43A0-9627-197C5CF50BA1}"/>
+                <a16:creationId xmlns:a16="http://schemas.microsoft.com/office/drawing/2014/main" id="{B245615D-7BB4-447D-BA34-1BA6A70D4401}"/>
               </a:ext>
             </a:extLst>
           </p:cNvPr>
@@ -4778,7 +4714,7 @@
           <p:cNvPr id="5" name="s2-identity">
             <a:extLst xmlns:a="http://schemas.openxmlformats.org/drawingml/2006/main">
               <a:ext uri="{FF2B5EF4-FFF2-40B4-BE49-F238E27FC236}">
-                <a16:creationId xmlns:a16="http://schemas.microsoft.com/office/drawing/2014/main" id="{F5286B1E-E72A-4089-B101-5903422D31C8}"/>
+                <a16:creationId xmlns:a16="http://schemas.microsoft.com/office/drawing/2014/main" id="{9BE52E93-4374-457F-9C49-A755872FC936}"/>
               </a:ext>
             </a:extLst>
           </p:cNvPr>
@@ -4836,7 +4772,7 @@
           <p:cNvPr id="6" name="objective-1">
             <a:extLst xmlns:a="http://schemas.openxmlformats.org/drawingml/2006/main">
               <a:ext uri="{FF2B5EF4-FFF2-40B4-BE49-F238E27FC236}">
-                <a16:creationId xmlns:a16="http://schemas.microsoft.com/office/drawing/2014/main" id="{35E5DF61-8387-4DD4-A8C2-513A6129C0CB}"/>
+                <a16:creationId xmlns:a16="http://schemas.microsoft.com/office/drawing/2014/main" id="{4141ED81-8548-4E09-A2D1-B3BEFBE1D7CF}"/>
               </a:ext>
             </a:extLst>
           </p:cNvPr>
@@ -4923,7 +4859,7 @@
           <p:cNvPr id="7" name="objective-2">
             <a:extLst xmlns:a="http://schemas.openxmlformats.org/drawingml/2006/main">
               <a:ext uri="{FF2B5EF4-FFF2-40B4-BE49-F238E27FC236}">
-                <a16:creationId xmlns:a16="http://schemas.microsoft.com/office/drawing/2014/main" id="{DA49D5C9-AEAB-4619-8967-071830A617A4}"/>
+                <a16:creationId xmlns:a16="http://schemas.microsoft.com/office/drawing/2014/main" id="{A0F2E142-94E2-43D1-9271-8FD2FF47C47E}"/>
               </a:ext>
             </a:extLst>
           </p:cNvPr>
@@ -5010,7 +4946,7 @@
           <p:cNvPr id="8" name="objective-3">
             <a:extLst xmlns:a="http://schemas.openxmlformats.org/drawingml/2006/main">
               <a:ext uri="{FF2B5EF4-FFF2-40B4-BE49-F238E27FC236}">
-                <a16:creationId xmlns:a16="http://schemas.microsoft.com/office/drawing/2014/main" id="{BA09B36E-0A32-41A6-B8C6-C6F3AC21E9A7}"/>
+                <a16:creationId xmlns:a16="http://schemas.microsoft.com/office/drawing/2014/main" id="{C7485B94-C22F-48D9-A83A-633AE0F04D3F}"/>
               </a:ext>
             </a:extLst>
           </p:cNvPr>
@@ -5095,7 +5031,7 @@
     </p:spTree>
     <p:extLst>
       <p:ext uri="{BB962C8B-B14F-4D97-AF65-F5344CB8AC3E}">
-        <p14:creationId xmlns:p14="http://schemas.microsoft.com/office/powerpoint/2010/main" val="1751892151"/>
+        <p14:creationId xmlns:p14="http://schemas.microsoft.com/office/powerpoint/2010/main" val="1108044488"/>
       </p:ext>
     </p:extLst>
   </p:cSld>
@@ -5126,7 +5062,7 @@
           <p:cNvPr id="1" name="s3-rule">
             <a:extLst xmlns:a="http://schemas.openxmlformats.org/drawingml/2006/main">
               <a:ext uri="{FF2B5EF4-FFF2-40B4-BE49-F238E27FC236}">
-                <a16:creationId xmlns:a16="http://schemas.microsoft.com/office/drawing/2014/main" id="{DFDB7F19-7224-4E45-9257-DED09F5C7F15}"/>
+                <a16:creationId xmlns:a16="http://schemas.microsoft.com/office/drawing/2014/main" id="{B5E96F4C-02E0-495F-B4E3-8ECE35087A89}"/>
               </a:ext>
             </a:extLst>
           </p:cNvPr>
@@ -5159,7 +5095,7 @@
           <p:cNvPr id="2" name="s3-eyebrow">
             <a:extLst xmlns:a="http://schemas.openxmlformats.org/drawingml/2006/main">
               <a:ext uri="{FF2B5EF4-FFF2-40B4-BE49-F238E27FC236}">
-                <a16:creationId xmlns:a16="http://schemas.microsoft.com/office/drawing/2014/main" id="{541C3FCC-C10A-41E3-98C8-543F520A645A}"/>
+                <a16:creationId xmlns:a16="http://schemas.microsoft.com/office/drawing/2014/main" id="{C59DDD09-C79B-485D-963F-35A10964B960}"/>
               </a:ext>
             </a:extLst>
           </p:cNvPr>
@@ -5217,7 +5153,7 @@
           <p:cNvPr id="3" name="s3-title">
             <a:extLst xmlns:a="http://schemas.openxmlformats.org/drawingml/2006/main">
               <a:ext uri="{FF2B5EF4-FFF2-40B4-BE49-F238E27FC236}">
-                <a16:creationId xmlns:a16="http://schemas.microsoft.com/office/drawing/2014/main" id="{F6B08290-8667-4638-92D9-6740166EBF80}"/>
+                <a16:creationId xmlns:a16="http://schemas.microsoft.com/office/drawing/2014/main" id="{492B1251-8EF4-48C4-8BA7-350544F29DFA}"/>
               </a:ext>
             </a:extLst>
           </p:cNvPr>
@@ -5275,7 +5211,7 @@
           <p:cNvPr id="4" name="s3-footer">
             <a:extLst xmlns:a="http://schemas.openxmlformats.org/drawingml/2006/main">
               <a:ext uri="{FF2B5EF4-FFF2-40B4-BE49-F238E27FC236}">
-                <a16:creationId xmlns:a16="http://schemas.microsoft.com/office/drawing/2014/main" id="{547A932A-0D88-4532-BC87-A3EA5A383BAA}"/>
+                <a16:creationId xmlns:a16="http://schemas.microsoft.com/office/drawing/2014/main" id="{89A7444C-093B-4622-8D1D-9A42081C82E4}"/>
               </a:ext>
             </a:extLst>
           </p:cNvPr>
@@ -5306,7 +5242,7 @@
           <p:cNvPr id="5" name="s3-identity">
             <a:extLst xmlns:a="http://schemas.openxmlformats.org/drawingml/2006/main">
               <a:ext uri="{FF2B5EF4-FFF2-40B4-BE49-F238E27FC236}">
-                <a16:creationId xmlns:a16="http://schemas.microsoft.com/office/drawing/2014/main" id="{A7B57FC5-0AC2-4E60-94BF-2141DBBF4AEF}"/>
+                <a16:creationId xmlns:a16="http://schemas.microsoft.com/office/drawing/2014/main" id="{7EF54468-44E9-48DE-9E59-C5F8E3FB77EE}"/>
               </a:ext>
             </a:extLst>
           </p:cNvPr>
@@ -5364,7 +5300,7 @@
           <p:cNvPr id="6" name="core-no-0">
             <a:extLst xmlns:a="http://schemas.openxmlformats.org/drawingml/2006/main">
               <a:ext uri="{FF2B5EF4-FFF2-40B4-BE49-F238E27FC236}">
-                <a16:creationId xmlns:a16="http://schemas.microsoft.com/office/drawing/2014/main" id="{400D03AF-A88B-48B7-902F-167179969F8B}"/>
+                <a16:creationId xmlns:a16="http://schemas.microsoft.com/office/drawing/2014/main" id="{8F4F1866-DE74-4391-A035-FE6FA2A41E0D}"/>
               </a:ext>
             </a:extLst>
           </p:cNvPr>
@@ -5422,7 +5358,7 @@
           <p:cNvPr id="7" name="core-label-0">
             <a:extLst xmlns:a="http://schemas.openxmlformats.org/drawingml/2006/main">
               <a:ext uri="{FF2B5EF4-FFF2-40B4-BE49-F238E27FC236}">
-                <a16:creationId xmlns:a16="http://schemas.microsoft.com/office/drawing/2014/main" id="{A236839A-292E-4076-8A1A-4582D5F7AB43}"/>
+                <a16:creationId xmlns:a16="http://schemas.microsoft.com/office/drawing/2014/main" id="{48D4FA7D-69D4-4C1F-8D8B-EB302EDBD992}"/>
               </a:ext>
             </a:extLst>
           </p:cNvPr>
@@ -5480,7 +5416,7 @@
           <p:cNvPr id="8" name="core-body-0">
             <a:extLst xmlns:a="http://schemas.openxmlformats.org/drawingml/2006/main">
               <a:ext uri="{FF2B5EF4-FFF2-40B4-BE49-F238E27FC236}">
-                <a16:creationId xmlns:a16="http://schemas.microsoft.com/office/drawing/2014/main" id="{BC53BF5C-F606-4484-B252-7878934700E9}"/>
+                <a16:creationId xmlns:a16="http://schemas.microsoft.com/office/drawing/2014/main" id="{28A871E1-7E76-47E6-BBEC-8C01BA746A55}"/>
               </a:ext>
             </a:extLst>
           </p:cNvPr>
@@ -5544,7 +5480,7 @@
           <p:cNvPr id="9" name="core-no-1">
             <a:extLst xmlns:a="http://schemas.openxmlformats.org/drawingml/2006/main">
               <a:ext uri="{FF2B5EF4-FFF2-40B4-BE49-F238E27FC236}">
-                <a16:creationId xmlns:a16="http://schemas.microsoft.com/office/drawing/2014/main" id="{17E189FA-64A6-4781-B7C0-E363B811E1E9}"/>
+                <a16:creationId xmlns:a16="http://schemas.microsoft.com/office/drawing/2014/main" id="{470ED643-D7B1-48BB-9B34-F19BE5BA1383}"/>
               </a:ext>
             </a:extLst>
           </p:cNvPr>
@@ -5602,7 +5538,7 @@
           <p:cNvPr id="10" name="core-body-1">
             <a:extLst xmlns:a="http://schemas.openxmlformats.org/drawingml/2006/main">
               <a:ext uri="{FF2B5EF4-FFF2-40B4-BE49-F238E27FC236}">
-                <a16:creationId xmlns:a16="http://schemas.microsoft.com/office/drawing/2014/main" id="{DB72EC0E-CDA2-4F81-B2BB-440391C4E188}"/>
+                <a16:creationId xmlns:a16="http://schemas.microsoft.com/office/drawing/2014/main" id="{DEAA01D9-FFC7-4109-81EE-67BCE350D0C2}"/>
               </a:ext>
             </a:extLst>
           </p:cNvPr>
@@ -5666,7 +5602,7 @@
           <p:cNvPr id="11" name="core-no-2">
             <a:extLst xmlns:a="http://schemas.openxmlformats.org/drawingml/2006/main">
               <a:ext uri="{FF2B5EF4-FFF2-40B4-BE49-F238E27FC236}">
-                <a16:creationId xmlns:a16="http://schemas.microsoft.com/office/drawing/2014/main" id="{EC5F8B13-BC41-4432-8B39-2C39426F7F2B}"/>
+                <a16:creationId xmlns:a16="http://schemas.microsoft.com/office/drawing/2014/main" id="{769BB2AC-CE02-4D11-9738-A13EA59B081B}"/>
               </a:ext>
             </a:extLst>
           </p:cNvPr>
@@ -5724,7 +5660,7 @@
           <p:cNvPr id="12" name="core-body-2">
             <a:extLst xmlns:a="http://schemas.openxmlformats.org/drawingml/2006/main">
               <a:ext uri="{FF2B5EF4-FFF2-40B4-BE49-F238E27FC236}">
-                <a16:creationId xmlns:a16="http://schemas.microsoft.com/office/drawing/2014/main" id="{D7012697-3B51-4A9B-8E38-2182BC8200F8}"/>
+                <a16:creationId xmlns:a16="http://schemas.microsoft.com/office/drawing/2014/main" id="{E3FE432B-A2DC-4422-A8B5-D30CB2DACE7F}"/>
               </a:ext>
             </a:extLst>
           </p:cNvPr>
@@ -5788,7 +5724,7 @@
           <p:cNvPr id="13" name="s3-takeaway-rule">
             <a:extLst xmlns:a="http://schemas.openxmlformats.org/drawingml/2006/main">
               <a:ext uri="{FF2B5EF4-FFF2-40B4-BE49-F238E27FC236}">
-                <a16:creationId xmlns:a16="http://schemas.microsoft.com/office/drawing/2014/main" id="{C9F56CA2-DAA7-480A-A690-9ADDFF366D66}"/>
+                <a16:creationId xmlns:a16="http://schemas.microsoft.com/office/drawing/2014/main" id="{43CA4FB8-2710-4F64-BF22-D4500183F38F}"/>
               </a:ext>
             </a:extLst>
           </p:cNvPr>
@@ -5821,7 +5757,7 @@
           <p:cNvPr id="14" name="s3-takeaway">
             <a:extLst xmlns:a="http://schemas.openxmlformats.org/drawingml/2006/main">
               <a:ext uri="{FF2B5EF4-FFF2-40B4-BE49-F238E27FC236}">
-                <a16:creationId xmlns:a16="http://schemas.microsoft.com/office/drawing/2014/main" id="{EC081A4D-D318-46E7-A7CA-842A6E9E997F}"/>
+                <a16:creationId xmlns:a16="http://schemas.microsoft.com/office/drawing/2014/main" id="{60975661-E356-42E1-8AF7-D54CC35A816C}"/>
               </a:ext>
             </a:extLst>
           </p:cNvPr>
@@ -5877,7 +5813,7 @@
     </p:spTree>
     <p:extLst>
       <p:ext uri="{BB962C8B-B14F-4D97-AF65-F5344CB8AC3E}">
-        <p14:creationId xmlns:p14="http://schemas.microsoft.com/office/powerpoint/2010/main" val="1078160518"/>
+        <p14:creationId xmlns:p14="http://schemas.microsoft.com/office/powerpoint/2010/main" val="1373916743"/>
       </p:ext>
     </p:extLst>
   </p:cSld>
@@ -5908,7 +5844,7 @@
           <p:cNvPr id="1" name="s4-rule">
             <a:extLst xmlns:a="http://schemas.openxmlformats.org/drawingml/2006/main">
               <a:ext uri="{FF2B5EF4-FFF2-40B4-BE49-F238E27FC236}">
-                <a16:creationId xmlns:a16="http://schemas.microsoft.com/office/drawing/2014/main" id="{6E3E46FB-7111-4CEF-A997-6EDEF3B27C78}"/>
+                <a16:creationId xmlns:a16="http://schemas.microsoft.com/office/drawing/2014/main" id="{29E5E407-EBC7-40A7-9FE6-DD107E378891}"/>
               </a:ext>
             </a:extLst>
           </p:cNvPr>
@@ -5941,7 +5877,7 @@
           <p:cNvPr id="2" name="s4-eyebrow">
             <a:extLst xmlns:a="http://schemas.openxmlformats.org/drawingml/2006/main">
               <a:ext uri="{FF2B5EF4-FFF2-40B4-BE49-F238E27FC236}">
-                <a16:creationId xmlns:a16="http://schemas.microsoft.com/office/drawing/2014/main" id="{36D23052-80C2-48FE-9047-06FAB4206B49}"/>
+                <a16:creationId xmlns:a16="http://schemas.microsoft.com/office/drawing/2014/main" id="{5087252E-DBE9-4013-99A1-15C269DE155F}"/>
               </a:ext>
             </a:extLst>
           </p:cNvPr>
@@ -5999,7 +5935,7 @@
           <p:cNvPr id="3" name="s4-title">
             <a:extLst xmlns:a="http://schemas.openxmlformats.org/drawingml/2006/main">
               <a:ext uri="{FF2B5EF4-FFF2-40B4-BE49-F238E27FC236}">
-                <a16:creationId xmlns:a16="http://schemas.microsoft.com/office/drawing/2014/main" id="{43873E6E-BD68-40DA-8B35-AFC716C5B970}"/>
+                <a16:creationId xmlns:a16="http://schemas.microsoft.com/office/drawing/2014/main" id="{A5165A0F-3E2A-4CBB-A759-8B444AE8DD9F}"/>
               </a:ext>
             </a:extLst>
           </p:cNvPr>
@@ -6057,7 +5993,7 @@
           <p:cNvPr id="4" name="s4-footer">
             <a:extLst xmlns:a="http://schemas.openxmlformats.org/drawingml/2006/main">
               <a:ext uri="{FF2B5EF4-FFF2-40B4-BE49-F238E27FC236}">
-                <a16:creationId xmlns:a16="http://schemas.microsoft.com/office/drawing/2014/main" id="{11E54748-D233-4C29-895B-1DF6D3214823}"/>
+                <a16:creationId xmlns:a16="http://schemas.microsoft.com/office/drawing/2014/main" id="{E55ED029-5464-4FF0-A4D5-1F10373D1794}"/>
               </a:ext>
             </a:extLst>
           </p:cNvPr>
@@ -6088,7 +6024,7 @@
           <p:cNvPr id="5" name="s4-identity">
             <a:extLst xmlns:a="http://schemas.openxmlformats.org/drawingml/2006/main">
               <a:ext uri="{FF2B5EF4-FFF2-40B4-BE49-F238E27FC236}">
-                <a16:creationId xmlns:a16="http://schemas.microsoft.com/office/drawing/2014/main" id="{4A91A69A-7857-4306-8C48-3E6DB5A6EC17}"/>
+                <a16:creationId xmlns:a16="http://schemas.microsoft.com/office/drawing/2014/main" id="{7D29C06D-0829-4642-95C6-24BA540D7B6A}"/>
               </a:ext>
             </a:extLst>
           </p:cNvPr>
@@ -6146,7 +6082,7 @@
           <p:cNvPr id="6" name="core-no-0">
             <a:extLst xmlns:a="http://schemas.openxmlformats.org/drawingml/2006/main">
               <a:ext uri="{FF2B5EF4-FFF2-40B4-BE49-F238E27FC236}">
-                <a16:creationId xmlns:a16="http://schemas.microsoft.com/office/drawing/2014/main" id="{49FFB20B-7295-4EDF-AEC4-9F806305F99A}"/>
+                <a16:creationId xmlns:a16="http://schemas.microsoft.com/office/drawing/2014/main" id="{E1DD8836-9224-4AE5-BFB1-A1C535E2B945}"/>
               </a:ext>
             </a:extLst>
           </p:cNvPr>
@@ -6204,7 +6140,7 @@
           <p:cNvPr id="7" name="core-label-0">
             <a:extLst xmlns:a="http://schemas.openxmlformats.org/drawingml/2006/main">
               <a:ext uri="{FF2B5EF4-FFF2-40B4-BE49-F238E27FC236}">
-                <a16:creationId xmlns:a16="http://schemas.microsoft.com/office/drawing/2014/main" id="{8D7CA615-F221-48E0-8574-46FC98D2FE3E}"/>
+                <a16:creationId xmlns:a16="http://schemas.microsoft.com/office/drawing/2014/main" id="{2D2AB7E1-33EB-4328-8B36-E8348C0CF517}"/>
               </a:ext>
             </a:extLst>
           </p:cNvPr>
@@ -6262,7 +6198,7 @@
           <p:cNvPr id="8" name="core-body-0">
             <a:extLst xmlns:a="http://schemas.openxmlformats.org/drawingml/2006/main">
               <a:ext uri="{FF2B5EF4-FFF2-40B4-BE49-F238E27FC236}">
-                <a16:creationId xmlns:a16="http://schemas.microsoft.com/office/drawing/2014/main" id="{795D9FD2-BCBC-4063-B90A-4A81519B8EAD}"/>
+                <a16:creationId xmlns:a16="http://schemas.microsoft.com/office/drawing/2014/main" id="{70063BF9-1D23-490F-B7D8-C695D16BC943}"/>
               </a:ext>
             </a:extLst>
           </p:cNvPr>
@@ -6326,7 +6262,7 @@
           <p:cNvPr id="9" name="core-no-1">
             <a:extLst xmlns:a="http://schemas.openxmlformats.org/drawingml/2006/main">
               <a:ext uri="{FF2B5EF4-FFF2-40B4-BE49-F238E27FC236}">
-                <a16:creationId xmlns:a16="http://schemas.microsoft.com/office/drawing/2014/main" id="{E92D36D0-A7B3-4FBE-8DFE-97F96540014F}"/>
+                <a16:creationId xmlns:a16="http://schemas.microsoft.com/office/drawing/2014/main" id="{1687F876-B35A-4229-9D03-B7A5C38B8256}"/>
               </a:ext>
             </a:extLst>
           </p:cNvPr>
@@ -6384,7 +6320,7 @@
           <p:cNvPr id="10" name="core-body-1">
             <a:extLst xmlns:a="http://schemas.openxmlformats.org/drawingml/2006/main">
               <a:ext uri="{FF2B5EF4-FFF2-40B4-BE49-F238E27FC236}">
-                <a16:creationId xmlns:a16="http://schemas.microsoft.com/office/drawing/2014/main" id="{BEF1861B-C1A2-47FB-B4D1-5B13495B8F04}"/>
+                <a16:creationId xmlns:a16="http://schemas.microsoft.com/office/drawing/2014/main" id="{FE812384-6D49-44AB-AEEE-A41CB4468C93}"/>
               </a:ext>
             </a:extLst>
           </p:cNvPr>
@@ -6448,7 +6384,7 @@
           <p:cNvPr id="11" name="s4-takeaway-rule">
             <a:extLst xmlns:a="http://schemas.openxmlformats.org/drawingml/2006/main">
               <a:ext uri="{FF2B5EF4-FFF2-40B4-BE49-F238E27FC236}">
-                <a16:creationId xmlns:a16="http://schemas.microsoft.com/office/drawing/2014/main" id="{26A082DF-4F62-4CC1-95AB-EC869D53AB24}"/>
+                <a16:creationId xmlns:a16="http://schemas.microsoft.com/office/drawing/2014/main" id="{F8E3D5C2-08C1-4566-B027-07754CEE7C37}"/>
               </a:ext>
             </a:extLst>
           </p:cNvPr>
@@ -6481,7 +6417,7 @@
           <p:cNvPr id="12" name="s4-takeaway">
             <a:extLst xmlns:a="http://schemas.openxmlformats.org/drawingml/2006/main">
               <a:ext uri="{FF2B5EF4-FFF2-40B4-BE49-F238E27FC236}">
-                <a16:creationId xmlns:a16="http://schemas.microsoft.com/office/drawing/2014/main" id="{09577251-2AC3-430D-B324-4309F5F7C424}"/>
+                <a16:creationId xmlns:a16="http://schemas.microsoft.com/office/drawing/2014/main" id="{A31E4890-4EDC-4F06-814E-B7830D6C98DC}"/>
               </a:ext>
             </a:extLst>
           </p:cNvPr>
@@ -6537,7 +6473,7 @@
     </p:spTree>
     <p:extLst>
       <p:ext uri="{BB962C8B-B14F-4D97-AF65-F5344CB8AC3E}">
-        <p14:creationId xmlns:p14="http://schemas.microsoft.com/office/powerpoint/2010/main" val="1887741132"/>
+        <p14:creationId xmlns:p14="http://schemas.microsoft.com/office/powerpoint/2010/main" val="1466712624"/>
       </p:ext>
     </p:extLst>
   </p:cSld>
@@ -6568,7 +6504,7 @@
           <p:cNvPr id="1" name="s5-rule">
             <a:extLst xmlns:a="http://schemas.openxmlformats.org/drawingml/2006/main">
               <a:ext uri="{FF2B5EF4-FFF2-40B4-BE49-F238E27FC236}">
-                <a16:creationId xmlns:a16="http://schemas.microsoft.com/office/drawing/2014/main" id="{9FEF54DE-1EE5-407C-9D39-D1E812C9F9FD}"/>
+                <a16:creationId xmlns:a16="http://schemas.microsoft.com/office/drawing/2014/main" id="{E4AD7D05-51C1-486B-9834-53466B924E86}"/>
               </a:ext>
             </a:extLst>
           </p:cNvPr>
@@ -6601,7 +6537,7 @@
           <p:cNvPr id="2" name="s5-eyebrow">
             <a:extLst xmlns:a="http://schemas.openxmlformats.org/drawingml/2006/main">
               <a:ext uri="{FF2B5EF4-FFF2-40B4-BE49-F238E27FC236}">
-                <a16:creationId xmlns:a16="http://schemas.microsoft.com/office/drawing/2014/main" id="{135111A9-63CF-4F97-9282-0C61CFC75117}"/>
+                <a16:creationId xmlns:a16="http://schemas.microsoft.com/office/drawing/2014/main" id="{1F754D44-59ED-419B-94E7-A8D9124F79C9}"/>
               </a:ext>
             </a:extLst>
           </p:cNvPr>
@@ -6659,7 +6595,7 @@
           <p:cNvPr id="3" name="s5-title">
             <a:extLst xmlns:a="http://schemas.openxmlformats.org/drawingml/2006/main">
               <a:ext uri="{FF2B5EF4-FFF2-40B4-BE49-F238E27FC236}">
-                <a16:creationId xmlns:a16="http://schemas.microsoft.com/office/drawing/2014/main" id="{516CB9A4-113F-4F0F-BCFE-C7D02DD05798}"/>
+                <a16:creationId xmlns:a16="http://schemas.microsoft.com/office/drawing/2014/main" id="{46467363-0C89-4804-8497-84AFB958DB35}"/>
               </a:ext>
             </a:extLst>
           </p:cNvPr>
@@ -6717,7 +6653,7 @@
           <p:cNvPr id="4" name="s5-footer">
             <a:extLst xmlns:a="http://schemas.openxmlformats.org/drawingml/2006/main">
               <a:ext uri="{FF2B5EF4-FFF2-40B4-BE49-F238E27FC236}">
-                <a16:creationId xmlns:a16="http://schemas.microsoft.com/office/drawing/2014/main" id="{5452CDD8-5A3C-4E6B-8758-75DBA266BE69}"/>
+                <a16:creationId xmlns:a16="http://schemas.microsoft.com/office/drawing/2014/main" id="{509F0C6E-BB8F-48AF-B02B-0C6BCCBBDFC9}"/>
               </a:ext>
             </a:extLst>
           </p:cNvPr>
@@ -6748,7 +6684,7 @@
           <p:cNvPr id="5" name="s5-identity">
             <a:extLst xmlns:a="http://schemas.openxmlformats.org/drawingml/2006/main">
               <a:ext uri="{FF2B5EF4-FFF2-40B4-BE49-F238E27FC236}">
-                <a16:creationId xmlns:a16="http://schemas.microsoft.com/office/drawing/2014/main" id="{22D02E77-B3E4-4E58-ADA6-EE13FDEA2FFE}"/>
+                <a16:creationId xmlns:a16="http://schemas.microsoft.com/office/drawing/2014/main" id="{9AA929A1-C16F-4BDC-B240-C21F1B7418B9}"/>
               </a:ext>
             </a:extLst>
           </p:cNvPr>
@@ -6806,7 +6742,7 @@
           <p:cNvPr id="6" name="core-no-0">
             <a:extLst xmlns:a="http://schemas.openxmlformats.org/drawingml/2006/main">
               <a:ext uri="{FF2B5EF4-FFF2-40B4-BE49-F238E27FC236}">
-                <a16:creationId xmlns:a16="http://schemas.microsoft.com/office/drawing/2014/main" id="{7FEA4B8F-067D-4F37-A86E-9FC914B8FA7C}"/>
+                <a16:creationId xmlns:a16="http://schemas.microsoft.com/office/drawing/2014/main" id="{08DCA104-8F25-4ACB-A5F0-B5788DEB505F}"/>
               </a:ext>
             </a:extLst>
           </p:cNvPr>
@@ -6864,7 +6800,7 @@
           <p:cNvPr id="7" name="core-label-0">
             <a:extLst xmlns:a="http://schemas.openxmlformats.org/drawingml/2006/main">
               <a:ext uri="{FF2B5EF4-FFF2-40B4-BE49-F238E27FC236}">
-                <a16:creationId xmlns:a16="http://schemas.microsoft.com/office/drawing/2014/main" id="{1784CADA-1C78-4AF0-B53C-D087A9F3766E}"/>
+                <a16:creationId xmlns:a16="http://schemas.microsoft.com/office/drawing/2014/main" id="{4CE4AF4B-E66E-43D4-82D5-8EDA62E0AB99}"/>
               </a:ext>
             </a:extLst>
           </p:cNvPr>
@@ -6922,7 +6858,7 @@
           <p:cNvPr id="8" name="core-body-0">
             <a:extLst xmlns:a="http://schemas.openxmlformats.org/drawingml/2006/main">
               <a:ext uri="{FF2B5EF4-FFF2-40B4-BE49-F238E27FC236}">
-                <a16:creationId xmlns:a16="http://schemas.microsoft.com/office/drawing/2014/main" id="{53D96C68-E67E-47D2-B598-46A24EEC102A}"/>
+                <a16:creationId xmlns:a16="http://schemas.microsoft.com/office/drawing/2014/main" id="{97B6DD72-7AC9-4E27-B0B9-CAE4A611132A}"/>
               </a:ext>
             </a:extLst>
           </p:cNvPr>
@@ -6986,7 +6922,7 @@
           <p:cNvPr id="9" name="core-no-1">
             <a:extLst xmlns:a="http://schemas.openxmlformats.org/drawingml/2006/main">
               <a:ext uri="{FF2B5EF4-FFF2-40B4-BE49-F238E27FC236}">
-                <a16:creationId xmlns:a16="http://schemas.microsoft.com/office/drawing/2014/main" id="{F49A60E5-1BCB-48DE-8D97-92C1A96F5621}"/>
+                <a16:creationId xmlns:a16="http://schemas.microsoft.com/office/drawing/2014/main" id="{70E70914-192E-44D5-B433-FDD5E64BF5DA}"/>
               </a:ext>
             </a:extLst>
           </p:cNvPr>
@@ -7044,7 +6980,7 @@
           <p:cNvPr id="10" name="core-body-1">
             <a:extLst xmlns:a="http://schemas.openxmlformats.org/drawingml/2006/main">
               <a:ext uri="{FF2B5EF4-FFF2-40B4-BE49-F238E27FC236}">
-                <a16:creationId xmlns:a16="http://schemas.microsoft.com/office/drawing/2014/main" id="{31814981-6ADB-477F-B96E-00358642B440}"/>
+                <a16:creationId xmlns:a16="http://schemas.microsoft.com/office/drawing/2014/main" id="{802F4709-65D2-4026-961B-9A8AD78D8DC6}"/>
               </a:ext>
             </a:extLst>
           </p:cNvPr>
@@ -7108,7 +7044,7 @@
           <p:cNvPr id="11" name="core-no-2">
             <a:extLst xmlns:a="http://schemas.openxmlformats.org/drawingml/2006/main">
               <a:ext uri="{FF2B5EF4-FFF2-40B4-BE49-F238E27FC236}">
-                <a16:creationId xmlns:a16="http://schemas.microsoft.com/office/drawing/2014/main" id="{16211B93-867B-4F0D-AB9E-AFAE9EEF1112}"/>
+                <a16:creationId xmlns:a16="http://schemas.microsoft.com/office/drawing/2014/main" id="{C99E52AB-6CF9-41A3-B7C1-6379588E33BD}"/>
               </a:ext>
             </a:extLst>
           </p:cNvPr>
@@ -7166,7 +7102,7 @@
           <p:cNvPr id="12" name="core-body-2">
             <a:extLst xmlns:a="http://schemas.openxmlformats.org/drawingml/2006/main">
               <a:ext uri="{FF2B5EF4-FFF2-40B4-BE49-F238E27FC236}">
-                <a16:creationId xmlns:a16="http://schemas.microsoft.com/office/drawing/2014/main" id="{90546B06-F788-42BB-8E21-C9AF7EE33C6C}"/>
+                <a16:creationId xmlns:a16="http://schemas.microsoft.com/office/drawing/2014/main" id="{E4140E28-ED0F-4FAD-B8CD-979912619858}"/>
               </a:ext>
             </a:extLst>
           </p:cNvPr>
@@ -7230,7 +7166,7 @@
           <p:cNvPr id="13" name="s5-takeaway-rule">
             <a:extLst xmlns:a="http://schemas.openxmlformats.org/drawingml/2006/main">
               <a:ext uri="{FF2B5EF4-FFF2-40B4-BE49-F238E27FC236}">
-                <a16:creationId xmlns:a16="http://schemas.microsoft.com/office/drawing/2014/main" id="{7F047B18-B4BE-4B0F-9622-2595EC22D249}"/>
+                <a16:creationId xmlns:a16="http://schemas.microsoft.com/office/drawing/2014/main" id="{82D5A4EC-9131-4B72-BEE4-27613F27B4DF}"/>
               </a:ext>
             </a:extLst>
           </p:cNvPr>
@@ -7263,7 +7199,7 @@
           <p:cNvPr id="14" name="s5-takeaway">
             <a:extLst xmlns:a="http://schemas.openxmlformats.org/drawingml/2006/main">
               <a:ext uri="{FF2B5EF4-FFF2-40B4-BE49-F238E27FC236}">
-                <a16:creationId xmlns:a16="http://schemas.microsoft.com/office/drawing/2014/main" id="{7EFB7FA2-05E5-4654-A977-97975F7F2147}"/>
+                <a16:creationId xmlns:a16="http://schemas.microsoft.com/office/drawing/2014/main" id="{40FDA664-4D07-4C1E-8677-A938F0CE2EF3}"/>
               </a:ext>
             </a:extLst>
           </p:cNvPr>
@@ -7319,7 +7255,7 @@
     </p:spTree>
     <p:extLst>
       <p:ext uri="{BB962C8B-B14F-4D97-AF65-F5344CB8AC3E}">
-        <p14:creationId xmlns:p14="http://schemas.microsoft.com/office/powerpoint/2010/main" val="1359705019"/>
+        <p14:creationId xmlns:p14="http://schemas.microsoft.com/office/powerpoint/2010/main" val="928921884"/>
       </p:ext>
     </p:extLst>
   </p:cSld>
@@ -7350,7 +7286,7 @@
           <p:cNvPr id="1" name="s6-rule">
             <a:extLst xmlns:a="http://schemas.openxmlformats.org/drawingml/2006/main">
               <a:ext uri="{FF2B5EF4-FFF2-40B4-BE49-F238E27FC236}">
-                <a16:creationId xmlns:a16="http://schemas.microsoft.com/office/drawing/2014/main" id="{F46DF35F-4911-406A-8B80-99F2A0A3D440}"/>
+                <a16:creationId xmlns:a16="http://schemas.microsoft.com/office/drawing/2014/main" id="{0EF6B61F-414B-43E6-84CE-A7197DC80AB4}"/>
               </a:ext>
             </a:extLst>
           </p:cNvPr>
@@ -7383,7 +7319,7 @@
           <p:cNvPr id="2" name="s6-eyebrow">
             <a:extLst xmlns:a="http://schemas.openxmlformats.org/drawingml/2006/main">
               <a:ext uri="{FF2B5EF4-FFF2-40B4-BE49-F238E27FC236}">
-                <a16:creationId xmlns:a16="http://schemas.microsoft.com/office/drawing/2014/main" id="{F01E3C64-2AAA-40EF-B80A-D52008CD865E}"/>
+                <a16:creationId xmlns:a16="http://schemas.microsoft.com/office/drawing/2014/main" id="{867A6890-75E5-4978-8651-2FB37BDCEE1B}"/>
               </a:ext>
             </a:extLst>
           </p:cNvPr>
@@ -7441,7 +7377,7 @@
           <p:cNvPr id="3" name="s6-title">
             <a:extLst xmlns:a="http://schemas.openxmlformats.org/drawingml/2006/main">
               <a:ext uri="{FF2B5EF4-FFF2-40B4-BE49-F238E27FC236}">
-                <a16:creationId xmlns:a16="http://schemas.microsoft.com/office/drawing/2014/main" id="{CB87BDA4-9333-4146-AB40-948D74978EC8}"/>
+                <a16:creationId xmlns:a16="http://schemas.microsoft.com/office/drawing/2014/main" id="{5957121D-2DD2-45B8-9D49-747C0BE5BCCB}"/>
               </a:ext>
             </a:extLst>
           </p:cNvPr>
@@ -7499,7 +7435,7 @@
           <p:cNvPr id="4" name="s6-footer">
             <a:extLst xmlns:a="http://schemas.openxmlformats.org/drawingml/2006/main">
               <a:ext uri="{FF2B5EF4-FFF2-40B4-BE49-F238E27FC236}">
-                <a16:creationId xmlns:a16="http://schemas.microsoft.com/office/drawing/2014/main" id="{932FD1C0-6875-44B1-BC1A-04E64BB28BEF}"/>
+                <a16:creationId xmlns:a16="http://schemas.microsoft.com/office/drawing/2014/main" id="{AD9D6C4B-D0EE-427E-A40C-4F0A7076B90E}"/>
               </a:ext>
             </a:extLst>
           </p:cNvPr>
@@ -7530,7 +7466,7 @@
           <p:cNvPr id="5" name="s6-identity">
             <a:extLst xmlns:a="http://schemas.openxmlformats.org/drawingml/2006/main">
               <a:ext uri="{FF2B5EF4-FFF2-40B4-BE49-F238E27FC236}">
-                <a16:creationId xmlns:a16="http://schemas.microsoft.com/office/drawing/2014/main" id="{9A12C24D-BFD7-4EC4-B7BA-7E682D7C572C}"/>
+                <a16:creationId xmlns:a16="http://schemas.microsoft.com/office/drawing/2014/main" id="{DF797255-8F58-4362-9ABD-8DE11CE2493A}"/>
               </a:ext>
             </a:extLst>
           </p:cNvPr>
@@ -7588,7 +7524,7 @@
           <p:cNvPr id="6" name="core-no-0">
             <a:extLst xmlns:a="http://schemas.openxmlformats.org/drawingml/2006/main">
               <a:ext uri="{FF2B5EF4-FFF2-40B4-BE49-F238E27FC236}">
-                <a16:creationId xmlns:a16="http://schemas.microsoft.com/office/drawing/2014/main" id="{4443B0E4-E9CB-4FF4-8396-22A3949D0694}"/>
+                <a16:creationId xmlns:a16="http://schemas.microsoft.com/office/drawing/2014/main" id="{C12CDCB3-0A72-41BE-AEEB-434821DB75EA}"/>
               </a:ext>
             </a:extLst>
           </p:cNvPr>
@@ -7646,7 +7582,7 @@
           <p:cNvPr id="7" name="core-label-0">
             <a:extLst xmlns:a="http://schemas.openxmlformats.org/drawingml/2006/main">
               <a:ext uri="{FF2B5EF4-FFF2-40B4-BE49-F238E27FC236}">
-                <a16:creationId xmlns:a16="http://schemas.microsoft.com/office/drawing/2014/main" id="{3BAB0171-CE76-4638-B27F-4BE40F27CB3D}"/>
+                <a16:creationId xmlns:a16="http://schemas.microsoft.com/office/drawing/2014/main" id="{6853DDDF-3DC7-4DE8-91A5-B69915692864}"/>
               </a:ext>
             </a:extLst>
           </p:cNvPr>
@@ -7704,7 +7640,7 @@
           <p:cNvPr id="8" name="core-body-0">
             <a:extLst xmlns:a="http://schemas.openxmlformats.org/drawingml/2006/main">
               <a:ext uri="{FF2B5EF4-FFF2-40B4-BE49-F238E27FC236}">
-                <a16:creationId xmlns:a16="http://schemas.microsoft.com/office/drawing/2014/main" id="{4583B1EC-FAEB-478A-B084-6239D94D7AEE}"/>
+                <a16:creationId xmlns:a16="http://schemas.microsoft.com/office/drawing/2014/main" id="{AB208366-996F-45C5-854B-D7139C561902}"/>
               </a:ext>
             </a:extLst>
           </p:cNvPr>
@@ -7768,7 +7704,7 @@
           <p:cNvPr id="9" name="core-no-1">
             <a:extLst xmlns:a="http://schemas.openxmlformats.org/drawingml/2006/main">
               <a:ext uri="{FF2B5EF4-FFF2-40B4-BE49-F238E27FC236}">
-                <a16:creationId xmlns:a16="http://schemas.microsoft.com/office/drawing/2014/main" id="{96D9BF12-FB26-4BC3-9571-D3A532FC648E}"/>
+                <a16:creationId xmlns:a16="http://schemas.microsoft.com/office/drawing/2014/main" id="{FE61EB8C-596A-41CC-A735-258E6A8B99A6}"/>
               </a:ext>
             </a:extLst>
           </p:cNvPr>
@@ -7826,7 +7762,7 @@
           <p:cNvPr id="10" name="core-body-1">
             <a:extLst xmlns:a="http://schemas.openxmlformats.org/drawingml/2006/main">
               <a:ext uri="{FF2B5EF4-FFF2-40B4-BE49-F238E27FC236}">
-                <a16:creationId xmlns:a16="http://schemas.microsoft.com/office/drawing/2014/main" id="{F8019FCF-8B4A-4427-A46B-897A4E2DCDC9}"/>
+                <a16:creationId xmlns:a16="http://schemas.microsoft.com/office/drawing/2014/main" id="{0D9E7B7B-17A1-4037-B4B5-1FE51DAB620A}"/>
               </a:ext>
             </a:extLst>
           </p:cNvPr>
@@ -7890,7 +7826,7 @@
           <p:cNvPr id="11" name="s6-takeaway-rule">
             <a:extLst xmlns:a="http://schemas.openxmlformats.org/drawingml/2006/main">
               <a:ext uri="{FF2B5EF4-FFF2-40B4-BE49-F238E27FC236}">
-                <a16:creationId xmlns:a16="http://schemas.microsoft.com/office/drawing/2014/main" id="{2A5C9945-92C7-4AA8-94AA-4EC87286385C}"/>
+                <a16:creationId xmlns:a16="http://schemas.microsoft.com/office/drawing/2014/main" id="{18F1A594-AF7F-47A9-9348-3B1A9972E663}"/>
               </a:ext>
             </a:extLst>
           </p:cNvPr>
@@ -7923,7 +7859,7 @@
           <p:cNvPr id="12" name="s6-takeaway">
             <a:extLst xmlns:a="http://schemas.openxmlformats.org/drawingml/2006/main">
               <a:ext uri="{FF2B5EF4-FFF2-40B4-BE49-F238E27FC236}">
-                <a16:creationId xmlns:a16="http://schemas.microsoft.com/office/drawing/2014/main" id="{866AF8A7-2301-4197-BD25-44A008C1E878}"/>
+                <a16:creationId xmlns:a16="http://schemas.microsoft.com/office/drawing/2014/main" id="{6D0B7349-0C37-4115-B206-2B03F02D2257}"/>
               </a:ext>
             </a:extLst>
           </p:cNvPr>
@@ -7979,7 +7915,7 @@
     </p:spTree>
     <p:extLst>
       <p:ext uri="{BB962C8B-B14F-4D97-AF65-F5344CB8AC3E}">
-        <p14:creationId xmlns:p14="http://schemas.microsoft.com/office/powerpoint/2010/main" val="1443693016"/>
+        <p14:creationId xmlns:p14="http://schemas.microsoft.com/office/powerpoint/2010/main" val="789657921"/>
       </p:ext>
     </p:extLst>
   </p:cSld>
@@ -8010,7 +7946,7 @@
           <p:cNvPr id="1" name="s7-rule">
             <a:extLst xmlns:a="http://schemas.openxmlformats.org/drawingml/2006/main">
               <a:ext uri="{FF2B5EF4-FFF2-40B4-BE49-F238E27FC236}">
-                <a16:creationId xmlns:a16="http://schemas.microsoft.com/office/drawing/2014/main" id="{1ED7AE0E-145A-4F57-B196-FD6CE0CD6FA1}"/>
+                <a16:creationId xmlns:a16="http://schemas.microsoft.com/office/drawing/2014/main" id="{40D535F5-0E3C-4E6D-82F5-F3EE4CB87D83}"/>
               </a:ext>
             </a:extLst>
           </p:cNvPr>
@@ -8043,7 +7979,7 @@
           <p:cNvPr id="2" name="s7-eyebrow">
             <a:extLst xmlns:a="http://schemas.openxmlformats.org/drawingml/2006/main">
               <a:ext uri="{FF2B5EF4-FFF2-40B4-BE49-F238E27FC236}">
-                <a16:creationId xmlns:a16="http://schemas.microsoft.com/office/drawing/2014/main" id="{BA4E5206-A65D-4C5C-B456-CE7CF8A58AE7}"/>
+                <a16:creationId xmlns:a16="http://schemas.microsoft.com/office/drawing/2014/main" id="{047C86E5-B645-4AE0-8170-32E7F53601A9}"/>
               </a:ext>
             </a:extLst>
           </p:cNvPr>
@@ -8101,7 +8037,7 @@
           <p:cNvPr id="3" name="s7-title">
             <a:extLst xmlns:a="http://schemas.openxmlformats.org/drawingml/2006/main">
               <a:ext uri="{FF2B5EF4-FFF2-40B4-BE49-F238E27FC236}">
-                <a16:creationId xmlns:a16="http://schemas.microsoft.com/office/drawing/2014/main" id="{2BE2E14F-3C7D-4EBA-A0D5-E559CA30C492}"/>
+                <a16:creationId xmlns:a16="http://schemas.microsoft.com/office/drawing/2014/main" id="{3F7971FF-560F-4633-A1EB-41B11CB0FADC}"/>
               </a:ext>
             </a:extLst>
           </p:cNvPr>
@@ -8159,7 +8095,7 @@
           <p:cNvPr id="4" name="s7-footer">
             <a:extLst xmlns:a="http://schemas.openxmlformats.org/drawingml/2006/main">
               <a:ext uri="{FF2B5EF4-FFF2-40B4-BE49-F238E27FC236}">
-                <a16:creationId xmlns:a16="http://schemas.microsoft.com/office/drawing/2014/main" id="{F1682E59-8E59-4370-A1C7-B78FCE821AFD}"/>
+                <a16:creationId xmlns:a16="http://schemas.microsoft.com/office/drawing/2014/main" id="{123322D3-C560-4720-9C56-7D5EA12E9DB9}"/>
               </a:ext>
             </a:extLst>
           </p:cNvPr>
@@ -8190,7 +8126,7 @@
           <p:cNvPr id="5" name="s7-identity">
             <a:extLst xmlns:a="http://schemas.openxmlformats.org/drawingml/2006/main">
               <a:ext uri="{FF2B5EF4-FFF2-40B4-BE49-F238E27FC236}">
-                <a16:creationId xmlns:a16="http://schemas.microsoft.com/office/drawing/2014/main" id="{D3735608-527F-450E-955D-D73A679E374E}"/>
+                <a16:creationId xmlns:a16="http://schemas.microsoft.com/office/drawing/2014/main" id="{C4700181-2166-4BEB-9610-014D980EAA51}"/>
               </a:ext>
             </a:extLst>
           </p:cNvPr>
@@ -8248,7 +8184,7 @@
           <p:cNvPr id="6" name="case-title">
             <a:extLst xmlns:a="http://schemas.openxmlformats.org/drawingml/2006/main">
               <a:ext uri="{FF2B5EF4-FFF2-40B4-BE49-F238E27FC236}">
-                <a16:creationId xmlns:a16="http://schemas.microsoft.com/office/drawing/2014/main" id="{72B57D30-33BB-4099-A38E-888BEB0D7F04}"/>
+                <a16:creationId xmlns:a16="http://schemas.microsoft.com/office/drawing/2014/main" id="{BBFD7E8E-D752-4DDD-A4E8-1491CDD8BE6E}"/>
               </a:ext>
             </a:extLst>
           </p:cNvPr>
@@ -8312,7 +8248,7 @@
           <p:cNvPr id="7" name="case-row-0">
             <a:extLst xmlns:a="http://schemas.openxmlformats.org/drawingml/2006/main">
               <a:ext uri="{FF2B5EF4-FFF2-40B4-BE49-F238E27FC236}">
-                <a16:creationId xmlns:a16="http://schemas.microsoft.com/office/drawing/2014/main" id="{F744A0BA-E5AA-4168-B10E-995E0DC28122}"/>
+                <a16:creationId xmlns:a16="http://schemas.microsoft.com/office/drawing/2014/main" id="{0EE03571-3329-4016-845D-B5A3A6733837}"/>
               </a:ext>
             </a:extLst>
           </p:cNvPr>
@@ -8376,7 +8312,7 @@
           <p:cNvPr id="8" name="case-row-1">
             <a:extLst xmlns:a="http://schemas.openxmlformats.org/drawingml/2006/main">
               <a:ext uri="{FF2B5EF4-FFF2-40B4-BE49-F238E27FC236}">
-                <a16:creationId xmlns:a16="http://schemas.microsoft.com/office/drawing/2014/main" id="{E6B14B81-E5A3-49A5-BFC5-C3E996A703D1}"/>
+                <a16:creationId xmlns:a16="http://schemas.microsoft.com/office/drawing/2014/main" id="{95A2182B-D638-40B9-927F-7F75FCBCDD9E}"/>
               </a:ext>
             </a:extLst>
           </p:cNvPr>
@@ -8440,7 +8376,7 @@
           <p:cNvPr id="9" name="case-row-2">
             <a:extLst xmlns:a="http://schemas.openxmlformats.org/drawingml/2006/main">
               <a:ext uri="{FF2B5EF4-FFF2-40B4-BE49-F238E27FC236}">
-                <a16:creationId xmlns:a16="http://schemas.microsoft.com/office/drawing/2014/main" id="{19930614-87BA-4E1E-98B2-AF16DB5DC210}"/>
+                <a16:creationId xmlns:a16="http://schemas.microsoft.com/office/drawing/2014/main" id="{56CAAC68-4DA2-4777-8B04-1F4A310ACB57}"/>
               </a:ext>
             </a:extLst>
           </p:cNvPr>
@@ -8504,7 +8440,7 @@
           <p:cNvPr id="10" name="s7-takeaway-rule">
             <a:extLst xmlns:a="http://schemas.openxmlformats.org/drawingml/2006/main">
               <a:ext uri="{FF2B5EF4-FFF2-40B4-BE49-F238E27FC236}">
-                <a16:creationId xmlns:a16="http://schemas.microsoft.com/office/drawing/2014/main" id="{F03D070E-017A-4F4F-86D6-4E14713D9642}"/>
+                <a16:creationId xmlns:a16="http://schemas.microsoft.com/office/drawing/2014/main" id="{150BDD6F-FE35-406C-A9C9-CECD5CC581A4}"/>
               </a:ext>
             </a:extLst>
           </p:cNvPr>
@@ -8537,7 +8473,7 @@
           <p:cNvPr id="11" name="s7-takeaway">
             <a:extLst xmlns:a="http://schemas.openxmlformats.org/drawingml/2006/main">
               <a:ext uri="{FF2B5EF4-FFF2-40B4-BE49-F238E27FC236}">
-                <a16:creationId xmlns:a16="http://schemas.microsoft.com/office/drawing/2014/main" id="{24847354-DC7C-44A7-ABFA-434DE9251122}"/>
+                <a16:creationId xmlns:a16="http://schemas.microsoft.com/office/drawing/2014/main" id="{5239B8AE-375E-4990-A7E0-677E67EACA1E}"/>
               </a:ext>
             </a:extLst>
           </p:cNvPr>
@@ -8593,7 +8529,7 @@
     </p:spTree>
     <p:extLst>
       <p:ext uri="{BB962C8B-B14F-4D97-AF65-F5344CB8AC3E}">
-        <p14:creationId xmlns:p14="http://schemas.microsoft.com/office/powerpoint/2010/main" val="264300570"/>
+        <p14:creationId xmlns:p14="http://schemas.microsoft.com/office/powerpoint/2010/main" val="846525558"/>
       </p:ext>
     </p:extLst>
   </p:cSld>
@@ -8624,7 +8560,7 @@
           <p:cNvPr id="1" name="s8-rule">
             <a:extLst xmlns:a="http://schemas.openxmlformats.org/drawingml/2006/main">
               <a:ext uri="{FF2B5EF4-FFF2-40B4-BE49-F238E27FC236}">
-                <a16:creationId xmlns:a16="http://schemas.microsoft.com/office/drawing/2014/main" id="{F1F8B22E-3F1B-499D-B6A7-765BF56059A1}"/>
+                <a16:creationId xmlns:a16="http://schemas.microsoft.com/office/drawing/2014/main" id="{32CD464B-A5A4-44AA-B2B4-0D5D5B963C9E}"/>
               </a:ext>
             </a:extLst>
           </p:cNvPr>
@@ -8657,7 +8593,7 @@
           <p:cNvPr id="2" name="s8-eyebrow">
             <a:extLst xmlns:a="http://schemas.openxmlformats.org/drawingml/2006/main">
               <a:ext uri="{FF2B5EF4-FFF2-40B4-BE49-F238E27FC236}">
-                <a16:creationId xmlns:a16="http://schemas.microsoft.com/office/drawing/2014/main" id="{7C60DBFF-B48A-4823-97A0-701ABCAF2475}"/>
+                <a16:creationId xmlns:a16="http://schemas.microsoft.com/office/drawing/2014/main" id="{DF897ED9-5D41-49A5-A601-C54AD4574607}"/>
               </a:ext>
             </a:extLst>
           </p:cNvPr>
@@ -8715,7 +8651,7 @@
           <p:cNvPr id="3" name="s8-title">
             <a:extLst xmlns:a="http://schemas.openxmlformats.org/drawingml/2006/main">
               <a:ext uri="{FF2B5EF4-FFF2-40B4-BE49-F238E27FC236}">
-                <a16:creationId xmlns:a16="http://schemas.microsoft.com/office/drawing/2014/main" id="{2E6B0A0D-EADA-48C0-8961-1DA227D11A00}"/>
+                <a16:creationId xmlns:a16="http://schemas.microsoft.com/office/drawing/2014/main" id="{A7535242-E66D-4F6C-9FFA-AF074A43589B}"/>
               </a:ext>
             </a:extLst>
           </p:cNvPr>
@@ -8773,7 +8709,7 @@
           <p:cNvPr id="4" name="s8-footer">
             <a:extLst xmlns:a="http://schemas.openxmlformats.org/drawingml/2006/main">
               <a:ext uri="{FF2B5EF4-FFF2-40B4-BE49-F238E27FC236}">
-                <a16:creationId xmlns:a16="http://schemas.microsoft.com/office/drawing/2014/main" id="{D616DD1E-3B3C-4913-B1F5-EF71ED17A485}"/>
+                <a16:creationId xmlns:a16="http://schemas.microsoft.com/office/drawing/2014/main" id="{EC6A26D1-2EDD-45CF-B7FD-98FD1D6E7411}"/>
               </a:ext>
             </a:extLst>
           </p:cNvPr>
@@ -8804,7 +8740,7 @@
           <p:cNvPr id="5" name="s8-identity">
             <a:extLst xmlns:a="http://schemas.openxmlformats.org/drawingml/2006/main">
               <a:ext uri="{FF2B5EF4-FFF2-40B4-BE49-F238E27FC236}">
-                <a16:creationId xmlns:a16="http://schemas.microsoft.com/office/drawing/2014/main" id="{DAA4D5CC-9DFD-4F2B-AC0D-5DFDFA3F838D}"/>
+                <a16:creationId xmlns:a16="http://schemas.microsoft.com/office/drawing/2014/main" id="{8DBBE888-6EC5-44B3-BE20-88678CFC0F3B}"/>
               </a:ext>
             </a:extLst>
           </p:cNvPr>
@@ -8862,7 +8798,7 @@
           <p:cNvPr id="6" name="case-title">
             <a:extLst xmlns:a="http://schemas.openxmlformats.org/drawingml/2006/main">
               <a:ext uri="{FF2B5EF4-FFF2-40B4-BE49-F238E27FC236}">
-                <a16:creationId xmlns:a16="http://schemas.microsoft.com/office/drawing/2014/main" id="{99B5D349-EA8E-4CC1-9178-3F6FA3836736}"/>
+                <a16:creationId xmlns:a16="http://schemas.microsoft.com/office/drawing/2014/main" id="{60BC37C9-86F0-440D-8D5F-78BF8F909333}"/>
               </a:ext>
             </a:extLst>
           </p:cNvPr>
@@ -8926,7 +8862,7 @@
           <p:cNvPr id="7" name="case-row-0">
             <a:extLst xmlns:a="http://schemas.openxmlformats.org/drawingml/2006/main">
               <a:ext uri="{FF2B5EF4-FFF2-40B4-BE49-F238E27FC236}">
-                <a16:creationId xmlns:a16="http://schemas.microsoft.com/office/drawing/2014/main" id="{423AC480-D858-4A67-BA92-5FB0DECDB94C}"/>
+                <a16:creationId xmlns:a16="http://schemas.microsoft.com/office/drawing/2014/main" id="{1CAE2529-C7DF-493B-8D96-80FCE4D29ED6}"/>
               </a:ext>
             </a:extLst>
           </p:cNvPr>
@@ -8990,7 +8926,7 @@
           <p:cNvPr id="8" name="case-row-1">
             <a:extLst xmlns:a="http://schemas.openxmlformats.org/drawingml/2006/main">
               <a:ext uri="{FF2B5EF4-FFF2-40B4-BE49-F238E27FC236}">
-                <a16:creationId xmlns:a16="http://schemas.microsoft.com/office/drawing/2014/main" id="{1DC117E7-571B-4D9E-814C-2ECFD43D05FF}"/>
+                <a16:creationId xmlns:a16="http://schemas.microsoft.com/office/drawing/2014/main" id="{2B9F7D3A-B92C-4208-A649-A7B6BCBB1CFE}"/>
               </a:ext>
             </a:extLst>
           </p:cNvPr>
@@ -9054,7 +8990,7 @@
           <p:cNvPr id="9" name="s8-takeaway-rule">
             <a:extLst xmlns:a="http://schemas.openxmlformats.org/drawingml/2006/main">
               <a:ext uri="{FF2B5EF4-FFF2-40B4-BE49-F238E27FC236}">
-                <a16:creationId xmlns:a16="http://schemas.microsoft.com/office/drawing/2014/main" id="{4F472A12-A4C5-42F0-9149-381A83756B31}"/>
+                <a16:creationId xmlns:a16="http://schemas.microsoft.com/office/drawing/2014/main" id="{C60A1D0E-8B0B-480D-9F56-1BCEF91E0F18}"/>
               </a:ext>
             </a:extLst>
           </p:cNvPr>
@@ -9087,7 +9023,7 @@
           <p:cNvPr id="10" name="s8-takeaway">
             <a:extLst xmlns:a="http://schemas.openxmlformats.org/drawingml/2006/main">
               <a:ext uri="{FF2B5EF4-FFF2-40B4-BE49-F238E27FC236}">
-                <a16:creationId xmlns:a16="http://schemas.microsoft.com/office/drawing/2014/main" id="{D85160F7-0C90-4A0B-BA51-C7B8F0744874}"/>
+                <a16:creationId xmlns:a16="http://schemas.microsoft.com/office/drawing/2014/main" id="{3ED76841-1D61-41AE-856F-FC0378E3E0D9}"/>
               </a:ext>
             </a:extLst>
           </p:cNvPr>
@@ -9143,7 +9079,7 @@
     </p:spTree>
     <p:extLst>
       <p:ext uri="{BB962C8B-B14F-4D97-AF65-F5344CB8AC3E}">
-        <p14:creationId xmlns:p14="http://schemas.microsoft.com/office/powerpoint/2010/main" val="1375502671"/>
+        <p14:creationId xmlns:p14="http://schemas.microsoft.com/office/powerpoint/2010/main" val="954646874"/>
       </p:ext>
     </p:extLst>
   </p:cSld>
@@ -9174,7 +9110,7 @@
           <p:cNvPr id="1" name="s9-rule">
             <a:extLst xmlns:a="http://schemas.openxmlformats.org/drawingml/2006/main">
               <a:ext uri="{FF2B5EF4-FFF2-40B4-BE49-F238E27FC236}">
-                <a16:creationId xmlns:a16="http://schemas.microsoft.com/office/drawing/2014/main" id="{43147C58-A0CB-470E-AD5E-63196E155A63}"/>
+                <a16:creationId xmlns:a16="http://schemas.microsoft.com/office/drawing/2014/main" id="{5310AFFF-179E-44DD-95A3-BFE26FB49A61}"/>
               </a:ext>
             </a:extLst>
           </p:cNvPr>
@@ -9207,7 +9143,7 @@
           <p:cNvPr id="2" name="s9-eyebrow">
             <a:extLst xmlns:a="http://schemas.openxmlformats.org/drawingml/2006/main">
               <a:ext uri="{FF2B5EF4-FFF2-40B4-BE49-F238E27FC236}">
-                <a16:creationId xmlns:a16="http://schemas.microsoft.com/office/drawing/2014/main" id="{4F0FD8FD-4F3E-4D9F-A28C-7505AC1D1BDC}"/>
+                <a16:creationId xmlns:a16="http://schemas.microsoft.com/office/drawing/2014/main" id="{785CD12B-E7F7-45CF-B948-21725EBD610B}"/>
               </a:ext>
             </a:extLst>
           </p:cNvPr>
@@ -9265,7 +9201,7 @@
           <p:cNvPr id="3" name="s9-title">
             <a:extLst xmlns:a="http://schemas.openxmlformats.org/drawingml/2006/main">
               <a:ext uri="{FF2B5EF4-FFF2-40B4-BE49-F238E27FC236}">
-                <a16:creationId xmlns:a16="http://schemas.microsoft.com/office/drawing/2014/main" id="{5D775361-3402-497D-90A2-EA1296E581D0}"/>
+                <a16:creationId xmlns:a16="http://schemas.microsoft.com/office/drawing/2014/main" id="{35468188-CB86-45F5-B6D7-442B49B0C415}"/>
               </a:ext>
             </a:extLst>
           </p:cNvPr>
@@ -9323,7 +9259,7 @@
           <p:cNvPr id="4" name="s9-footer">
             <a:extLst xmlns:a="http://schemas.openxmlformats.org/drawingml/2006/main">
               <a:ext uri="{FF2B5EF4-FFF2-40B4-BE49-F238E27FC236}">
-                <a16:creationId xmlns:a16="http://schemas.microsoft.com/office/drawing/2014/main" id="{F3E3873B-E7D8-4D9A-8518-55E5C369A087}"/>
+                <a16:creationId xmlns:a16="http://schemas.microsoft.com/office/drawing/2014/main" id="{809CDFD4-E349-4E38-AA68-81A41883CCFD}"/>
               </a:ext>
             </a:extLst>
           </p:cNvPr>
@@ -9354,7 +9290,7 @@
           <p:cNvPr id="5" name="s9-identity">
             <a:extLst xmlns:a="http://schemas.openxmlformats.org/drawingml/2006/main">
               <a:ext uri="{FF2B5EF4-FFF2-40B4-BE49-F238E27FC236}">
-                <a16:creationId xmlns:a16="http://schemas.microsoft.com/office/drawing/2014/main" id="{0A782446-E659-410B-96B3-170D86359C31}"/>
+                <a16:creationId xmlns:a16="http://schemas.microsoft.com/office/drawing/2014/main" id="{EB765109-E844-43FB-AF88-4510D01A3792}"/>
               </a:ext>
             </a:extLst>
           </p:cNvPr>
@@ -9412,7 +9348,7 @@
           <p:cNvPr id="6" name="case-title">
             <a:extLst xmlns:a="http://schemas.openxmlformats.org/drawingml/2006/main">
               <a:ext uri="{FF2B5EF4-FFF2-40B4-BE49-F238E27FC236}">
-                <a16:creationId xmlns:a16="http://schemas.microsoft.com/office/drawing/2014/main" id="{5A9661A3-DB60-4F5D-AB31-DEFB5B043F47}"/>
+                <a16:creationId xmlns:a16="http://schemas.microsoft.com/office/drawing/2014/main" id="{AF0F5619-48D7-4DB2-859B-C3AA9DBCD52C}"/>
               </a:ext>
             </a:extLst>
           </p:cNvPr>
@@ -9476,7 +9412,7 @@
           <p:cNvPr id="7" name="case-row-0">
             <a:extLst xmlns:a="http://schemas.openxmlformats.org/drawingml/2006/main">
               <a:ext uri="{FF2B5EF4-FFF2-40B4-BE49-F238E27FC236}">
-                <a16:creationId xmlns:a16="http://schemas.microsoft.com/office/drawing/2014/main" id="{E12E5EF0-2944-4545-854A-9C46FC5E1D77}"/>
+                <a16:creationId xmlns:a16="http://schemas.microsoft.com/office/drawing/2014/main" id="{3851E92F-1E2B-421E-9763-0FD5475A4479}"/>
               </a:ext>
             </a:extLst>
           </p:cNvPr>
@@ -9540,7 +9476,7 @@
           <p:cNvPr id="8" name="case-row-1">
             <a:extLst xmlns:a="http://schemas.openxmlformats.org/drawingml/2006/main">
               <a:ext uri="{FF2B5EF4-FFF2-40B4-BE49-F238E27FC236}">
-                <a16:creationId xmlns:a16="http://schemas.microsoft.com/office/drawing/2014/main" id="{0D0689DD-17B7-4CA0-8018-3D9112B99C28}"/>
+                <a16:creationId xmlns:a16="http://schemas.microsoft.com/office/drawing/2014/main" id="{E1EB1277-0F36-4679-83B3-3E292D6221BA}"/>
               </a:ext>
             </a:extLst>
           </p:cNvPr>
@@ -9604,7 +9540,7 @@
           <p:cNvPr id="9" name="case-row-2">
             <a:extLst xmlns:a="http://schemas.openxmlformats.org/drawingml/2006/main">
               <a:ext uri="{FF2B5EF4-FFF2-40B4-BE49-F238E27FC236}">
-                <a16:creationId xmlns:a16="http://schemas.microsoft.com/office/drawing/2014/main" id="{5C460E74-99F1-49DC-9BC9-1BF758D203A8}"/>
+                <a16:creationId xmlns:a16="http://schemas.microsoft.com/office/drawing/2014/main" id="{6C431C8C-9F49-452F-A6D8-90AA4117CD3B}"/>
               </a:ext>
             </a:extLst>
           </p:cNvPr>
@@ -9668,7 +9604,7 @@
           <p:cNvPr id="10" name="s9-takeaway-rule">
             <a:extLst xmlns:a="http://schemas.openxmlformats.org/drawingml/2006/main">
               <a:ext uri="{FF2B5EF4-FFF2-40B4-BE49-F238E27FC236}">
-                <a16:creationId xmlns:a16="http://schemas.microsoft.com/office/drawing/2014/main" id="{4624F725-C39F-4992-BE6E-91444A07B9A3}"/>
+                <a16:creationId xmlns:a16="http://schemas.microsoft.com/office/drawing/2014/main" id="{4AE82377-8581-432A-B228-9BBCCACECDAA}"/>
               </a:ext>
             </a:extLst>
           </p:cNvPr>
@@ -9701,7 +9637,7 @@
           <p:cNvPr id="11" name="s9-takeaway">
             <a:extLst xmlns:a="http://schemas.openxmlformats.org/drawingml/2006/main">
               <a:ext uri="{FF2B5EF4-FFF2-40B4-BE49-F238E27FC236}">
-                <a16:creationId xmlns:a16="http://schemas.microsoft.com/office/drawing/2014/main" id="{282E5195-A91F-484B-9FD3-07A63EDF7901}"/>
+                <a16:creationId xmlns:a16="http://schemas.microsoft.com/office/drawing/2014/main" id="{53B3A34E-F312-4316-A047-85559E4F4E8A}"/>
               </a:ext>
             </a:extLst>
           </p:cNvPr>
@@ -9757,7 +9693,7 @@
     </p:spTree>
     <p:extLst>
       <p:ext uri="{BB962C8B-B14F-4D97-AF65-F5344CB8AC3E}">
-        <p14:creationId xmlns:p14="http://schemas.microsoft.com/office/powerpoint/2010/main" val="209667219"/>
+        <p14:creationId xmlns:p14="http://schemas.microsoft.com/office/powerpoint/2010/main" val="1133916264"/>
       </p:ext>
     </p:extLst>
   </p:cSld>
